--- a/Projects/Module11b-TheCommandAllowList/Module11b - Shell Command Execution - The Command Allow List.pptx
+++ b/Projects/Module11b-TheCommandAllowList/Module11b - Shell Command Execution - The Command Allow List.pptx
@@ -507,7 +507,7 @@
           <a:p>
             <a:r>
               <a:rPr lang="en-US" dirty="0"/>
-              <a:t/>
+              <a:t>Second half of Module 11. Ships as part of Phase 3 Capstone — Autonomous Fixer (v0.3). CommandAllowList has no constructor parameters and no state beyond the fixed array: nothing reads a file, an environment variable, or the repository’s AGENTS.md. The list a viewer sees in that file is the complete, only list MiniCode enforces.</a:t>
             </a:r>
             <a:endParaRPr lang="en-US" dirty="0"/>
           </a:p>
@@ -771,7 +771,7 @@
           <a:p>
             <a:r>
               <a:rPr lang="en-US" dirty="0"/>
-              <a:t/>
+              <a:t>CodingAgentFactory now builds new AllowListedShellExecutor(new ShellExecutor(), new CommandAllowList()) in place of the bare ShellExecutor and hands that to ToolCatalog exactly as before — ToolCatalog’s constructor does not change, because it never depended on which IShellExecutor it received. run_command’s description gains one clause: "Restricted to a fixed allow list; a refusal names what is permitted."</a:t>
             </a:r>
             <a:endParaRPr lang="en-US" dirty="0"/>
           </a:p>
@@ -1323,22 +1323,22 @@
       <p:sp>
         <p:nvSpPr>
           <p:cNvPr id="2" name="Text 0"/>
-          <p:cNvSpPr/>
-          <p:nvPr/>
-        </p:nvSpPr>
-        <p:spPr>
-          <a:xfrm>
-            <a:off x="822960" y="1143000"/>
-            <a:ext cx="5486400" cy="365760"/>
-          </a:xfrm>
-          <a:prstGeom prst="rect">
-            <a:avLst/>
-          </a:prstGeom>
-          <a:noFill/>
-          <a:ln/>
-        </p:spPr>
-        <p:txBody>
-          <a:bodyPr wrap="square" rtlCol="0" anchor="ctr"/>
+          <p:cNvSpPr txBox="1"/>
+          <p:nvPr/>
+        </p:nvSpPr>
+        <p:spPr>
+          <a:xfrm>
+            <a:off x="548640" y="1598168"/>
+            <a:ext cx="5852160" cy="274320"/>
+          </a:xfrm>
+          <a:prstGeom prst="rect">
+            <a:avLst/>
+          </a:prstGeom>
+          <a:noFill/>
+          <a:ln/>
+        </p:spPr>
+        <p:txBody>
+          <a:bodyPr wrap="square" lIns="0" tIns="0" rIns="0" bIns="0" rtlCol="0" anchor="ctr"/>
           <a:lstStyle/>
           <a:p>
             <a:pPr indent="0" marL="0">
@@ -1353,7 +1353,7 @@
                 <a:ea typeface="Calibri" pitchFamily="34" charset="-122"/>
                 <a:cs typeface="Calibri" pitchFamily="34" charset="-120"/>
               </a:rPr>
-              <a:t>MODULE 11B</a:t>
+              <a:t>MODULE 11B · PHASE 3</a:t>
             </a:r>
             <a:endParaRPr lang="en-US" sz="1400" dirty="0"/>
           </a:p>
@@ -1362,27 +1362,27 @@
       <p:sp>
         <p:nvSpPr>
           <p:cNvPr id="3" name="Text 1"/>
-          <p:cNvSpPr/>
-          <p:nvPr/>
-        </p:nvSpPr>
-        <p:spPr>
-          <a:xfrm>
-            <a:off x="777240" y="1508760"/>
-            <a:ext cx="7589520" cy="1828800"/>
-          </a:xfrm>
-          <a:prstGeom prst="rect">
-            <a:avLst/>
-          </a:prstGeom>
-          <a:noFill/>
-          <a:ln/>
-        </p:spPr>
-        <p:txBody>
-          <a:bodyPr wrap="square" rtlCol="0" anchor="ctr"/>
-          <a:lstStyle/>
-          <a:p>
-            <a:pPr indent="0" marL="0">
-              <a:lnSpc>
-                <a:spcPts val="4600"/>
+          <p:cNvSpPr txBox="1"/>
+          <p:nvPr/>
+        </p:nvSpPr>
+        <p:spPr>
+          <a:xfrm>
+            <a:off x="548640" y="1982216"/>
+            <a:ext cx="6309360" cy="1247648"/>
+          </a:xfrm>
+          <a:prstGeom prst="rect">
+            <a:avLst/>
+          </a:prstGeom>
+          <a:noFill/>
+          <a:ln/>
+        </p:spPr>
+        <p:txBody>
+          <a:bodyPr wrap="square" lIns="0" tIns="0" rIns="0" bIns="0" rtlCol="0" anchor="t"/>
+          <a:lstStyle/>
+          <a:p>
+            <a:pPr indent="0" marL="0">
+              <a:lnSpc>
+                <a:spcPct val="112000"/>
               </a:lnSpc>
               <a:buNone/>
             </a:pPr>
@@ -1402,7 +1402,7 @@
           <a:p>
             <a:pPr indent="0" marL="0">
               <a:lnSpc>
-                <a:spcPts val="4600"/>
+                <a:spcPct val="112000"/>
               </a:lnSpc>
               <a:buNone/>
             </a:pPr>
@@ -1424,27 +1424,27 @@
       <p:sp>
         <p:nvSpPr>
           <p:cNvPr id="4" name="Text 2"/>
-          <p:cNvSpPr/>
-          <p:nvPr/>
-        </p:nvSpPr>
-        <p:spPr>
-          <a:xfrm>
-            <a:off x="822960" y="3337560"/>
-            <a:ext cx="6858000" cy="822960"/>
-          </a:xfrm>
-          <a:prstGeom prst="rect">
-            <a:avLst/>
-          </a:prstGeom>
-          <a:noFill/>
-          <a:ln/>
-        </p:spPr>
-        <p:txBody>
-          <a:bodyPr wrap="square" rtlCol="0" anchor="ctr"/>
-          <a:lstStyle/>
-          <a:p>
-            <a:pPr indent="0" marL="0">
-              <a:lnSpc>
-                <a:spcPts val="2200"/>
+          <p:cNvSpPr txBox="1"/>
+          <p:nvPr/>
+        </p:nvSpPr>
+        <p:spPr>
+          <a:xfrm>
+            <a:off x="548640" y="3732784"/>
+            <a:ext cx="6309360" cy="1097280"/>
+          </a:xfrm>
+          <a:prstGeom prst="rect">
+            <a:avLst/>
+          </a:prstGeom>
+          <a:noFill/>
+          <a:ln/>
+        </p:spPr>
+        <p:txBody>
+          <a:bodyPr wrap="square" lIns="0" tIns="0" rIns="0" bIns="0" rtlCol="0" anchor="t"/>
+          <a:lstStyle/>
+          <a:p>
+            <a:pPr indent="0" marL="0">
+              <a:lnSpc>
+                <a:spcPct val="125000"/>
               </a:lnSpc>
               <a:buNone/>
             </a:pPr>
@@ -1457,7 +1457,7 @@
                 <a:ea typeface="Calibri" pitchFamily="34" charset="-122"/>
                 <a:cs typeface="Calibri" pitchFamily="34" charset="-120"/>
               </a:rPr>
-              <a:t>11a made run_command run correctly. This decides whether it should run at all.</a:t>
+              <a:t>Module 11a made run_command run a process correctly — no shell, a timeout, captured output. It never asked whether the process should run. This Module puts a fixed allow list in front of it, so dotnet build starts and everything else is refused before a process ever exists.</a:t>
             </a:r>
             <a:endParaRPr lang="en-US" sz="1600" dirty="0"/>
           </a:p>
@@ -1465,18 +1465,153 @@
       </p:sp>
       <p:sp>
         <p:nvSpPr>
-          <p:cNvPr id="5" name="Shape 3"/>
+          <p:cNvPr id="5" name="Text 3"/>
+          <p:cNvSpPr txBox="1"/>
+          <p:nvPr/>
+        </p:nvSpPr>
+        <p:spPr>
+          <a:xfrm>
+            <a:off x="548640" y="5029200"/>
+            <a:ext cx="6309360" cy="1051560"/>
+          </a:xfrm>
+          <a:prstGeom prst="rect">
+            <a:avLst/>
+          </a:prstGeom>
+          <a:noFill/>
+          <a:ln/>
+        </p:spPr>
+        <p:txBody>
+          <a:bodyPr wrap="square" lIns="0" tIns="0" rIns="0" bIns="0" rtlCol="0" anchor="t"/>
+          <a:lstStyle/>
+          <a:p>
+            <a:pPr indent="0" marL="0">
+              <a:lnSpc>
+                <a:spcPts val="1300"/>
+              </a:lnSpc>
+              <a:buNone/>
+            </a:pPr>
+            <a:r>
+              <a:rPr lang="en-US" sz="950" b="1" spc="100" kern="0" dirty="0">
+                <a:solidFill>
+                  <a:srgbClr val="3FBFB0"/>
+                </a:solidFill>
+                <a:latin typeface="Courier New" pitchFamily="34" charset="0"/>
+                <a:ea typeface="Courier New" pitchFamily="34" charset="-122"/>
+                <a:cs typeface="Courier New" pitchFamily="34" charset="-120"/>
+              </a:rPr>
+              <a:t>START  </a:t>
+            </a:r>
+            <a:pPr indent="0" marL="0">
+              <a:lnSpc>
+                <a:spcPts val="1300"/>
+              </a:lnSpc>
+              <a:buNone/>
+            </a:pPr>
+            <a:r>
+              <a:rPr lang="en-US" sz="950" dirty="0">
+                <a:solidFill>
+                  <a:srgbClr val="CADCFC"/>
+                </a:solidFill>
+                <a:latin typeface="Courier New" pitchFamily="34" charset="0"/>
+                <a:ea typeface="Courier New" pitchFamily="34" charset="-122"/>
+                <a:cs typeface="Courier New" pitchFamily="34" charset="-120"/>
+              </a:rPr>
+              <a:t>Module11a-RunningAProcessSafely/ — IShellExecutor and ShellTools are untouched; nothing about them needed to change.</a:t>
+            </a:r>
+            <a:endParaRPr lang="en-US" sz="950" dirty="0"/>
+          </a:p>
+          <a:p>
+            <a:pPr indent="0" marL="0">
+              <a:lnSpc>
+                <a:spcPts val="1300"/>
+              </a:lnSpc>
+              <a:buNone/>
+            </a:pPr>
+            <a:r>
+              <a:rPr lang="en-US" sz="950" b="1" spc="100" kern="0" dirty="0">
+                <a:solidFill>
+                  <a:srgbClr val="3FBFB0"/>
+                </a:solidFill>
+                <a:latin typeface="Courier New" pitchFamily="34" charset="0"/>
+                <a:ea typeface="Courier New" pitchFamily="34" charset="-122"/>
+                <a:cs typeface="Courier New" pitchFamily="34" charset="-120"/>
+              </a:rPr>
+              <a:t>SETUP  </a:t>
+            </a:r>
+            <a:pPr indent="0" marL="0">
+              <a:lnSpc>
+                <a:spcPts val="1300"/>
+              </a:lnSpc>
+              <a:buNone/>
+            </a:pPr>
+            <a:r>
+              <a:rPr lang="en-US" sz="950" dirty="0">
+                <a:solidFill>
+                  <a:srgbClr val="CADCFC"/>
+                </a:solidFill>
+                <a:latin typeface="Courier New" pitchFamily="34" charset="0"/>
+                <a:ea typeface="Courier New" pitchFamily="34" charset="-122"/>
+                <a:cs typeface="Courier New" pitchFamily="34" charset="-120"/>
+              </a:rPr>
+              <a:t>Nothing new. MiniCode.Infrastructure still has zero package references.</a:t>
+            </a:r>
+            <a:endParaRPr lang="en-US" sz="950" dirty="0"/>
+          </a:p>
+        </p:txBody>
+      </p:sp>
+      <p:sp>
+        <p:nvSpPr>
+          <p:cNvPr id="6" name="Text 4"/>
+          <p:cNvSpPr txBox="1"/>
+          <p:nvPr/>
+        </p:nvSpPr>
+        <p:spPr>
+          <a:xfrm>
+            <a:off x="548640" y="6263640"/>
+            <a:ext cx="5486400" cy="274320"/>
+          </a:xfrm>
+          <a:prstGeom prst="rect">
+            <a:avLst/>
+          </a:prstGeom>
+          <a:noFill/>
+          <a:ln/>
+        </p:spPr>
+        <p:txBody>
+          <a:bodyPr wrap="square" lIns="0" tIns="0" rIns="0" bIns="0" rtlCol="0" anchor="ctr"/>
+          <a:lstStyle/>
+          <a:p>
+            <a:pPr indent="0" marL="0">
+              <a:buNone/>
+            </a:pPr>
+            <a:r>
+              <a:rPr lang="en-US" sz="1100" dirty="0">
+                <a:solidFill>
+                  <a:srgbClr val="CADCFC"/>
+                </a:solidFill>
+                <a:latin typeface="Calibri" pitchFamily="34" charset="0"/>
+                <a:ea typeface="Calibri" pitchFamily="34" charset="-122"/>
+                <a:cs typeface="Calibri" pitchFamily="34" charset="-120"/>
+              </a:rPr>
+              <a:t>MiniCode Course · Phase 3</a:t>
+            </a:r>
+            <a:endParaRPr lang="en-US" sz="1100" dirty="0"/>
+          </a:p>
+        </p:txBody>
+      </p:sp>
+      <p:sp>
+        <p:nvSpPr>
+          <p:cNvPr id="7" name="Shape 5"/>
           <p:cNvSpPr/>
           <p:nvPr/>
         </p:nvSpPr>
         <p:spPr>
           <a:xfrm>
-            <a:off x="8138160" y="1417320"/>
-            <a:ext cx="3383280" cy="3840480"/>
+            <a:off x="7086600" y="1143000"/>
+            <a:ext cx="4526280" cy="4389120"/>
           </a:xfrm>
           <a:prstGeom prst="roundRect">
             <a:avLst>
-              <a:gd name="adj" fmla="val 3243"/>
+              <a:gd name="adj" fmla="val 2500"/>
             </a:avLst>
           </a:prstGeom>
           <a:solidFill>
@@ -1490,56 +1625,32 @@
           </a:ln>
         </p:spPr>
       </p:sp>
-      <p:pic>
-        <p:nvPicPr>
-          <p:cNvPr id="6" name="Image 0" descr="/home/claude/deck16/icons/listcheck.png">    </p:cNvPr>
-          <p:cNvPicPr>
-            <a:picLocks noChangeAspect="1"/>
-          </p:cNvPicPr>
-          <p:nvPr/>
-        </p:nvPicPr>
-        <p:blipFill>
-          <a:blip r:embed="rId1"/>
-          <a:stretch>
-            <a:fillRect/>
-          </a:stretch>
-        </p:blipFill>
-        <p:spPr>
-          <a:xfrm>
-            <a:off x="8366760" y="1645920"/>
-            <a:ext cx="365760" cy="365760"/>
-          </a:xfrm>
-          <a:prstGeom prst="rect">
-            <a:avLst/>
-          </a:prstGeom>
-        </p:spPr>
-      </p:pic>
-      <p:sp>
-        <p:nvSpPr>
-          <p:cNvPr id="7" name="Text 4"/>
-          <p:cNvSpPr/>
-          <p:nvPr/>
-        </p:nvSpPr>
-        <p:spPr>
-          <a:xfrm>
-            <a:off x="8823960" y="1673352"/>
-            <a:ext cx="2468880" cy="320040"/>
-          </a:xfrm>
-          <a:prstGeom prst="rect">
-            <a:avLst/>
-          </a:prstGeom>
-          <a:noFill/>
-          <a:ln/>
-        </p:spPr>
-        <p:txBody>
-          <a:bodyPr wrap="square" rtlCol="0" anchor="ctr"/>
-          <a:lstStyle/>
-          <a:p>
-            <a:pPr indent="0" marL="0">
-              <a:buNone/>
-            </a:pPr>
-            <a:r>
-              <a:rPr lang="en-US" sz="1300" b="1" dirty="0">
+      <p:sp>
+        <p:nvSpPr>
+          <p:cNvPr id="8" name="Text 6"/>
+          <p:cNvSpPr txBox="1"/>
+          <p:nvPr/>
+        </p:nvSpPr>
+        <p:spPr>
+          <a:xfrm>
+            <a:off x="7342632" y="1344168"/>
+            <a:ext cx="4069080" cy="274320"/>
+          </a:xfrm>
+          <a:prstGeom prst="rect">
+            <a:avLst/>
+          </a:prstGeom>
+          <a:noFill/>
+          <a:ln/>
+        </p:spPr>
+        <p:txBody>
+          <a:bodyPr wrap="square" lIns="0" tIns="0" rIns="0" bIns="0" rtlCol="0" anchor="ctr"/>
+          <a:lstStyle/>
+          <a:p>
+            <a:pPr indent="0" marL="0">
+              <a:buNone/>
+            </a:pPr>
+            <a:r>
+              <a:rPr lang="en-US" sz="1200" b="1" dirty="0">
                 <a:solidFill>
                   <a:srgbClr val="3FBFB0"/>
                 </a:solidFill>
@@ -1547,60 +1658,40 @@
                 <a:ea typeface="Courier New" pitchFamily="34" charset="-122"/>
                 <a:cs typeface="Courier New" pitchFamily="34" charset="-120"/>
               </a:rPr>
-              <a:t>the allow list</a:t>
-            </a:r>
-            <a:endParaRPr lang="en-US" sz="1300" dirty="0"/>
-          </a:p>
-        </p:txBody>
-      </p:sp>
-      <p:sp>
-        <p:nvSpPr>
-          <p:cNvPr id="8" name="Shape 5"/>
-          <p:cNvSpPr/>
-          <p:nvPr/>
-        </p:nvSpPr>
-        <p:spPr>
-          <a:xfrm>
-            <a:off x="8366760" y="2240280"/>
-            <a:ext cx="109728" cy="109728"/>
-          </a:xfrm>
-          <a:prstGeom prst="ellipse">
-            <a:avLst/>
-          </a:prstGeom>
-          <a:solidFill>
-            <a:srgbClr val="4ADE80"/>
-          </a:solidFill>
-          <a:ln/>
-        </p:spPr>
-      </p:sp>
-      <p:sp>
-        <p:nvSpPr>
-          <p:cNvPr id="9" name="Text 6"/>
-          <p:cNvSpPr/>
-          <p:nvPr/>
-        </p:nvSpPr>
-        <p:spPr>
-          <a:xfrm>
-            <a:off x="8595360" y="2194560"/>
-            <a:ext cx="2651760" cy="292608"/>
-          </a:xfrm>
-          <a:prstGeom prst="rect">
-            <a:avLst/>
-          </a:prstGeom>
-          <a:noFill/>
-          <a:ln/>
-        </p:spPr>
-        <p:txBody>
-          <a:bodyPr wrap="square" rtlCol="0" anchor="ctr"/>
-          <a:lstStyle/>
-          <a:p>
-            <a:pPr indent="0" marL="0">
-              <a:buNone/>
-            </a:pPr>
-            <a:r>
-              <a:rPr lang="en-US" sz="1100" dirty="0">
-                <a:solidFill>
-                  <a:srgbClr val="FFFFFF"/>
+              <a:t>the complete list</a:t>
+            </a:r>
+            <a:endParaRPr lang="en-US" sz="1200" dirty="0"/>
+          </a:p>
+        </p:txBody>
+      </p:sp>
+      <p:sp>
+        <p:nvSpPr>
+          <p:cNvPr id="9" name="Text 7"/>
+          <p:cNvSpPr txBox="1"/>
+          <p:nvPr/>
+        </p:nvSpPr>
+        <p:spPr>
+          <a:xfrm>
+            <a:off x="7360920" y="1783080"/>
+            <a:ext cx="3977640" cy="237744"/>
+          </a:xfrm>
+          <a:prstGeom prst="rect">
+            <a:avLst/>
+          </a:prstGeom>
+          <a:noFill/>
+          <a:ln/>
+        </p:spPr>
+        <p:txBody>
+          <a:bodyPr wrap="square" lIns="0" tIns="0" rIns="0" bIns="0" rtlCol="0" anchor="ctr"/>
+          <a:lstStyle/>
+          <a:p>
+            <a:pPr indent="0" marL="0">
+              <a:buNone/>
+            </a:pPr>
+            <a:r>
+              <a:rPr lang="en-US" sz="1050" dirty="0">
+                <a:solidFill>
+                  <a:srgbClr val="CADCFC"/>
                 </a:solidFill>
                 <a:latin typeface="Courier New" pitchFamily="34" charset="0"/>
                 <a:ea typeface="Courier New" pitchFamily="34" charset="-122"/>
@@ -1608,58 +1699,38 @@
               </a:rPr>
               <a:t>dotnet restore</a:t>
             </a:r>
-            <a:endParaRPr lang="en-US" sz="1100" dirty="0"/>
-          </a:p>
-        </p:txBody>
-      </p:sp>
-      <p:sp>
-        <p:nvSpPr>
-          <p:cNvPr id="10" name="Shape 7"/>
-          <p:cNvSpPr/>
-          <p:nvPr/>
-        </p:nvSpPr>
-        <p:spPr>
-          <a:xfrm>
-            <a:off x="8366760" y="2624328"/>
-            <a:ext cx="109728" cy="109728"/>
-          </a:xfrm>
-          <a:prstGeom prst="ellipse">
-            <a:avLst/>
-          </a:prstGeom>
-          <a:solidFill>
-            <a:srgbClr val="4ADE80"/>
-          </a:solidFill>
-          <a:ln/>
-        </p:spPr>
-      </p:sp>
-      <p:sp>
-        <p:nvSpPr>
-          <p:cNvPr id="11" name="Text 8"/>
-          <p:cNvSpPr/>
-          <p:nvPr/>
-        </p:nvSpPr>
-        <p:spPr>
-          <a:xfrm>
-            <a:off x="8595360" y="2578608"/>
-            <a:ext cx="2651760" cy="292608"/>
-          </a:xfrm>
-          <a:prstGeom prst="rect">
-            <a:avLst/>
-          </a:prstGeom>
-          <a:noFill/>
-          <a:ln/>
-        </p:spPr>
-        <p:txBody>
-          <a:bodyPr wrap="square" rtlCol="0" anchor="ctr"/>
-          <a:lstStyle/>
-          <a:p>
-            <a:pPr indent="0" marL="0">
-              <a:buNone/>
-            </a:pPr>
-            <a:r>
-              <a:rPr lang="en-US" sz="1100" dirty="0">
-                <a:solidFill>
-                  <a:srgbClr val="FFFFFF"/>
+            <a:endParaRPr lang="en-US" sz="1050" dirty="0"/>
+          </a:p>
+        </p:txBody>
+      </p:sp>
+      <p:sp>
+        <p:nvSpPr>
+          <p:cNvPr id="10" name="Text 8"/>
+          <p:cNvSpPr txBox="1"/>
+          <p:nvPr/>
+        </p:nvSpPr>
+        <p:spPr>
+          <a:xfrm>
+            <a:off x="7360920" y="2039112"/>
+            <a:ext cx="3977640" cy="237744"/>
+          </a:xfrm>
+          <a:prstGeom prst="rect">
+            <a:avLst/>
+          </a:prstGeom>
+          <a:noFill/>
+          <a:ln/>
+        </p:spPr>
+        <p:txBody>
+          <a:bodyPr wrap="square" lIns="0" tIns="0" rIns="0" bIns="0" rtlCol="0" anchor="ctr"/>
+          <a:lstStyle/>
+          <a:p>
+            <a:pPr indent="0" marL="0">
+              <a:buNone/>
+            </a:pPr>
+            <a:r>
+              <a:rPr lang="en-US" sz="1050" dirty="0">
+                <a:solidFill>
+                  <a:srgbClr val="CADCFC"/>
                 </a:solidFill>
                 <a:latin typeface="Courier New" pitchFamily="34" charset="0"/>
                 <a:ea typeface="Courier New" pitchFamily="34" charset="-122"/>
@@ -1667,58 +1738,38 @@
               </a:rPr>
               <a:t>dotnet build</a:t>
             </a:r>
-            <a:endParaRPr lang="en-US" sz="1100" dirty="0"/>
-          </a:p>
-        </p:txBody>
-      </p:sp>
-      <p:sp>
-        <p:nvSpPr>
-          <p:cNvPr id="12" name="Shape 9"/>
-          <p:cNvSpPr/>
-          <p:nvPr/>
-        </p:nvSpPr>
-        <p:spPr>
-          <a:xfrm>
-            <a:off x="8366760" y="3008376"/>
-            <a:ext cx="109728" cy="109728"/>
-          </a:xfrm>
-          <a:prstGeom prst="ellipse">
-            <a:avLst/>
-          </a:prstGeom>
-          <a:solidFill>
-            <a:srgbClr val="4ADE80"/>
-          </a:solidFill>
-          <a:ln/>
-        </p:spPr>
-      </p:sp>
-      <p:sp>
-        <p:nvSpPr>
-          <p:cNvPr id="13" name="Text 10"/>
-          <p:cNvSpPr/>
-          <p:nvPr/>
-        </p:nvSpPr>
-        <p:spPr>
-          <a:xfrm>
-            <a:off x="8595360" y="2962656"/>
-            <a:ext cx="2651760" cy="292608"/>
-          </a:xfrm>
-          <a:prstGeom prst="rect">
-            <a:avLst/>
-          </a:prstGeom>
-          <a:noFill/>
-          <a:ln/>
-        </p:spPr>
-        <p:txBody>
-          <a:bodyPr wrap="square" rtlCol="0" anchor="ctr"/>
-          <a:lstStyle/>
-          <a:p>
-            <a:pPr indent="0" marL="0">
-              <a:buNone/>
-            </a:pPr>
-            <a:r>
-              <a:rPr lang="en-US" sz="1100" dirty="0">
-                <a:solidFill>
-                  <a:srgbClr val="FFFFFF"/>
+            <a:endParaRPr lang="en-US" sz="1050" dirty="0"/>
+          </a:p>
+        </p:txBody>
+      </p:sp>
+      <p:sp>
+        <p:nvSpPr>
+          <p:cNvPr id="11" name="Text 9"/>
+          <p:cNvSpPr txBox="1"/>
+          <p:nvPr/>
+        </p:nvSpPr>
+        <p:spPr>
+          <a:xfrm>
+            <a:off x="7360920" y="2295144"/>
+            <a:ext cx="3977640" cy="237744"/>
+          </a:xfrm>
+          <a:prstGeom prst="rect">
+            <a:avLst/>
+          </a:prstGeom>
+          <a:noFill/>
+          <a:ln/>
+        </p:spPr>
+        <p:txBody>
+          <a:bodyPr wrap="square" lIns="0" tIns="0" rIns="0" bIns="0" rtlCol="0" anchor="ctr"/>
+          <a:lstStyle/>
+          <a:p>
+            <a:pPr indent="0" marL="0">
+              <a:buNone/>
+            </a:pPr>
+            <a:r>
+              <a:rPr lang="en-US" sz="1050" dirty="0">
+                <a:solidFill>
+                  <a:srgbClr val="CADCFC"/>
                 </a:solidFill>
                 <a:latin typeface="Courier New" pitchFamily="34" charset="0"/>
                 <a:ea typeface="Courier New" pitchFamily="34" charset="-122"/>
@@ -1726,58 +1777,38 @@
               </a:rPr>
               <a:t>dotnet test</a:t>
             </a:r>
-            <a:endParaRPr lang="en-US" sz="1100" dirty="0"/>
-          </a:p>
-        </p:txBody>
-      </p:sp>
-      <p:sp>
-        <p:nvSpPr>
-          <p:cNvPr id="14" name="Shape 11"/>
-          <p:cNvSpPr/>
-          <p:nvPr/>
-        </p:nvSpPr>
-        <p:spPr>
-          <a:xfrm>
-            <a:off x="8366760" y="3392424"/>
-            <a:ext cx="109728" cy="109728"/>
-          </a:xfrm>
-          <a:prstGeom prst="ellipse">
-            <a:avLst/>
-          </a:prstGeom>
-          <a:solidFill>
-            <a:srgbClr val="4ADE80"/>
-          </a:solidFill>
-          <a:ln/>
-        </p:spPr>
-      </p:sp>
-      <p:sp>
-        <p:nvSpPr>
-          <p:cNvPr id="15" name="Text 12"/>
-          <p:cNvSpPr/>
-          <p:nvPr/>
-        </p:nvSpPr>
-        <p:spPr>
-          <a:xfrm>
-            <a:off x="8595360" y="3346704"/>
-            <a:ext cx="2651760" cy="292608"/>
-          </a:xfrm>
-          <a:prstGeom prst="rect">
-            <a:avLst/>
-          </a:prstGeom>
-          <a:noFill/>
-          <a:ln/>
-        </p:spPr>
-        <p:txBody>
-          <a:bodyPr wrap="square" rtlCol="0" anchor="ctr"/>
-          <a:lstStyle/>
-          <a:p>
-            <a:pPr indent="0" marL="0">
-              <a:buNone/>
-            </a:pPr>
-            <a:r>
-              <a:rPr lang="en-US" sz="1100" dirty="0">
-                <a:solidFill>
-                  <a:srgbClr val="FFFFFF"/>
+            <a:endParaRPr lang="en-US" sz="1050" dirty="0"/>
+          </a:p>
+        </p:txBody>
+      </p:sp>
+      <p:sp>
+        <p:nvSpPr>
+          <p:cNvPr id="12" name="Text 10"/>
+          <p:cNvSpPr txBox="1"/>
+          <p:nvPr/>
+        </p:nvSpPr>
+        <p:spPr>
+          <a:xfrm>
+            <a:off x="7360920" y="2551176"/>
+            <a:ext cx="3977640" cy="237744"/>
+          </a:xfrm>
+          <a:prstGeom prst="rect">
+            <a:avLst/>
+          </a:prstGeom>
+          <a:noFill/>
+          <a:ln/>
+        </p:spPr>
+        <p:txBody>
+          <a:bodyPr wrap="square" lIns="0" tIns="0" rIns="0" bIns="0" rtlCol="0" anchor="ctr"/>
+          <a:lstStyle/>
+          <a:p>
+            <a:pPr indent="0" marL="0">
+              <a:buNone/>
+            </a:pPr>
+            <a:r>
+              <a:rPr lang="en-US" sz="1050" dirty="0">
+                <a:solidFill>
+                  <a:srgbClr val="CADCFC"/>
                 </a:solidFill>
                 <a:latin typeface="Courier New" pitchFamily="34" charset="0"/>
                 <a:ea typeface="Courier New" pitchFamily="34" charset="-122"/>
@@ -1785,131 +1816,192 @@
               </a:rPr>
               <a:t>dotnet format</a:t>
             </a:r>
-            <a:endParaRPr lang="en-US" sz="1100" dirty="0"/>
-          </a:p>
-        </p:txBody>
-      </p:sp>
-      <p:sp>
-        <p:nvSpPr>
-          <p:cNvPr id="16" name="Shape 13"/>
+            <a:endParaRPr lang="en-US" sz="1050" dirty="0"/>
+          </a:p>
+        </p:txBody>
+      </p:sp>
+      <p:sp>
+        <p:nvSpPr>
+          <p:cNvPr id="13" name="Text 11"/>
+          <p:cNvSpPr txBox="1"/>
+          <p:nvPr/>
+        </p:nvSpPr>
+        <p:spPr>
+          <a:xfrm>
+            <a:off x="7360920" y="2807208"/>
+            <a:ext cx="3977640" cy="237744"/>
+          </a:xfrm>
+          <a:prstGeom prst="rect">
+            <a:avLst/>
+          </a:prstGeom>
+          <a:noFill/>
+          <a:ln/>
+        </p:spPr>
+        <p:txBody>
+          <a:bodyPr wrap="square" lIns="0" tIns="0" rIns="0" bIns="0" rtlCol="0" anchor="ctr"/>
+          <a:lstStyle/>
+          <a:p>
+            <a:pPr indent="0" marL="0">
+              <a:buNone/>
+            </a:pPr>
+            <a:endParaRPr lang="en-US" sz="1050" dirty="0"/>
+          </a:p>
+        </p:txBody>
+      </p:sp>
+      <p:sp>
+        <p:nvSpPr>
+          <p:cNvPr id="14" name="Text 12"/>
+          <p:cNvSpPr txBox="1"/>
+          <p:nvPr/>
+        </p:nvSpPr>
+        <p:spPr>
+          <a:xfrm>
+            <a:off x="7360920" y="3063240"/>
+            <a:ext cx="3977640" cy="237744"/>
+          </a:xfrm>
+          <a:prstGeom prst="rect">
+            <a:avLst/>
+          </a:prstGeom>
+          <a:noFill/>
+          <a:ln/>
+        </p:spPr>
+        <p:txBody>
+          <a:bodyPr wrap="square" lIns="0" tIns="0" rIns="0" bIns="0" rtlCol="0" anchor="ctr"/>
+          <a:lstStyle/>
+          <a:p>
+            <a:pPr indent="0" marL="0">
+              <a:buNone/>
+            </a:pPr>
+            <a:r>
+              <a:rPr lang="en-US" sz="1050" dirty="0">
+                <a:solidFill>
+                  <a:srgbClr val="CADCFC"/>
+                </a:solidFill>
+                <a:latin typeface="Courier New" pitchFamily="34" charset="0"/>
+                <a:ea typeface="Courier New" pitchFamily="34" charset="-122"/>
+                <a:cs typeface="Courier New" pitchFamily="34" charset="-120"/>
+              </a:rPr>
+              <a:t>"dotnet" alone: absent</a:t>
+            </a:r>
+            <a:endParaRPr lang="en-US" sz="1050" dirty="0"/>
+          </a:p>
+        </p:txBody>
+      </p:sp>
+      <p:sp>
+        <p:nvSpPr>
+          <p:cNvPr id="15" name="Shape 13"/>
           <p:cNvSpPr/>
           <p:nvPr/>
         </p:nvSpPr>
         <p:spPr>
           <a:xfrm>
-            <a:off x="8366760" y="3867912"/>
-            <a:ext cx="2926080" cy="0"/>
+            <a:off x="7342632" y="3520440"/>
+            <a:ext cx="4014216" cy="0"/>
           </a:xfrm>
           <a:prstGeom prst="line">
             <a:avLst/>
           </a:prstGeom>
           <a:noFill/>
-          <a:ln w="6350">
+          <a:ln w="9525">
             <a:solidFill>
               <a:srgbClr val="6B7280"/>
             </a:solidFill>
-            <a:prstDash val="dash"/>
+            <a:prstDash val="sysDot"/>
           </a:ln>
         </p:spPr>
       </p:sp>
       <p:sp>
         <p:nvSpPr>
-          <p:cNvPr id="17" name="Text 14"/>
-          <p:cNvSpPr/>
-          <p:nvPr/>
-        </p:nvSpPr>
-        <p:spPr>
-          <a:xfrm>
-            <a:off x="8366760" y="4005072"/>
-            <a:ext cx="2926080" cy="640080"/>
-          </a:xfrm>
-          <a:prstGeom prst="rect">
-            <a:avLst/>
-          </a:prstGeom>
-          <a:noFill/>
-          <a:ln/>
-        </p:spPr>
-        <p:txBody>
-          <a:bodyPr wrap="square" rtlCol="0" anchor="ctr"/>
-          <a:lstStyle/>
-          <a:p>
-            <a:pPr indent="0" marL="0">
-              <a:lnSpc>
-                <a:spcPts val="1400"/>
-              </a:lnSpc>
-              <a:buNone/>
-            </a:pPr>
-            <a:r>
-              <a:rPr lang="en-US" sz="1000" dirty="0">
-                <a:solidFill>
-                  <a:srgbClr val="F87171"/>
+          <p:cNvPr id="16" name="Text 14"/>
+          <p:cNvSpPr txBox="1"/>
+          <p:nvPr/>
+        </p:nvSpPr>
+        <p:spPr>
+          <a:xfrm>
+            <a:off x="7342632" y="3685032"/>
+            <a:ext cx="4014216" cy="530352"/>
+          </a:xfrm>
+          <a:prstGeom prst="rect">
+            <a:avLst/>
+          </a:prstGeom>
+          <a:noFill/>
+          <a:ln/>
+        </p:spPr>
+        <p:txBody>
+          <a:bodyPr wrap="square" lIns="0" tIns="0" rIns="0" bIns="0" rtlCol="0" anchor="t"/>
+          <a:lstStyle/>
+          <a:p>
+            <a:pPr indent="0" marL="0">
+              <a:buNone/>
+            </a:pPr>
+            <a:r>
+              <a:rPr lang="en-US" sz="1050" dirty="0">
+                <a:solidFill>
+                  <a:srgbClr val="CADCFC"/>
                 </a:solidFill>
                 <a:latin typeface="Courier New" pitchFamily="34" charset="0"/>
                 <a:ea typeface="Courier New" pitchFamily="34" charset="-122"/>
                 <a:cs typeface="Courier New" pitchFamily="34" charset="-120"/>
               </a:rPr>
-              <a:t>'dotnet nuget push'</a:t>
-            </a:r>
-            <a:endParaRPr lang="en-US" sz="1000" dirty="0"/>
-          </a:p>
-          <a:p>
-            <a:pPr indent="0" marL="0">
-              <a:lnSpc>
-                <a:spcPts val="1400"/>
-              </a:lnSpc>
-              <a:buNone/>
-            </a:pPr>
-            <a:r>
-              <a:rPr lang="en-US" sz="1000" dirty="0">
-                <a:solidFill>
-                  <a:srgbClr val="F87171"/>
+              <a:t>matched on program +</a:t>
+            </a:r>
+            <a:endParaRPr lang="en-US" sz="1050" dirty="0"/>
+          </a:p>
+          <a:p>
+            <a:pPr indent="0" marL="0">
+              <a:buNone/>
+            </a:pPr>
+            <a:r>
+              <a:rPr lang="en-US" sz="1050" dirty="0">
+                <a:solidFill>
+                  <a:srgbClr val="CADCFC"/>
                 </a:solidFill>
                 <a:latin typeface="Courier New" pitchFamily="34" charset="0"/>
                 <a:ea typeface="Courier New" pitchFamily="34" charset="-122"/>
                 <a:cs typeface="Courier New" pitchFamily="34" charset="-120"/>
               </a:rPr>
-              <a:t>is not on the allow list.</a:t>
-            </a:r>
-            <a:endParaRPr lang="en-US" sz="1000" dirty="0"/>
-          </a:p>
-        </p:txBody>
-      </p:sp>
-      <p:sp>
-        <p:nvSpPr>
-          <p:cNvPr id="18" name="Text 15"/>
-          <p:cNvSpPr/>
-          <p:nvPr/>
-        </p:nvSpPr>
-        <p:spPr>
-          <a:xfrm>
-            <a:off x="822960" y="6263640"/>
-            <a:ext cx="5486400" cy="274320"/>
-          </a:xfrm>
-          <a:prstGeom prst="rect">
-            <a:avLst/>
-          </a:prstGeom>
-          <a:noFill/>
-          <a:ln/>
-        </p:spPr>
-        <p:txBody>
-          <a:bodyPr wrap="square" rtlCol="0" anchor="ctr"/>
-          <a:lstStyle/>
-          <a:p>
-            <a:pPr indent="0" marL="0">
-              <a:buNone/>
-            </a:pPr>
-            <a:r>
-              <a:rPr lang="en-US" sz="1100" dirty="0">
-                <a:solidFill>
-                  <a:srgbClr val="CADCFC"/>
+              <a:t>first argument, together</a:t>
+            </a:r>
+            <a:endParaRPr lang="en-US" sz="1050" dirty="0"/>
+          </a:p>
+        </p:txBody>
+      </p:sp>
+      <p:sp>
+        <p:nvSpPr>
+          <p:cNvPr id="17" name="Text 15"/>
+          <p:cNvSpPr txBox="1"/>
+          <p:nvPr/>
+        </p:nvSpPr>
+        <p:spPr>
+          <a:xfrm>
+            <a:off x="7342632" y="4325112"/>
+            <a:ext cx="4014216" cy="365760"/>
+          </a:xfrm>
+          <a:prstGeom prst="rect">
+            <a:avLst/>
+          </a:prstGeom>
+          <a:noFill/>
+          <a:ln/>
+        </p:spPr>
+        <p:txBody>
+          <a:bodyPr wrap="square" lIns="0" tIns="0" rIns="0" bIns="0" rtlCol="0" anchor="ctr"/>
+          <a:lstStyle/>
+          <a:p>
+            <a:pPr indent="0" marL="0">
+              <a:buNone/>
+            </a:pPr>
+            <a:r>
+              <a:rPr lang="en-US" sz="1050" b="1" i="1" dirty="0">
+                <a:solidFill>
+                  <a:srgbClr val="3FBFB0"/>
                 </a:solidFill>
                 <a:latin typeface="Calibri" pitchFamily="34" charset="0"/>
                 <a:ea typeface="Calibri" pitchFamily="34" charset="-122"/>
                 <a:cs typeface="Calibri" pitchFamily="34" charset="-120"/>
               </a:rPr>
-              <a:t>MiniCode Course · Phase 3</a:t>
-            </a:r>
-            <a:endParaRPr lang="en-US" sz="1100" dirty="0"/>
+              <a:t>11a was mechanics. This is policy.</a:t>
+            </a:r>
+            <a:endParaRPr lang="en-US" sz="1050" dirty="0"/>
           </a:p>
         </p:txBody>
       </p:sp>
@@ -1924,13 +2016,6 @@
 <file path=ppt/slides/slide2.xml><?xml version="1.0" encoding="utf-8"?>
 <p:sld xmlns:a="http://schemas.openxmlformats.org/drawingml/2006/main" xmlns:r="http://schemas.openxmlformats.org/officeDocument/2006/relationships" xmlns:p="http://schemas.openxmlformats.org/presentationml/2006/main">
   <p:cSld name="Slide 2">
-    <p:bg>
-      <p:bgPr>
-        <a:solidFill>
-          <a:srgbClr val="FFFFFF"/>
-        </a:solidFill>
-      </p:bgPr>
-    </p:bg>
     <p:spTree>
       <p:nvGrpSpPr>
         <p:cNvPr id="1" name=""/>
@@ -1948,7 +2033,7 @@
       <p:sp>
         <p:nvSpPr>
           <p:cNvPr id="2" name="Text 0"/>
-          <p:cNvSpPr/>
+          <p:cNvSpPr txBox="1"/>
           <p:nvPr/>
         </p:nvSpPr>
         <p:spPr>
@@ -1963,7 +2048,7 @@
           <a:ln/>
         </p:spPr>
         <p:txBody>
-          <a:bodyPr wrap="square" rtlCol="0" anchor="ctr"/>
+          <a:bodyPr wrap="square" lIns="0" tIns="0" rIns="0" bIns="0" rtlCol="0" anchor="ctr"/>
           <a:lstStyle/>
           <a:p>
             <a:pPr indent="0" marL="0">
@@ -1987,7 +2072,7 @@
       <p:sp>
         <p:nvSpPr>
           <p:cNvPr id="3" name="Text 1"/>
-          <p:cNvSpPr/>
+          <p:cNvSpPr txBox="1"/>
           <p:nvPr/>
         </p:nvSpPr>
         <p:spPr>
@@ -2002,14 +2087,14 @@
           <a:ln/>
         </p:spPr>
         <p:txBody>
-          <a:bodyPr wrap="square" rtlCol="0" anchor="ctr"/>
-          <a:lstStyle/>
-          <a:p>
-            <a:pPr indent="0" marL="0">
-              <a:buNone/>
-            </a:pPr>
-            <a:r>
-              <a:rPr lang="en-US" sz="3200" b="1" dirty="0">
+          <a:bodyPr wrap="square" lIns="0" tIns="0" rIns="0" bIns="0" rtlCol="0" anchor="t"/>
+          <a:lstStyle/>
+          <a:p>
+            <a:pPr indent="0" marL="0">
+              <a:buNone/>
+            </a:pPr>
+            <a:r>
+              <a:rPr lang="en-US" sz="3000" b="1" dirty="0">
                 <a:solidFill>
                   <a:srgbClr val="1E2761"/>
                 </a:solidFill>
@@ -2017,90 +2102,87 @@
                 <a:ea typeface="Cambria" pitchFamily="34" charset="-122"/>
                 <a:cs typeface="Cambria" pitchFamily="34" charset="-120"/>
               </a:rPr>
-              <a:t>Mechanics and Policy Are Now Two Classes</a:t>
-            </a:r>
-            <a:endParaRPr lang="en-US" sz="3200" dirty="0"/>
-          </a:p>
-        </p:txBody>
-      </p:sp>
-      <p:sp>
-        <p:nvSpPr>
-          <p:cNvPr id="4" name="Shape 2"/>
-          <p:cNvSpPr/>
-          <p:nvPr/>
-        </p:nvSpPr>
-        <p:spPr>
-          <a:xfrm>
-            <a:off x="548640" y="1417320"/>
-            <a:ext cx="11109960" cy="1188720"/>
-          </a:xfrm>
-          <a:prstGeom prst="roundRect">
-            <a:avLst>
-              <a:gd name="adj" fmla="val 6154"/>
-            </a:avLst>
-          </a:prstGeom>
-          <a:solidFill>
-            <a:srgbClr val="F4F6FB"/>
-          </a:solidFill>
-          <a:ln/>
-        </p:spPr>
-      </p:sp>
-      <p:sp>
-        <p:nvSpPr>
-          <p:cNvPr id="5" name="Text 3"/>
-          <p:cNvSpPr/>
-          <p:nvPr/>
-        </p:nvSpPr>
-        <p:spPr>
-          <a:xfrm>
-            <a:off x="822960" y="1554480"/>
-            <a:ext cx="10607040" cy="914400"/>
-          </a:xfrm>
-          <a:prstGeom prst="rect">
-            <a:avLst/>
-          </a:prstGeom>
-          <a:noFill/>
-          <a:ln/>
-        </p:spPr>
-        <p:txBody>
-          <a:bodyPr wrap="square" rtlCol="0" anchor="ctr"/>
-          <a:lstStyle/>
-          <a:p>
-            <a:pPr indent="0" marL="0">
-              <a:lnSpc>
-                <a:spcPts val="2100"/>
-              </a:lnSpc>
-              <a:buNone/>
-            </a:pPr>
-            <a:r>
-              <a:rPr lang="en-US" sz="1500" dirty="0">
-                <a:solidFill>
-                  <a:srgbClr val="2A2F45"/>
+              <a:t>Two Different Questions, Now Two Different Classes</a:t>
+            </a:r>
+            <a:endParaRPr lang="en-US" sz="3000" dirty="0"/>
+          </a:p>
+        </p:txBody>
+      </p:sp>
+      <p:sp>
+        <p:nvSpPr>
+          <p:cNvPr id="4" name="Text 2"/>
+          <p:cNvSpPr txBox="1"/>
+          <p:nvPr/>
+        </p:nvSpPr>
+        <p:spPr>
+          <a:xfrm>
+            <a:off x="457200" y="6510528"/>
+            <a:ext cx="8686800" cy="274320"/>
+          </a:xfrm>
+          <a:prstGeom prst="rect">
+            <a:avLst/>
+          </a:prstGeom>
+          <a:noFill/>
+          <a:ln/>
+        </p:spPr>
+        <p:txBody>
+          <a:bodyPr wrap="square" lIns="0" tIns="0" rIns="0" bIns="0" rtlCol="0" anchor="ctr"/>
+          <a:lstStyle/>
+          <a:p>
+            <a:pPr indent="0" marL="0">
+              <a:buNone/>
+            </a:pPr>
+            <a:r>
+              <a:rPr lang="en-US" sz="900" dirty="0">
+                <a:solidFill>
+                  <a:srgbClr val="6B7280"/>
                 </a:solidFill>
                 <a:latin typeface="Calibri" pitchFamily="34" charset="0"/>
                 <a:ea typeface="Calibri" pitchFamily="34" charset="-122"/>
                 <a:cs typeface="Calibri" pitchFamily="34" charset="-120"/>
               </a:rPr>
-              <a:t>Running a process safely and deciding which processes may run are separate questions with separate answers. </a:t>
-            </a:r>
-            <a:pPr indent="0" marL="0">
-              <a:lnSpc>
-                <a:spcPts val="2100"/>
-              </a:lnSpc>
-              <a:buNone/>
-            </a:pPr>
-            <a:r>
-              <a:rPr lang="en-US" sz="1500" b="1" dirty="0">
-                <a:solidFill>
-                  <a:srgbClr val="1E2761"/>
+              <a:t>MODULE 11B — SHELL COMMAND EXECUTION: THE COMMAND ALLOW LIST</a:t>
+            </a:r>
+            <a:endParaRPr lang="en-US" sz="900" dirty="0"/>
+          </a:p>
+        </p:txBody>
+      </p:sp>
+      <p:sp>
+        <p:nvSpPr>
+          <p:cNvPr id="5" name="Text 3"/>
+          <p:cNvSpPr txBox="1"/>
+          <p:nvPr/>
+        </p:nvSpPr>
+        <p:spPr>
+          <a:xfrm>
+            <a:off x="11338560" y="6510528"/>
+            <a:ext cx="365760" cy="274320"/>
+          </a:xfrm>
+          <a:prstGeom prst="rect">
+            <a:avLst/>
+          </a:prstGeom>
+          <a:noFill/>
+          <a:ln/>
+        </p:spPr>
+        <p:txBody>
+          <a:bodyPr wrap="square" lIns="0" tIns="0" rIns="0" bIns="0" rtlCol="0" anchor="ctr"/>
+          <a:lstStyle/>
+          <a:p>
+            <a:pPr algn="r" indent="0" marL="0">
+              <a:buNone/>
+            </a:pPr>
+            <a:r>
+              <a:rPr lang="en-US" sz="900" dirty="0">
+                <a:solidFill>
+                  <a:srgbClr val="6B7280"/>
                 </a:solidFill>
                 <a:latin typeface="Calibri" pitchFamily="34" charset="0"/>
                 <a:ea typeface="Calibri" pitchFamily="34" charset="-122"/>
                 <a:cs typeface="Calibri" pitchFamily="34" charset="-120"/>
               </a:rPr>
-              <a:t>ShellExecutor still knows nothing about permission.</a:t>
-            </a:r>
-            <a:endParaRPr lang="en-US" sz="1500" dirty="0"/>
+              <a:t>2</a:t>
+            </a:r>
+            <a:endParaRPr lang="en-US" sz="900" dirty="0"/>
           </a:p>
         </p:txBody>
       </p:sp>
@@ -2112,12 +2194,12 @@
         </p:nvSpPr>
         <p:spPr>
           <a:xfrm>
-            <a:off x="548640" y="2880360"/>
-            <a:ext cx="11109960" cy="2377440"/>
+            <a:off x="548640" y="1417320"/>
+            <a:ext cx="5349240" cy="4297680"/>
           </a:xfrm>
           <a:prstGeom prst="roundRect">
             <a:avLst>
-              <a:gd name="adj" fmla="val 3846"/>
+              <a:gd name="adj" fmla="val 2128"/>
             </a:avLst>
           </a:prstGeom>
           <a:solidFill>
@@ -2134,7 +2216,7 @@
         </p:nvSpPr>
         <p:spPr>
           <a:xfrm>
-            <a:off x="868680" y="3154680"/>
+            <a:off x="868680" y="1737360"/>
             <a:ext cx="640080" cy="640080"/>
           </a:xfrm>
           <a:prstGeom prst="ellipse">
@@ -2148,7 +2230,7 @@
       </p:sp>
       <p:pic>
         <p:nvPicPr>
-          <p:cNvPr id="8" name="Image 0" descr="/home/claude/deck16/icons/layers.png">    </p:cNvPr>
+          <p:cNvPr id="8" name="Image 0" descr="preencoded.png">    </p:cNvPr>
           <p:cNvPicPr>
             <a:picLocks noChangeAspect="1"/>
           </p:cNvPicPr>
@@ -2162,8 +2244,8 @@
         </p:blipFill>
         <p:spPr>
           <a:xfrm>
-            <a:off x="1024128" y="3310128"/>
-            <a:ext cx="329184" cy="329184"/>
+            <a:off x="1033272" y="1901952"/>
+            <a:ext cx="310896" cy="310896"/>
           </a:xfrm>
           <a:prstGeom prst="rect">
             <a:avLst/>
@@ -2173,29 +2255,29 @@
       <p:sp>
         <p:nvSpPr>
           <p:cNvPr id="9" name="Text 6"/>
-          <p:cNvSpPr/>
-          <p:nvPr/>
-        </p:nvSpPr>
-        <p:spPr>
-          <a:xfrm>
-            <a:off x="1645920" y="3154680"/>
-            <a:ext cx="9601200" cy="502920"/>
-          </a:xfrm>
-          <a:prstGeom prst="rect">
-            <a:avLst/>
-          </a:prstGeom>
-          <a:noFill/>
-          <a:ln/>
-        </p:spPr>
-        <p:txBody>
-          <a:bodyPr wrap="square" rtlCol="0" anchor="ctr"/>
-          <a:lstStyle/>
-          <a:p>
-            <a:pPr indent="0" marL="0">
-              <a:buNone/>
-            </a:pPr>
-            <a:r>
-              <a:rPr lang="en-US" sz="1800" b="1" dirty="0">
+          <p:cNvSpPr txBox="1"/>
+          <p:nvPr/>
+        </p:nvSpPr>
+        <p:spPr>
+          <a:xfrm>
+            <a:off x="1645920" y="1737360"/>
+            <a:ext cx="3931920" cy="640080"/>
+          </a:xfrm>
+          <a:prstGeom prst="rect">
+            <a:avLst/>
+          </a:prstGeom>
+          <a:noFill/>
+          <a:ln/>
+        </p:spPr>
+        <p:txBody>
+          <a:bodyPr wrap="square" lIns="0" tIns="0" rIns="0" bIns="0" rtlCol="0" anchor="ctr"/>
+          <a:lstStyle/>
+          <a:p>
+            <a:pPr indent="0" marL="0">
+              <a:buNone/>
+            </a:pPr>
+            <a:r>
+              <a:rPr lang="en-US" sz="1550" b="1" dirty="0">
                 <a:solidFill>
                   <a:srgbClr val="FFFFFF"/>
                 </a:solidFill>
@@ -2203,36 +2285,36 @@
                 <a:ea typeface="Cambria" pitchFamily="34" charset="-122"/>
                 <a:cs typeface="Cambria" pitchFamily="34" charset="-120"/>
               </a:rPr>
-              <a:t>Wrap, Don’t Touch — the Same Shape, One Layer Down</a:t>
-            </a:r>
-            <a:endParaRPr lang="en-US" sz="1800" dirty="0"/>
+              <a:t>11a Was Mechanics; This Is Policy</a:t>
+            </a:r>
+            <a:endParaRPr lang="en-US" sz="1550" dirty="0"/>
           </a:p>
         </p:txBody>
       </p:sp>
       <p:sp>
         <p:nvSpPr>
           <p:cNvPr id="10" name="Text 7"/>
-          <p:cNvSpPr/>
-          <p:nvPr/>
-        </p:nvSpPr>
-        <p:spPr>
-          <a:xfrm>
-            <a:off x="1645920" y="3749040"/>
-            <a:ext cx="9601200" cy="914400"/>
-          </a:xfrm>
-          <a:prstGeom prst="rect">
-            <a:avLst/>
-          </a:prstGeom>
-          <a:noFill/>
-          <a:ln/>
-        </p:spPr>
-        <p:txBody>
-          <a:bodyPr wrap="square" rtlCol="0" anchor="ctr"/>
-          <a:lstStyle/>
-          <a:p>
-            <a:pPr indent="0" marL="0">
-              <a:lnSpc>
-                <a:spcPts val="1900"/>
+          <p:cNvSpPr txBox="1"/>
+          <p:nvPr/>
+        </p:nvSpPr>
+        <p:spPr>
+          <a:xfrm>
+            <a:off x="868680" y="2606040"/>
+            <a:ext cx="4709160" cy="2194560"/>
+          </a:xfrm>
+          <a:prstGeom prst="rect">
+            <a:avLst/>
+          </a:prstGeom>
+          <a:noFill/>
+          <a:ln/>
+        </p:spPr>
+        <p:txBody>
+          <a:bodyPr wrap="square" lIns="0" tIns="0" rIns="0" bIns="0" rtlCol="0" anchor="t"/>
+          <a:lstStyle/>
+          <a:p>
+            <a:pPr indent="0" marL="0">
+              <a:lnSpc>
+                <a:spcPct val="125000"/>
               </a:lnSpc>
               <a:buNone/>
             </a:pPr>
@@ -2245,7 +2327,7 @@
                 <a:ea typeface="Calibri" pitchFamily="34" charset="-122"/>
                 <a:cs typeface="Calibri" pitchFamily="34" charset="-120"/>
               </a:rPr>
-              <a:t>Module 5a’s InterceptedFunction decorates an AIFunction without the inner function knowing it is wrapped. AllowListedShellExecutor does exactly that to IShellExecutor: holds the real executor, checks first, calls through only when allowed.</a:t>
+              <a:t>Running a process safely and deciding which processes may run are separate questions with separate answers, and the code finally reflects that.</a:t>
             </a:r>
             <a:endParaRPr lang="en-US" sz="1350" dirty="0"/>
           </a:p>
@@ -2254,29 +2336,29 @@
       <p:sp>
         <p:nvSpPr>
           <p:cNvPr id="11" name="Text 8"/>
-          <p:cNvSpPr/>
-          <p:nvPr/>
-        </p:nvSpPr>
-        <p:spPr>
-          <a:xfrm>
-            <a:off x="1645920" y="4709160"/>
-            <a:ext cx="9601200" cy="457200"/>
-          </a:xfrm>
-          <a:prstGeom prst="rect">
-            <a:avLst/>
-          </a:prstGeom>
-          <a:noFill/>
-          <a:ln/>
-        </p:spPr>
-        <p:txBody>
-          <a:bodyPr wrap="square" rtlCol="0" anchor="ctr"/>
-          <a:lstStyle/>
-          <a:p>
-            <a:pPr indent="0" marL="0">
-              <a:buNone/>
-            </a:pPr>
-            <a:r>
-              <a:rPr lang="en-US" sz="1300" b="1" i="1" dirty="0">
+          <p:cNvSpPr txBox="1"/>
+          <p:nvPr/>
+        </p:nvSpPr>
+        <p:spPr>
+          <a:xfrm>
+            <a:off x="868680" y="4892040"/>
+            <a:ext cx="4709160" cy="594360"/>
+          </a:xfrm>
+          <a:prstGeom prst="rect">
+            <a:avLst/>
+          </a:prstGeom>
+          <a:noFill/>
+          <a:ln/>
+        </p:spPr>
+        <p:txBody>
+          <a:bodyPr wrap="square" lIns="0" tIns="0" rIns="0" bIns="0" rtlCol="0" anchor="t"/>
+          <a:lstStyle/>
+          <a:p>
+            <a:pPr indent="0" marL="0">
+              <a:buNone/>
+            </a:pPr>
+            <a:r>
+              <a:rPr lang="en-US" sz="1250" b="1" i="1" dirty="0">
                 <a:solidFill>
                   <a:srgbClr val="3FBFB0"/>
                 </a:solidFill>
@@ -2284,87 +2366,217 @@
                 <a:ea typeface="Calibri" pitchFamily="34" charset="-122"/>
                 <a:cs typeface="Calibri" pitchFamily="34" charset="-120"/>
               </a:rPr>
-              <a:t>ShellTools still just takes an IShellExecutor — it cannot tell which one it was handed.</a:t>
-            </a:r>
-            <a:endParaRPr lang="en-US" sz="1300" dirty="0"/>
-          </a:p>
-        </p:txBody>
-      </p:sp>
-      <p:sp>
-        <p:nvSpPr>
-          <p:cNvPr id="12" name="Text 9"/>
+              <a:t>ShellExecutor still knows nothing about permission.</a:t>
+            </a:r>
+            <a:endParaRPr lang="en-US" sz="1250" dirty="0"/>
+          </a:p>
+        </p:txBody>
+      </p:sp>
+      <p:sp>
+        <p:nvSpPr>
+          <p:cNvPr id="12" name="Shape 9"/>
           <p:cNvSpPr/>
           <p:nvPr/>
         </p:nvSpPr>
         <p:spPr>
           <a:xfrm>
-            <a:off x="457200" y="6510528"/>
-            <a:ext cx="9601200" cy="274320"/>
-          </a:xfrm>
-          <a:prstGeom prst="rect">
-            <a:avLst/>
-          </a:prstGeom>
-          <a:noFill/>
-          <a:ln/>
-        </p:spPr>
-        <p:txBody>
-          <a:bodyPr wrap="square" rtlCol="0" anchor="ctr"/>
-          <a:lstStyle/>
-          <a:p>
-            <a:pPr indent="0" marL="0">
-              <a:buNone/>
-            </a:pPr>
-            <a:r>
-              <a:rPr lang="en-US" sz="900" dirty="0">
-                <a:solidFill>
-                  <a:srgbClr val="6B7280"/>
+            <a:off x="6309360" y="1417320"/>
+            <a:ext cx="5349240" cy="4297680"/>
+          </a:xfrm>
+          <a:prstGeom prst="roundRect">
+            <a:avLst>
+              <a:gd name="adj" fmla="val 2128"/>
+            </a:avLst>
+          </a:prstGeom>
+          <a:solidFill>
+            <a:srgbClr val="F4F6FB"/>
+          </a:solidFill>
+          <a:ln/>
+        </p:spPr>
+      </p:sp>
+      <p:sp>
+        <p:nvSpPr>
+          <p:cNvPr id="13" name="Shape 10"/>
+          <p:cNvSpPr/>
+          <p:nvPr/>
+        </p:nvSpPr>
+        <p:spPr>
+          <a:xfrm>
+            <a:off x="6629400" y="1737360"/>
+            <a:ext cx="640080" cy="640080"/>
+          </a:xfrm>
+          <a:prstGeom prst="ellipse">
+            <a:avLst/>
+          </a:prstGeom>
+          <a:solidFill>
+            <a:srgbClr val="1E2761"/>
+          </a:solidFill>
+          <a:ln/>
+        </p:spPr>
+      </p:sp>
+      <p:pic>
+        <p:nvPicPr>
+          <p:cNvPr id="14" name="Image 1" descr="preencoded.png">    </p:cNvPr>
+          <p:cNvPicPr>
+            <a:picLocks noChangeAspect="1"/>
+          </p:cNvPicPr>
+          <p:nvPr/>
+        </p:nvPicPr>
+        <p:blipFill>
+          <a:blip r:embed="rId2"/>
+          <a:stretch>
+            <a:fillRect/>
+          </a:stretch>
+        </p:blipFill>
+        <p:spPr>
+          <a:xfrm>
+            <a:off x="6793992" y="1901952"/>
+            <a:ext cx="310896" cy="310896"/>
+          </a:xfrm>
+          <a:prstGeom prst="rect">
+            <a:avLst/>
+          </a:prstGeom>
+        </p:spPr>
+      </p:pic>
+      <p:sp>
+        <p:nvSpPr>
+          <p:cNvPr id="15" name="Text 11"/>
+          <p:cNvSpPr txBox="1"/>
+          <p:nvPr/>
+        </p:nvSpPr>
+        <p:spPr>
+          <a:xfrm>
+            <a:off x="7406640" y="1737360"/>
+            <a:ext cx="3931920" cy="640080"/>
+          </a:xfrm>
+          <a:prstGeom prst="rect">
+            <a:avLst/>
+          </a:prstGeom>
+          <a:noFill/>
+          <a:ln/>
+        </p:spPr>
+        <p:txBody>
+          <a:bodyPr wrap="square" lIns="0" tIns="0" rIns="0" bIns="0" rtlCol="0" anchor="ctr"/>
+          <a:lstStyle/>
+          <a:p>
+            <a:pPr indent="0" marL="0">
+              <a:buNone/>
+            </a:pPr>
+            <a:r>
+              <a:rPr lang="en-US" sz="1550" b="1" dirty="0">
+                <a:solidFill>
+                  <a:srgbClr val="2A2F45"/>
+                </a:solidFill>
+                <a:latin typeface="Cambria" pitchFamily="34" charset="0"/>
+                <a:ea typeface="Cambria" pitchFamily="34" charset="-122"/>
+                <a:cs typeface="Cambria" pitchFamily="34" charset="-120"/>
+              </a:rPr>
+              <a:t>Wrap, Don’t Touch — the Same Shape as Module 5a, One Layer Down</a:t>
+            </a:r>
+            <a:endParaRPr lang="en-US" sz="1550" dirty="0"/>
+          </a:p>
+        </p:txBody>
+      </p:sp>
+      <p:sp>
+        <p:nvSpPr>
+          <p:cNvPr id="16" name="Text 12"/>
+          <p:cNvSpPr txBox="1"/>
+          <p:nvPr/>
+        </p:nvSpPr>
+        <p:spPr>
+          <a:xfrm>
+            <a:off x="6629400" y="2606040"/>
+            <a:ext cx="4709160" cy="2194560"/>
+          </a:xfrm>
+          <a:prstGeom prst="rect">
+            <a:avLst/>
+          </a:prstGeom>
+          <a:noFill/>
+          <a:ln/>
+        </p:spPr>
+        <p:txBody>
+          <a:bodyPr wrap="square" lIns="0" tIns="0" rIns="0" bIns="0" rtlCol="0" anchor="t"/>
+          <a:lstStyle/>
+          <a:p>
+            <a:pPr indent="0" marL="0">
+              <a:lnSpc>
+                <a:spcPct val="125000"/>
+              </a:lnSpc>
+              <a:buNone/>
+            </a:pPr>
+            <a:r>
+              <a:rPr lang="en-US" sz="1350" dirty="0">
+                <a:solidFill>
+                  <a:srgbClr val="2A2F45"/>
                 </a:solidFill>
                 <a:latin typeface="Calibri" pitchFamily="34" charset="0"/>
                 <a:ea typeface="Calibri" pitchFamily="34" charset="-122"/>
                 <a:cs typeface="Calibri" pitchFamily="34" charset="-120"/>
               </a:rPr>
-              <a:t>MODULE 11B — SHELL COMMAND EXECUTION: THE COMMAND ALLOW LIST</a:t>
-            </a:r>
-            <a:endParaRPr lang="en-US" sz="900" dirty="0"/>
-          </a:p>
-        </p:txBody>
-      </p:sp>
-      <p:sp>
-        <p:nvSpPr>
-          <p:cNvPr id="13" name="Text 10"/>
+              <a:t>InterceptedFunction decorates an AIFunction without the inner function knowing. AllowListedShellExecutor does exactly that to IShellExecutor: it holds the real executor, checks first, and only calls through when the call is allowed.</a:t>
+            </a:r>
+            <a:endParaRPr lang="en-US" sz="1350" dirty="0"/>
+          </a:p>
+        </p:txBody>
+      </p:sp>
+      <p:sp>
+        <p:nvSpPr>
+          <p:cNvPr id="17" name="Shape 13"/>
           <p:cNvSpPr/>
           <p:nvPr/>
         </p:nvSpPr>
         <p:spPr>
           <a:xfrm>
-            <a:off x="11338560" y="6510528"/>
-            <a:ext cx="365760" cy="274320"/>
-          </a:xfrm>
-          <a:prstGeom prst="rect">
-            <a:avLst/>
-          </a:prstGeom>
-          <a:noFill/>
-          <a:ln/>
-        </p:spPr>
-        <p:txBody>
-          <a:bodyPr wrap="square" rtlCol="0" anchor="ctr"/>
-          <a:lstStyle/>
-          <a:p>
-            <a:pPr algn="r" indent="0" marL="0">
-              <a:buNone/>
-            </a:pPr>
-            <a:r>
-              <a:rPr lang="en-US" sz="900" dirty="0">
-                <a:solidFill>
-                  <a:srgbClr val="6B7280"/>
+            <a:off x="6492240" y="4892040"/>
+            <a:ext cx="4983480" cy="594360"/>
+          </a:xfrm>
+          <a:prstGeom prst="roundRect">
+            <a:avLst>
+              <a:gd name="adj" fmla="val 9231"/>
+            </a:avLst>
+          </a:prstGeom>
+          <a:solidFill>
+            <a:srgbClr val="141B49"/>
+          </a:solidFill>
+          <a:ln/>
+        </p:spPr>
+      </p:sp>
+      <p:sp>
+        <p:nvSpPr>
+          <p:cNvPr id="18" name="Text 14"/>
+          <p:cNvSpPr txBox="1"/>
+          <p:nvPr/>
+        </p:nvSpPr>
+        <p:spPr>
+          <a:xfrm>
+            <a:off x="6629400" y="4892040"/>
+            <a:ext cx="4709160" cy="594360"/>
+          </a:xfrm>
+          <a:prstGeom prst="rect">
+            <a:avLst/>
+          </a:prstGeom>
+          <a:noFill/>
+          <a:ln/>
+        </p:spPr>
+        <p:txBody>
+          <a:bodyPr wrap="square" lIns="0" tIns="0" rIns="0" bIns="0" rtlCol="0" anchor="ctr"/>
+          <a:lstStyle/>
+          <a:p>
+            <a:pPr indent="0" marL="0">
+              <a:buNone/>
+            </a:pPr>
+            <a:r>
+              <a:rPr lang="en-US" sz="1200" i="1" dirty="0">
+                <a:solidFill>
+                  <a:srgbClr val="3FBFB0"/>
                 </a:solidFill>
                 <a:latin typeface="Calibri" pitchFamily="34" charset="0"/>
                 <a:ea typeface="Calibri" pitchFamily="34" charset="-122"/>
                 <a:cs typeface="Calibri" pitchFamily="34" charset="-120"/>
               </a:rPr>
-              <a:t>2</a:t>
-            </a:r>
-            <a:endParaRPr lang="en-US" sz="900" dirty="0"/>
+              <a:t>ShellTools still just takes an IShellExecutor — it cannot tell which one it was handed.</a:t>
+            </a:r>
+            <a:endParaRPr lang="en-US" sz="1200" dirty="0"/>
           </a:p>
         </p:txBody>
       </p:sp>
@@ -2403,7 +2615,7 @@
       <p:sp>
         <p:nvSpPr>
           <p:cNvPr id="2" name="Text 0"/>
-          <p:cNvSpPr/>
+          <p:cNvSpPr txBox="1"/>
           <p:nvPr/>
         </p:nvSpPr>
         <p:spPr>
@@ -2418,7 +2630,7 @@
           <a:ln/>
         </p:spPr>
         <p:txBody>
-          <a:bodyPr wrap="square" rtlCol="0" anchor="ctr"/>
+          <a:bodyPr wrap="square" lIns="0" tIns="0" rIns="0" bIns="0" rtlCol="0" anchor="ctr"/>
           <a:lstStyle/>
           <a:p>
             <a:pPr indent="0" marL="0">
@@ -2442,7 +2654,7 @@
       <p:sp>
         <p:nvSpPr>
           <p:cNvPr id="3" name="Text 1"/>
-          <p:cNvSpPr/>
+          <p:cNvSpPr txBox="1"/>
           <p:nvPr/>
         </p:nvSpPr>
         <p:spPr>
@@ -2457,14 +2669,14 @@
           <a:ln/>
         </p:spPr>
         <p:txBody>
-          <a:bodyPr wrap="square" rtlCol="0" anchor="ctr"/>
-          <a:lstStyle/>
-          <a:p>
-            <a:pPr indent="0" marL="0">
-              <a:buNone/>
-            </a:pPr>
-            <a:r>
-              <a:rPr lang="en-US" sz="2800" b="1" dirty="0">
+          <a:bodyPr wrap="square" lIns="0" tIns="0" rIns="0" bIns="0" rtlCol="0" anchor="t"/>
+          <a:lstStyle/>
+          <a:p>
+            <a:pPr indent="0" marL="0">
+              <a:buNone/>
+            </a:pPr>
+            <a:r>
+              <a:rPr lang="en-US" sz="3200" b="1" dirty="0">
                 <a:solidFill>
                   <a:srgbClr val="FFFFFF"/>
                 </a:solidFill>
@@ -2472,76 +2684,112 @@
                 <a:ea typeface="Cambria" pitchFamily="34" charset="-122"/>
                 <a:cs typeface="Cambria" pitchFamily="34" charset="-120"/>
               </a:rPr>
-              <a:t>Match the Program and Its First Argument Together</a:t>
-            </a:r>
-            <a:endParaRPr lang="en-US" sz="2800" dirty="0"/>
+              <a:t>Match the Pair, Name What Is Allowed</a:t>
+            </a:r>
+            <a:endParaRPr lang="en-US" sz="3200" dirty="0"/>
           </a:p>
         </p:txBody>
       </p:sp>
       <p:sp>
         <p:nvSpPr>
           <p:cNvPr id="4" name="Text 2"/>
-          <p:cNvSpPr/>
-          <p:nvPr/>
-        </p:nvSpPr>
-        <p:spPr>
-          <a:xfrm>
-            <a:off x="548640" y="1097280"/>
-            <a:ext cx="10789920" cy="640080"/>
-          </a:xfrm>
-          <a:prstGeom prst="rect">
-            <a:avLst/>
-          </a:prstGeom>
-          <a:noFill/>
-          <a:ln/>
-        </p:spPr>
-        <p:txBody>
-          <a:bodyPr wrap="square" rtlCol="0" anchor="ctr"/>
-          <a:lstStyle/>
-          <a:p>
-            <a:pPr indent="0" marL="0">
-              <a:lnSpc>
-                <a:spcPts val="1900"/>
-              </a:lnSpc>
-              <a:buNone/>
-            </a:pPr>
-            <a:r>
-              <a:rPr lang="en-US" sz="1400" i="1" dirty="0">
-                <a:solidFill>
-                  <a:srgbClr val="CADCFC"/>
+          <p:cNvSpPr txBox="1"/>
+          <p:nvPr/>
+        </p:nvSpPr>
+        <p:spPr>
+          <a:xfrm>
+            <a:off x="457200" y="6510528"/>
+            <a:ext cx="8686800" cy="274320"/>
+          </a:xfrm>
+          <a:prstGeom prst="rect">
+            <a:avLst/>
+          </a:prstGeom>
+          <a:noFill/>
+          <a:ln/>
+        </p:spPr>
+        <p:txBody>
+          <a:bodyPr wrap="square" lIns="0" tIns="0" rIns="0" bIns="0" rtlCol="0" anchor="ctr"/>
+          <a:lstStyle/>
+          <a:p>
+            <a:pPr indent="0" marL="0">
+              <a:buNone/>
+            </a:pPr>
+            <a:r>
+              <a:rPr lang="en-US" sz="900" dirty="0">
+                <a:solidFill>
+                  <a:srgbClr val="6B7280"/>
                 </a:solidFill>
                 <a:latin typeface="Calibri" pitchFamily="34" charset="0"/>
                 <a:ea typeface="Calibri" pitchFamily="34" charset="-122"/>
                 <a:cs typeface="Calibri" pitchFamily="34" charset="-120"/>
               </a:rPr>
-              <a:t>Allowing bare "dotnet" would allow dotnet nuget push and dotnet tool install under the same entry meant to permit dotnet build.</a:t>
-            </a:r>
-            <a:endParaRPr lang="en-US" sz="1400" dirty="0"/>
-          </a:p>
-        </p:txBody>
-      </p:sp>
-      <p:sp>
-        <p:nvSpPr>
-          <p:cNvPr id="5" name="Shape 3"/>
+              <a:t>MODULE 11B — SHELL COMMAND EXECUTION: THE COMMAND ALLOW LIST</a:t>
+            </a:r>
+            <a:endParaRPr lang="en-US" sz="900" dirty="0"/>
+          </a:p>
+        </p:txBody>
+      </p:sp>
+      <p:sp>
+        <p:nvSpPr>
+          <p:cNvPr id="5" name="Text 3"/>
+          <p:cNvSpPr txBox="1"/>
+          <p:nvPr/>
+        </p:nvSpPr>
+        <p:spPr>
+          <a:xfrm>
+            <a:off x="11338560" y="6510528"/>
+            <a:ext cx="365760" cy="274320"/>
+          </a:xfrm>
+          <a:prstGeom prst="rect">
+            <a:avLst/>
+          </a:prstGeom>
+          <a:noFill/>
+          <a:ln/>
+        </p:spPr>
+        <p:txBody>
+          <a:bodyPr wrap="square" lIns="0" tIns="0" rIns="0" bIns="0" rtlCol="0" anchor="ctr"/>
+          <a:lstStyle/>
+          <a:p>
+            <a:pPr algn="r" indent="0" marL="0">
+              <a:buNone/>
+            </a:pPr>
+            <a:r>
+              <a:rPr lang="en-US" sz="900" dirty="0">
+                <a:solidFill>
+                  <a:srgbClr val="6B7280"/>
+                </a:solidFill>
+                <a:latin typeface="Calibri" pitchFamily="34" charset="0"/>
+                <a:ea typeface="Calibri" pitchFamily="34" charset="-122"/>
+                <a:cs typeface="Calibri" pitchFamily="34" charset="-120"/>
+              </a:rPr>
+              <a:t>3</a:t>
+            </a:r>
+            <a:endParaRPr lang="en-US" sz="900" dirty="0"/>
+          </a:p>
+        </p:txBody>
+      </p:sp>
+      <p:sp>
+        <p:nvSpPr>
+          <p:cNvPr id="6" name="Shape 4"/>
           <p:cNvSpPr/>
           <p:nvPr/>
         </p:nvSpPr>
         <p:spPr>
           <a:xfrm>
-            <a:off x="539496" y="1965960"/>
-            <a:ext cx="5349240" cy="2103120"/>
+            <a:off x="548640" y="1417320"/>
+            <a:ext cx="5349240" cy="3017520"/>
           </a:xfrm>
           <a:prstGeom prst="roundRect">
             <a:avLst>
-              <a:gd name="adj" fmla="val 4348"/>
+              <a:gd name="adj" fmla="val 3030"/>
             </a:avLst>
           </a:prstGeom>
           <a:solidFill>
-            <a:srgbClr val="141B49"/>
+            <a:srgbClr val="1E2761"/>
           </a:solidFill>
           <a:ln w="12700">
             <a:solidFill>
-              <a:srgbClr val="F87171"/>
+              <a:srgbClr val="3FBFB0"/>
             </a:solidFill>
             <a:prstDash val="solid"/>
           </a:ln>
@@ -2549,27 +2797,27 @@
       </p:sp>
       <p:sp>
         <p:nvSpPr>
-          <p:cNvPr id="6" name="Shape 4"/>
+          <p:cNvPr id="7" name="Shape 5"/>
           <p:cNvSpPr/>
           <p:nvPr/>
         </p:nvSpPr>
         <p:spPr>
           <a:xfrm>
-            <a:off x="795528" y="2221992"/>
-            <a:ext cx="548640" cy="548640"/>
+            <a:off x="868680" y="1737360"/>
+            <a:ext cx="640080" cy="640080"/>
           </a:xfrm>
           <a:prstGeom prst="ellipse">
             <a:avLst/>
           </a:prstGeom>
           <a:solidFill>
-            <a:srgbClr val="F87171"/>
+            <a:srgbClr val="3FBFB0"/>
           </a:solidFill>
           <a:ln/>
         </p:spPr>
       </p:sp>
       <p:pic>
         <p:nvPicPr>
-          <p:cNvPr id="7" name="Image 0" descr="/home/claude/deck16/icons/ban.png">    </p:cNvPr>
+          <p:cNvPr id="8" name="Image 0" descr="preencoded.png">    </p:cNvPr>
           <p:cNvPicPr>
             <a:picLocks noChangeAspect="1"/>
           </p:cNvPicPr>
@@ -2583,8 +2831,8 @@
         </p:blipFill>
         <p:spPr>
           <a:xfrm>
-            <a:off x="932688" y="2359152"/>
-            <a:ext cx="274320" cy="274320"/>
+            <a:off x="1033272" y="1901952"/>
+            <a:ext cx="310896" cy="310896"/>
           </a:xfrm>
           <a:prstGeom prst="rect">
             <a:avLst/>
@@ -2593,30 +2841,30 @@
       </p:pic>
       <p:sp>
         <p:nvSpPr>
-          <p:cNvPr id="8" name="Text 5"/>
-          <p:cNvSpPr/>
-          <p:nvPr/>
-        </p:nvSpPr>
-        <p:spPr>
-          <a:xfrm>
-            <a:off x="1453896" y="2240280"/>
-            <a:ext cx="4251960" cy="502920"/>
-          </a:xfrm>
-          <a:prstGeom prst="rect">
-            <a:avLst/>
-          </a:prstGeom>
-          <a:noFill/>
-          <a:ln/>
-        </p:spPr>
-        <p:txBody>
-          <a:bodyPr wrap="square" rtlCol="0" anchor="ctr"/>
-          <a:lstStyle/>
-          <a:p>
-            <a:pPr indent="0" marL="0">
-              <a:buNone/>
-            </a:pPr>
-            <a:r>
-              <a:rPr lang="en-US" sz="1600" b="1" dirty="0">
+          <p:cNvPr id="9" name="Text 6"/>
+          <p:cNvSpPr txBox="1"/>
+          <p:nvPr/>
+        </p:nvSpPr>
+        <p:spPr>
+          <a:xfrm>
+            <a:off x="1645920" y="1737360"/>
+            <a:ext cx="3931920" cy="640080"/>
+          </a:xfrm>
+          <a:prstGeom prst="rect">
+            <a:avLst/>
+          </a:prstGeom>
+          <a:noFill/>
+          <a:ln/>
+        </p:spPr>
+        <p:txBody>
+          <a:bodyPr wrap="square" lIns="0" tIns="0" rIns="0" bIns="0" rtlCol="0" anchor="ctr"/>
+          <a:lstStyle/>
+          <a:p>
+            <a:pPr indent="0" marL="0">
+              <a:buNone/>
+            </a:pPr>
+            <a:r>
+              <a:rPr lang="en-US" sz="1550" b="1" dirty="0">
                 <a:solidFill>
                   <a:srgbClr val="FFFFFF"/>
                 </a:solidFill>
@@ -2624,41 +2872,41 @@
                 <a:ea typeface="Cambria" pitchFamily="34" charset="-122"/>
                 <a:cs typeface="Cambria" pitchFamily="34" charset="-120"/>
               </a:rPr>
-              <a:t>"dotnet" alone</a:t>
-            </a:r>
-            <a:endParaRPr lang="en-US" sz="1600" dirty="0"/>
-          </a:p>
-        </p:txBody>
-      </p:sp>
-      <p:sp>
-        <p:nvSpPr>
-          <p:cNvPr id="9" name="Text 6"/>
-          <p:cNvSpPr/>
-          <p:nvPr/>
-        </p:nvSpPr>
-        <p:spPr>
-          <a:xfrm>
-            <a:off x="813816" y="2880360"/>
-            <a:ext cx="4800600" cy="1005840"/>
-          </a:xfrm>
-          <a:prstGeom prst="rect">
-            <a:avLst/>
-          </a:prstGeom>
-          <a:noFill/>
-          <a:ln/>
-        </p:spPr>
-        <p:txBody>
-          <a:bodyPr wrap="square" rtlCol="0" anchor="ctr"/>
-          <a:lstStyle/>
-          <a:p>
-            <a:pPr indent="0" marL="0">
-              <a:lnSpc>
-                <a:spcPts val="1800"/>
-              </a:lnSpc>
-              <a:buNone/>
-            </a:pPr>
-            <a:r>
-              <a:rPr lang="en-US" sz="1300" dirty="0">
+              <a:t>The Program and Its First Argument, Together</a:t>
+            </a:r>
+            <a:endParaRPr lang="en-US" sz="1550" dirty="0"/>
+          </a:p>
+        </p:txBody>
+      </p:sp>
+      <p:sp>
+        <p:nvSpPr>
+          <p:cNvPr id="10" name="Text 7"/>
+          <p:cNvSpPr txBox="1"/>
+          <p:nvPr/>
+        </p:nvSpPr>
+        <p:spPr>
+          <a:xfrm>
+            <a:off x="868680" y="2606040"/>
+            <a:ext cx="4709160" cy="1463040"/>
+          </a:xfrm>
+          <a:prstGeom prst="rect">
+            <a:avLst/>
+          </a:prstGeom>
+          <a:noFill/>
+          <a:ln/>
+        </p:spPr>
+        <p:txBody>
+          <a:bodyPr wrap="square" lIns="0" tIns="0" rIns="0" bIns="0" rtlCol="0" anchor="t"/>
+          <a:lstStyle/>
+          <a:p>
+            <a:pPr indent="0" marL="0">
+              <a:lnSpc>
+                <a:spcPct val="125000"/>
+              </a:lnSpc>
+              <a:buNone/>
+            </a:pPr>
+            <a:r>
+              <a:rPr lang="en-US" sz="1350" dirty="0">
                 <a:solidFill>
                   <a:srgbClr val="CADCFC"/>
                 </a:solidFill>
@@ -2666,26 +2914,26 @@
                 <a:ea typeface="Calibri" pitchFamily="34" charset="-122"/>
                 <a:cs typeface="Calibri" pitchFamily="34" charset="-120"/>
               </a:rPr>
-              <a:t>Every subcommand rides along — nuget push, tool install, whatever follows.</a:t>
-            </a:r>
-            <a:endParaRPr lang="en-US" sz="1300" dirty="0"/>
-          </a:p>
-        </p:txBody>
-      </p:sp>
-      <p:sp>
-        <p:nvSpPr>
-          <p:cNvPr id="10" name="Shape 7"/>
+              <a:t>Allowing bare "dotnet" would allow dotnet nuget push and dotnet tool install under the same entry that was meant to permit dotnet build. Pairing the program with its subcommand is what makes an entry mean one specific thing.</a:t>
+            </a:r>
+            <a:endParaRPr lang="en-US" sz="1350" dirty="0"/>
+          </a:p>
+        </p:txBody>
+      </p:sp>
+      <p:sp>
+        <p:nvSpPr>
+          <p:cNvPr id="11" name="Shape 8"/>
           <p:cNvSpPr/>
           <p:nvPr/>
         </p:nvSpPr>
         <p:spPr>
           <a:xfrm>
-            <a:off x="6300216" y="1965960"/>
-            <a:ext cx="5349240" cy="2103120"/>
+            <a:off x="6309360" y="1417320"/>
+            <a:ext cx="5349240" cy="3017520"/>
           </a:xfrm>
           <a:prstGeom prst="roundRect">
             <a:avLst>
-              <a:gd name="adj" fmla="val 4348"/>
+              <a:gd name="adj" fmla="val 3030"/>
             </a:avLst>
           </a:prstGeom>
           <a:solidFill>
@@ -2696,14 +2944,14 @@
       </p:sp>
       <p:sp>
         <p:nvSpPr>
-          <p:cNvPr id="11" name="Shape 8"/>
+          <p:cNvPr id="12" name="Shape 9"/>
           <p:cNvSpPr/>
           <p:nvPr/>
         </p:nvSpPr>
         <p:spPr>
           <a:xfrm>
-            <a:off x="6556248" y="2221992"/>
-            <a:ext cx="548640" cy="548640"/>
+            <a:off x="6629400" y="1737360"/>
+            <a:ext cx="640080" cy="640080"/>
           </a:xfrm>
           <a:prstGeom prst="ellipse">
             <a:avLst/>
@@ -2716,7 +2964,7 @@
       </p:sp>
       <p:pic>
         <p:nvPicPr>
-          <p:cNvPr id="12" name="Image 1" descr="/home/claude/deck16/icons/check.png">    </p:cNvPr>
+          <p:cNvPr id="13" name="Image 1" descr="preencoded.png">    </p:cNvPr>
           <p:cNvPicPr>
             <a:picLocks noChangeAspect="1"/>
           </p:cNvPicPr>
@@ -2730,8 +2978,8 @@
         </p:blipFill>
         <p:spPr>
           <a:xfrm>
-            <a:off x="6693408" y="2359152"/>
-            <a:ext cx="274320" cy="274320"/>
+            <a:off x="6793992" y="1901952"/>
+            <a:ext cx="310896" cy="310896"/>
           </a:xfrm>
           <a:prstGeom prst="rect">
             <a:avLst/>
@@ -2740,95 +2988,95 @@
       </p:pic>
       <p:sp>
         <p:nvSpPr>
-          <p:cNvPr id="13" name="Text 9"/>
-          <p:cNvSpPr/>
-          <p:nvPr/>
-        </p:nvSpPr>
-        <p:spPr>
-          <a:xfrm>
-            <a:off x="7214616" y="2240280"/>
-            <a:ext cx="4251960" cy="502920"/>
-          </a:xfrm>
-          <a:prstGeom prst="rect">
-            <a:avLst/>
-          </a:prstGeom>
-          <a:noFill/>
-          <a:ln/>
-        </p:spPr>
-        <p:txBody>
-          <a:bodyPr wrap="square" rtlCol="0" anchor="ctr"/>
-          <a:lstStyle/>
-          <a:p>
-            <a:pPr indent="0" marL="0">
-              <a:buNone/>
-            </a:pPr>
-            <a:r>
-              <a:rPr lang="en-US" sz="1600" b="1" dirty="0">
-                <a:solidFill>
-                  <a:srgbClr val="141B49"/>
+          <p:cNvPr id="14" name="Text 10"/>
+          <p:cNvSpPr txBox="1"/>
+          <p:nvPr/>
+        </p:nvSpPr>
+        <p:spPr>
+          <a:xfrm>
+            <a:off x="7406640" y="1737360"/>
+            <a:ext cx="3931920" cy="640080"/>
+          </a:xfrm>
+          <a:prstGeom prst="rect">
+            <a:avLst/>
+          </a:prstGeom>
+          <a:noFill/>
+          <a:ln/>
+        </p:spPr>
+        <p:txBody>
+          <a:bodyPr wrap="square" lIns="0" tIns="0" rIns="0" bIns="0" rtlCol="0" anchor="ctr"/>
+          <a:lstStyle/>
+          <a:p>
+            <a:pPr indent="0" marL="0">
+              <a:buNone/>
+            </a:pPr>
+            <a:r>
+              <a:rPr lang="en-US" sz="1550" b="1" dirty="0">
+                <a:solidFill>
+                  <a:srgbClr val="FFFFFF"/>
                 </a:solidFill>
                 <a:latin typeface="Cambria" pitchFamily="34" charset="0"/>
                 <a:ea typeface="Cambria" pitchFamily="34" charset="-122"/>
                 <a:cs typeface="Cambria" pitchFamily="34" charset="-120"/>
               </a:rPr>
-              <a:t>"dotnet build"</a:t>
-            </a:r>
-            <a:endParaRPr lang="en-US" sz="1600" dirty="0"/>
-          </a:p>
-        </p:txBody>
-      </p:sp>
-      <p:sp>
-        <p:nvSpPr>
-          <p:cNvPr id="14" name="Text 10"/>
-          <p:cNvSpPr/>
-          <p:nvPr/>
-        </p:nvSpPr>
-        <p:spPr>
-          <a:xfrm>
-            <a:off x="6574536" y="2880360"/>
-            <a:ext cx="4800600" cy="1005840"/>
-          </a:xfrm>
-          <a:prstGeom prst="rect">
-            <a:avLst/>
-          </a:prstGeom>
-          <a:noFill/>
-          <a:ln/>
-        </p:spPr>
-        <p:txBody>
-          <a:bodyPr wrap="square" rtlCol="0" anchor="ctr"/>
-          <a:lstStyle/>
-          <a:p>
-            <a:pPr indent="0" marL="0">
-              <a:lnSpc>
-                <a:spcPts val="1800"/>
-              </a:lnSpc>
-              <a:buNone/>
-            </a:pPr>
-            <a:r>
-              <a:rPr lang="en-US" sz="1300" b="1" dirty="0">
-                <a:solidFill>
-                  <a:srgbClr val="141B49"/>
+              <a:t>A Refusal Here Has the Same Shape as Every Refusal in the Course</a:t>
+            </a:r>
+            <a:endParaRPr lang="en-US" sz="1550" dirty="0"/>
+          </a:p>
+        </p:txBody>
+      </p:sp>
+      <p:sp>
+        <p:nvSpPr>
+          <p:cNvPr id="15" name="Text 11"/>
+          <p:cNvSpPr txBox="1"/>
+          <p:nvPr/>
+        </p:nvSpPr>
+        <p:spPr>
+          <a:xfrm>
+            <a:off x="6629400" y="2606040"/>
+            <a:ext cx="4709160" cy="1463040"/>
+          </a:xfrm>
+          <a:prstGeom prst="rect">
+            <a:avLst/>
+          </a:prstGeom>
+          <a:noFill/>
+          <a:ln/>
+        </p:spPr>
+        <p:txBody>
+          <a:bodyPr wrap="square" lIns="0" tIns="0" rIns="0" bIns="0" rtlCol="0" anchor="t"/>
+          <a:lstStyle/>
+          <a:p>
+            <a:pPr indent="0" marL="0">
+              <a:lnSpc>
+                <a:spcPct val="125000"/>
+              </a:lnSpc>
+              <a:buNone/>
+            </a:pPr>
+            <a:r>
+              <a:rPr lang="en-US" sz="1350" dirty="0">
+                <a:solidFill>
+                  <a:srgbClr val="FFFFFF"/>
                 </a:solidFill>
                 <a:latin typeface="Calibri" pitchFamily="34" charset="0"/>
                 <a:ea typeface="Calibri" pitchFamily="34" charset="-122"/>
                 <a:cs typeface="Calibri" pitchFamily="34" charset="-120"/>
               </a:rPr>
-              <a:t>Pairing the program with its subcommand is what makes an entry mean one specific thing.</a:t>
-            </a:r>
-            <a:endParaRPr lang="en-US" sz="1300" dirty="0"/>
-          </a:p>
-        </p:txBody>
-      </p:sp>
-      <p:sp>
-        <p:nvSpPr>
-          <p:cNvPr id="15" name="Shape 11"/>
+              <a:t>Throw a sentence naming what was asked and what is allowed; Module 5a's invoker turns it into text; the model reads it and tries something on the list instead.</a:t>
+            </a:r>
+            <a:endParaRPr lang="en-US" sz="1350" dirty="0"/>
+          </a:p>
+        </p:txBody>
+      </p:sp>
+      <p:sp>
+        <p:nvSpPr>
+          <p:cNvPr id="16" name="Shape 12"/>
           <p:cNvSpPr/>
           <p:nvPr/>
         </p:nvSpPr>
         <p:spPr>
           <a:xfrm>
-            <a:off x="822960" y="4434840"/>
-            <a:ext cx="10515600" cy="1371600"/>
+            <a:off x="548640" y="4709160"/>
+            <a:ext cx="11064240" cy="1371600"/>
           </a:xfrm>
           <a:prstGeom prst="roundRect">
             <a:avLst>
@@ -2836,11 +3084,11 @@
             </a:avLst>
           </a:prstGeom>
           <a:solidFill>
-            <a:srgbClr val="141B49"/>
+            <a:srgbClr val="1E2761"/>
           </a:solidFill>
-          <a:ln w="12700">
+          <a:ln w="15875">
             <a:solidFill>
-              <a:srgbClr val="3FBFB0"/>
+              <a:srgbClr val="F87171"/>
             </a:solidFill>
             <a:prstDash val="solid"/>
           </a:ln>
@@ -2848,69 +3096,113 @@
       </p:sp>
       <p:sp>
         <p:nvSpPr>
-          <p:cNvPr id="16" name="Text 12"/>
+          <p:cNvPr id="17" name="Shape 13"/>
           <p:cNvSpPr/>
           <p:nvPr/>
         </p:nvSpPr>
         <p:spPr>
           <a:xfrm>
-            <a:off x="1097280" y="4617720"/>
-            <a:ext cx="9966960" cy="457200"/>
-          </a:xfrm>
-          <a:prstGeom prst="rect">
-            <a:avLst/>
-          </a:prstGeom>
-          <a:noFill/>
-          <a:ln/>
-        </p:spPr>
-        <p:txBody>
-          <a:bodyPr wrap="square" rtlCol="0" anchor="ctr"/>
-          <a:lstStyle/>
-          <a:p>
-            <a:pPr indent="0" marL="0">
-              <a:buNone/>
-            </a:pPr>
-            <a:r>
-              <a:rPr lang="en-US" sz="1500" b="1" dirty="0">
-                <a:solidFill>
-                  <a:srgbClr val="3FBFB0"/>
-                </a:solidFill>
-                <a:latin typeface="Courier New" pitchFamily="34" charset="0"/>
-                <a:ea typeface="Courier New" pitchFamily="34" charset="-122"/>
-                <a:cs typeface="Courier New" pitchFamily="34" charset="-120"/>
-              </a:rPr>
-              <a:t>dotnet restore · dotnet build · dotnet test · dotnet format</a:t>
-            </a:r>
-            <a:endParaRPr lang="en-US" sz="1500" dirty="0"/>
-          </a:p>
-        </p:txBody>
-      </p:sp>
-      <p:sp>
-        <p:nvSpPr>
-          <p:cNvPr id="17" name="Text 13"/>
-          <p:cNvSpPr/>
-          <p:nvPr/>
-        </p:nvSpPr>
-        <p:spPr>
-          <a:xfrm>
-            <a:off x="1097280" y="5120640"/>
-            <a:ext cx="9966960" cy="502920"/>
-          </a:xfrm>
-          <a:prstGeom prst="rect">
-            <a:avLst/>
-          </a:prstGeom>
-          <a:noFill/>
-          <a:ln/>
-        </p:spPr>
-        <p:txBody>
-          <a:bodyPr wrap="square" rtlCol="0" anchor="ctr"/>
-          <a:lstStyle/>
-          <a:p>
-            <a:pPr indent="0" marL="0">
-              <a:buNone/>
-            </a:pPr>
-            <a:r>
-              <a:rPr lang="en-US" sz="1200" i="1" dirty="0">
+            <a:off x="841248" y="5001768"/>
+            <a:ext cx="566928" cy="566928"/>
+          </a:xfrm>
+          <a:prstGeom prst="ellipse">
+            <a:avLst/>
+          </a:prstGeom>
+          <a:solidFill>
+            <a:srgbClr val="F87171"/>
+          </a:solidFill>
+          <a:ln/>
+        </p:spPr>
+      </p:sp>
+      <p:pic>
+        <p:nvPicPr>
+          <p:cNvPr id="18" name="Image 2" descr="preencoded.png">    </p:cNvPr>
+          <p:cNvPicPr>
+            <a:picLocks noChangeAspect="1"/>
+          </p:cNvPicPr>
+          <p:nvPr/>
+        </p:nvPicPr>
+        <p:blipFill>
+          <a:blip r:embed="rId3"/>
+          <a:stretch>
+            <a:fillRect/>
+          </a:stretch>
+        </p:blipFill>
+        <p:spPr>
+          <a:xfrm>
+            <a:off x="987552" y="5148072"/>
+            <a:ext cx="274320" cy="274320"/>
+          </a:xfrm>
+          <a:prstGeom prst="rect">
+            <a:avLst/>
+          </a:prstGeom>
+        </p:spPr>
+      </p:pic>
+      <p:sp>
+        <p:nvSpPr>
+          <p:cNvPr id="19" name="Text 14"/>
+          <p:cNvSpPr txBox="1"/>
+          <p:nvPr/>
+        </p:nvSpPr>
+        <p:spPr>
+          <a:xfrm>
+            <a:off x="1554480" y="4910328"/>
+            <a:ext cx="9784080" cy="384048"/>
+          </a:xfrm>
+          <a:prstGeom prst="rect">
+            <a:avLst/>
+          </a:prstGeom>
+          <a:noFill/>
+          <a:ln/>
+        </p:spPr>
+        <p:txBody>
+          <a:bodyPr wrap="square" lIns="0" tIns="0" rIns="0" bIns="0" rtlCol="0" anchor="ctr"/>
+          <a:lstStyle/>
+          <a:p>
+            <a:pPr indent="0" marL="0">
+              <a:buNone/>
+            </a:pPr>
+            <a:r>
+              <a:rPr lang="en-US" sz="1450" b="1" dirty="0">
+                <a:solidFill>
+                  <a:srgbClr val="FFFFFF"/>
+                </a:solidFill>
+                <a:latin typeface="Cambria" pitchFamily="34" charset="0"/>
+                <a:ea typeface="Cambria" pitchFamily="34" charset="-122"/>
+                <a:cs typeface="Cambria" pitchFamily="34" charset="-120"/>
+              </a:rPr>
+              <a:t>What this Module deliberately does not do</a:t>
+            </a:r>
+            <a:endParaRPr lang="en-US" sz="1450" dirty="0"/>
+          </a:p>
+        </p:txBody>
+      </p:sp>
+      <p:sp>
+        <p:nvSpPr>
+          <p:cNvPr id="20" name="Text 15"/>
+          <p:cNvSpPr txBox="1"/>
+          <p:nvPr/>
+        </p:nvSpPr>
+        <p:spPr>
+          <a:xfrm>
+            <a:off x="1554480" y="5349240"/>
+            <a:ext cx="9784080" cy="548640"/>
+          </a:xfrm>
+          <a:prstGeom prst="rect">
+            <a:avLst/>
+          </a:prstGeom>
+          <a:noFill/>
+          <a:ln/>
+        </p:spPr>
+        <p:txBody>
+          <a:bodyPr wrap="square" lIns="0" tIns="0" rIns="0" bIns="0" rtlCol="0" anchor="t"/>
+          <a:lstStyle/>
+          <a:p>
+            <a:pPr indent="0" marL="0">
+              <a:buNone/>
+            </a:pPr>
+            <a:r>
+              <a:rPr lang="en-US" sz="1200" dirty="0">
                 <a:solidFill>
                   <a:srgbClr val="CADCFC"/>
                 </a:solidFill>
@@ -2918,87 +3210,9 @@
                 <a:ea typeface="Calibri" pitchFamily="34" charset="-122"/>
                 <a:cs typeface="Calibri" pitchFamily="34" charset="-120"/>
               </a:rPr>
-              <a:t>"dotnet" alone is deliberately absent, so nothing else the model could put after it is allowed by accident.</a:t>
+              <a:t>The list stops a careless or prompt-injected command from starting. It does not stop a model that decides to get there another way — Module 10 already gave it write_file, and a .csproj with a custom build target can run anything dotnet build is asked to run, on the list by name. Closing that is Module 15's job, not a gap in this one.</a:t>
             </a:r>
             <a:endParaRPr lang="en-US" sz="1200" dirty="0"/>
-          </a:p>
-        </p:txBody>
-      </p:sp>
-      <p:sp>
-        <p:nvSpPr>
-          <p:cNvPr id="18" name="Text 14"/>
-          <p:cNvSpPr/>
-          <p:nvPr/>
-        </p:nvSpPr>
-        <p:spPr>
-          <a:xfrm>
-            <a:off x="457200" y="6510528"/>
-            <a:ext cx="9601200" cy="274320"/>
-          </a:xfrm>
-          <a:prstGeom prst="rect">
-            <a:avLst/>
-          </a:prstGeom>
-          <a:noFill/>
-          <a:ln/>
-        </p:spPr>
-        <p:txBody>
-          <a:bodyPr wrap="square" rtlCol="0" anchor="ctr"/>
-          <a:lstStyle/>
-          <a:p>
-            <a:pPr indent="0" marL="0">
-              <a:buNone/>
-            </a:pPr>
-            <a:r>
-              <a:rPr lang="en-US" sz="900" dirty="0">
-                <a:solidFill>
-                  <a:srgbClr val="6B7280"/>
-                </a:solidFill>
-                <a:latin typeface="Calibri" pitchFamily="34" charset="0"/>
-                <a:ea typeface="Calibri" pitchFamily="34" charset="-122"/>
-                <a:cs typeface="Calibri" pitchFamily="34" charset="-120"/>
-              </a:rPr>
-              <a:t>MODULE 11B — SHELL COMMAND EXECUTION: THE COMMAND ALLOW LIST</a:t>
-            </a:r>
-            <a:endParaRPr lang="en-US" sz="900" dirty="0"/>
-          </a:p>
-        </p:txBody>
-      </p:sp>
-      <p:sp>
-        <p:nvSpPr>
-          <p:cNvPr id="19" name="Text 15"/>
-          <p:cNvSpPr/>
-          <p:nvPr/>
-        </p:nvSpPr>
-        <p:spPr>
-          <a:xfrm>
-            <a:off x="11338560" y="6510528"/>
-            <a:ext cx="365760" cy="274320"/>
-          </a:xfrm>
-          <a:prstGeom prst="rect">
-            <a:avLst/>
-          </a:prstGeom>
-          <a:noFill/>
-          <a:ln/>
-        </p:spPr>
-        <p:txBody>
-          <a:bodyPr wrap="square" rtlCol="0" anchor="ctr"/>
-          <a:lstStyle/>
-          <a:p>
-            <a:pPr algn="r" indent="0" marL="0">
-              <a:buNone/>
-            </a:pPr>
-            <a:r>
-              <a:rPr lang="en-US" sz="900" dirty="0">
-                <a:solidFill>
-                  <a:srgbClr val="6B7280"/>
-                </a:solidFill>
-                <a:latin typeface="Calibri" pitchFamily="34" charset="0"/>
-                <a:ea typeface="Calibri" pitchFamily="34" charset="-122"/>
-                <a:cs typeface="Calibri" pitchFamily="34" charset="-120"/>
-              </a:rPr>
-              <a:t>3</a:t>
-            </a:r>
-            <a:endParaRPr lang="en-US" sz="900" dirty="0"/>
           </a:p>
         </p:txBody>
       </p:sp>
@@ -3016,7 +3230,7 @@
     <p:bg>
       <p:bgPr>
         <a:solidFill>
-          <a:srgbClr val="FFFFFF"/>
+          <a:srgbClr val="1E2761"/>
         </a:solidFill>
       </p:bgPr>
     </p:bg>
@@ -3037,7 +3251,7 @@
       <p:sp>
         <p:nvSpPr>
           <p:cNvPr id="2" name="Text 0"/>
-          <p:cNvSpPr/>
+          <p:cNvSpPr txBox="1"/>
           <p:nvPr/>
         </p:nvSpPr>
         <p:spPr>
@@ -3052,7 +3266,7 @@
           <a:ln/>
         </p:spPr>
         <p:txBody>
-          <a:bodyPr wrap="square" rtlCol="0" anchor="ctr"/>
+          <a:bodyPr wrap="square" lIns="0" tIns="0" rIns="0" bIns="0" rtlCol="0" anchor="ctr"/>
           <a:lstStyle/>
           <a:p>
             <a:pPr indent="0" marL="0">
@@ -3067,7 +3281,7 @@
                 <a:ea typeface="Calibri" pitchFamily="34" charset="-122"/>
                 <a:cs typeface="Calibri" pitchFamily="34" charset="-120"/>
               </a:rPr>
-              <a:t>ARCHITECTURE</a:t>
+              <a:t>THE CODE</a:t>
             </a:r>
             <a:endParaRPr lang="en-US" sz="1200" dirty="0"/>
           </a:p>
@@ -3076,7 +3290,7 @@
       <p:sp>
         <p:nvSpPr>
           <p:cNvPr id="3" name="Text 1"/>
-          <p:cNvSpPr/>
+          <p:cNvSpPr txBox="1"/>
           <p:nvPr/>
         </p:nvSpPr>
         <p:spPr>
@@ -3091,7 +3305,7 @@
           <a:ln/>
         </p:spPr>
         <p:txBody>
-          <a:bodyPr wrap="square" rtlCol="0" anchor="ctr"/>
+          <a:bodyPr wrap="square" lIns="0" tIns="0" rIns="0" bIns="0" rtlCol="0" anchor="t"/>
           <a:lstStyle/>
           <a:p>
             <a:pPr indent="0" marL="0">
@@ -3100,13 +3314,13 @@
             <a:r>
               <a:rPr lang="en-US" sz="3200" b="1" dirty="0">
                 <a:solidFill>
-                  <a:srgbClr val="1E2761"/>
+                  <a:srgbClr val="FFFFFF"/>
                 </a:solidFill>
                 <a:latin typeface="Cambria" pitchFamily="34" charset="0"/>
                 <a:ea typeface="Cambria" pitchFamily="34" charset="-122"/>
                 <a:cs typeface="Cambria" pitchFamily="34" charset="-120"/>
               </a:rPr>
-              <a:t>A Refusal Before a Process Ever Exists</a:t>
+              <a:t>A List, a Predicate, and a Decorator</a:t>
             </a:r>
             <a:endParaRPr lang="en-US" sz="3200" dirty="0"/>
           </a:p>
@@ -3114,464 +3328,1217 @@
       </p:sp>
       <p:sp>
         <p:nvSpPr>
-          <p:cNvPr id="4" name="Shape 2"/>
-          <p:cNvSpPr/>
-          <p:nvPr/>
-        </p:nvSpPr>
-        <p:spPr>
-          <a:xfrm>
-            <a:off x="2788920" y="1508760"/>
-            <a:ext cx="6583680" cy="822960"/>
-          </a:xfrm>
-          <a:prstGeom prst="roundRect">
-            <a:avLst>
-              <a:gd name="adj" fmla="val 8889"/>
-            </a:avLst>
-          </a:prstGeom>
-          <a:solidFill>
-            <a:srgbClr val="1E2761"/>
-          </a:solidFill>
-          <a:ln/>
-        </p:spPr>
-      </p:sp>
-      <p:sp>
-        <p:nvSpPr>
-          <p:cNvPr id="5" name="Shape 3"/>
-          <p:cNvSpPr/>
-          <p:nvPr/>
-        </p:nvSpPr>
-        <p:spPr>
-          <a:xfrm>
-            <a:off x="3017520" y="1682496"/>
-            <a:ext cx="475488" cy="475488"/>
-          </a:xfrm>
-          <a:prstGeom prst="ellipse">
-            <a:avLst/>
-          </a:prstGeom>
-          <a:solidFill>
-            <a:srgbClr val="3FBFB0"/>
-          </a:solidFill>
-          <a:ln/>
-        </p:spPr>
-      </p:sp>
-      <p:pic>
-        <p:nvPicPr>
-          <p:cNvPr id="6" name="Image 0" descr="/home/claude/deck16/icons/robot.png">    </p:cNvPr>
-          <p:cNvPicPr>
-            <a:picLocks noChangeAspect="1"/>
-          </p:cNvPicPr>
-          <p:nvPr/>
-        </p:nvPicPr>
-        <p:blipFill>
-          <a:blip r:embed="rId1"/>
-          <a:stretch>
-            <a:fillRect/>
-          </a:stretch>
-        </p:blipFill>
-        <p:spPr>
-          <a:xfrm>
-            <a:off x="3145536" y="1801368"/>
-            <a:ext cx="219456" cy="219456"/>
-          </a:xfrm>
-          <a:prstGeom prst="rect">
-            <a:avLst/>
-          </a:prstGeom>
-        </p:spPr>
-      </p:pic>
-      <p:sp>
-        <p:nvSpPr>
-          <p:cNvPr id="7" name="Text 4"/>
-          <p:cNvSpPr/>
-          <p:nvPr/>
-        </p:nvSpPr>
-        <p:spPr>
-          <a:xfrm>
-            <a:off x="3657600" y="1600200"/>
-            <a:ext cx="5669280" cy="365760"/>
-          </a:xfrm>
-          <a:prstGeom prst="rect">
-            <a:avLst/>
-          </a:prstGeom>
-          <a:noFill/>
-          <a:ln/>
-        </p:spPr>
-        <p:txBody>
-          <a:bodyPr wrap="square" rtlCol="0" anchor="ctr"/>
-          <a:lstStyle/>
-          <a:p>
-            <a:pPr indent="0" marL="0">
-              <a:buNone/>
-            </a:pPr>
-            <a:r>
-              <a:rPr lang="en-US" sz="1450" b="1" dirty="0">
-                <a:solidFill>
-                  <a:srgbClr val="FFFFFF"/>
-                </a:solidFill>
-                <a:latin typeface="Cambria" pitchFamily="34" charset="0"/>
-                <a:ea typeface="Cambria" pitchFamily="34" charset="-122"/>
-                <a:cs typeface="Cambria" pitchFamily="34" charset="-120"/>
-              </a:rPr>
-              <a:t>Model calls run_command</a:t>
-            </a:r>
-            <a:endParaRPr lang="en-US" sz="1450" dirty="0"/>
-          </a:p>
-        </p:txBody>
-      </p:sp>
-      <p:sp>
-        <p:nvSpPr>
-          <p:cNvPr id="8" name="Text 5"/>
-          <p:cNvSpPr/>
-          <p:nvPr/>
-        </p:nvSpPr>
-        <p:spPr>
-          <a:xfrm>
-            <a:off x="3657600" y="1965960"/>
-            <a:ext cx="5669280" cy="310896"/>
-          </a:xfrm>
-          <a:prstGeom prst="rect">
-            <a:avLst/>
-          </a:prstGeom>
-          <a:noFill/>
-          <a:ln/>
-        </p:spPr>
-        <p:txBody>
-          <a:bodyPr wrap="square" rtlCol="0" anchor="ctr"/>
-          <a:lstStyle/>
-          <a:p>
-            <a:pPr indent="0" marL="0">
-              <a:buNone/>
-            </a:pPr>
-            <a:r>
-              <a:rPr lang="en-US" sz="1050" i="1" dirty="0">
-                <a:solidFill>
-                  <a:srgbClr val="CADCFC"/>
+          <p:cNvPr id="4" name="Text 2"/>
+          <p:cNvSpPr txBox="1"/>
+          <p:nvPr/>
+        </p:nvSpPr>
+        <p:spPr>
+          <a:xfrm>
+            <a:off x="457200" y="6510528"/>
+            <a:ext cx="8686800" cy="274320"/>
+          </a:xfrm>
+          <a:prstGeom prst="rect">
+            <a:avLst/>
+          </a:prstGeom>
+          <a:noFill/>
+          <a:ln/>
+        </p:spPr>
+        <p:txBody>
+          <a:bodyPr wrap="square" lIns="0" tIns="0" rIns="0" bIns="0" rtlCol="0" anchor="ctr"/>
+          <a:lstStyle/>
+          <a:p>
+            <a:pPr indent="0" marL="0">
+              <a:buNone/>
+            </a:pPr>
+            <a:r>
+              <a:rPr lang="en-US" sz="900" dirty="0">
+                <a:solidFill>
+                  <a:srgbClr val="6B7280"/>
                 </a:solidFill>
                 <a:latin typeface="Calibri" pitchFamily="34" charset="0"/>
                 <a:ea typeface="Calibri" pitchFamily="34" charset="-122"/>
                 <a:cs typeface="Calibri" pitchFamily="34" charset="-120"/>
               </a:rPr>
-              <a:t>e.g. dotnet nuget push</a:t>
-            </a:r>
-            <a:endParaRPr lang="en-US" sz="1050" dirty="0"/>
-          </a:p>
-        </p:txBody>
-      </p:sp>
-      <p:pic>
-        <p:nvPicPr>
-          <p:cNvPr id="9" name="Image 1" descr="/home/claude/deck16/icons/arrowdown.png">    </p:cNvPr>
-          <p:cNvPicPr>
-            <a:picLocks noChangeAspect="1"/>
-          </p:cNvPicPr>
-          <p:nvPr/>
-        </p:nvPicPr>
-        <p:blipFill>
-          <a:blip r:embed="rId2"/>
-          <a:stretch>
-            <a:fillRect/>
-          </a:stretch>
-        </p:blipFill>
-        <p:spPr>
-          <a:xfrm>
-            <a:off x="5980176" y="2377440"/>
-            <a:ext cx="201168" cy="201168"/>
-          </a:xfrm>
-          <a:prstGeom prst="rect">
-            <a:avLst/>
-          </a:prstGeom>
-        </p:spPr>
-      </p:pic>
-      <p:sp>
-        <p:nvSpPr>
-          <p:cNvPr id="10" name="Shape 6"/>
-          <p:cNvSpPr/>
-          <p:nvPr/>
-        </p:nvSpPr>
-        <p:spPr>
-          <a:xfrm>
-            <a:off x="2788920" y="2587752"/>
-            <a:ext cx="6583680" cy="822960"/>
-          </a:xfrm>
-          <a:prstGeom prst="roundRect">
-            <a:avLst>
-              <a:gd name="adj" fmla="val 8889"/>
-            </a:avLst>
-          </a:prstGeom>
-          <a:solidFill>
-            <a:srgbClr val="3FBFB0"/>
-          </a:solidFill>
-          <a:ln/>
-        </p:spPr>
-      </p:sp>
-      <p:sp>
-        <p:nvSpPr>
-          <p:cNvPr id="11" name="Shape 7"/>
-          <p:cNvSpPr/>
-          <p:nvPr/>
-        </p:nvSpPr>
-        <p:spPr>
-          <a:xfrm>
-            <a:off x="3017520" y="2761488"/>
-            <a:ext cx="475488" cy="475488"/>
-          </a:xfrm>
-          <a:prstGeom prst="ellipse">
-            <a:avLst/>
-          </a:prstGeom>
-          <a:solidFill>
-            <a:srgbClr val="3FBFB0"/>
-          </a:solidFill>
-          <a:ln/>
-        </p:spPr>
-      </p:sp>
-      <p:pic>
-        <p:nvPicPr>
-          <p:cNvPr id="12" name="Image 2" descr="/home/claude/deck16/icons/shield.png">    </p:cNvPr>
-          <p:cNvPicPr>
-            <a:picLocks noChangeAspect="1"/>
-          </p:cNvPicPr>
-          <p:nvPr/>
-        </p:nvPicPr>
-        <p:blipFill>
-          <a:blip r:embed="rId3"/>
-          <a:stretch>
-            <a:fillRect/>
-          </a:stretch>
-        </p:blipFill>
-        <p:spPr>
-          <a:xfrm>
-            <a:off x="3145536" y="2880360"/>
-            <a:ext cx="219456" cy="219456"/>
-          </a:xfrm>
-          <a:prstGeom prst="rect">
-            <a:avLst/>
-          </a:prstGeom>
-        </p:spPr>
-      </p:pic>
-      <p:sp>
-        <p:nvSpPr>
-          <p:cNvPr id="13" name="Text 8"/>
-          <p:cNvSpPr/>
-          <p:nvPr/>
-        </p:nvSpPr>
-        <p:spPr>
-          <a:xfrm>
-            <a:off x="3657600" y="2679192"/>
-            <a:ext cx="5669280" cy="365760"/>
-          </a:xfrm>
-          <a:prstGeom prst="rect">
-            <a:avLst/>
-          </a:prstGeom>
-          <a:noFill/>
-          <a:ln/>
-        </p:spPr>
-        <p:txBody>
-          <a:bodyPr wrap="square" rtlCol="0" anchor="ctr"/>
-          <a:lstStyle/>
-          <a:p>
-            <a:pPr indent="0" marL="0">
-              <a:buNone/>
-            </a:pPr>
-            <a:r>
-              <a:rPr lang="en-US" sz="1450" b="1" dirty="0">
-                <a:solidFill>
-                  <a:srgbClr val="141B49"/>
-                </a:solidFill>
-                <a:latin typeface="Cambria" pitchFamily="34" charset="0"/>
-                <a:ea typeface="Cambria" pitchFamily="34" charset="-122"/>
-                <a:cs typeface="Cambria" pitchFamily="34" charset="-120"/>
-              </a:rPr>
-              <a:t>AllowListedShellExecutor.RunAsync</a:t>
-            </a:r>
-            <a:endParaRPr lang="en-US" sz="1450" dirty="0"/>
-          </a:p>
-        </p:txBody>
-      </p:sp>
-      <p:sp>
-        <p:nvSpPr>
-          <p:cNvPr id="14" name="Text 9"/>
-          <p:cNvSpPr/>
-          <p:nvPr/>
-        </p:nvSpPr>
-        <p:spPr>
-          <a:xfrm>
-            <a:off x="3657600" y="3044952"/>
-            <a:ext cx="5669280" cy="310896"/>
-          </a:xfrm>
-          <a:prstGeom prst="rect">
-            <a:avLst/>
-          </a:prstGeom>
-          <a:noFill/>
-          <a:ln/>
-        </p:spPr>
-        <p:txBody>
-          <a:bodyPr wrap="square" rtlCol="0" anchor="ctr"/>
-          <a:lstStyle/>
-          <a:p>
-            <a:pPr indent="0" marL="0">
-              <a:buNone/>
-            </a:pPr>
-            <a:r>
-              <a:rPr lang="en-US" sz="1050" i="1" dirty="0">
-                <a:solidFill>
-                  <a:srgbClr val="141B49"/>
+              <a:t>MODULE 11B — SHELL COMMAND EXECUTION: THE COMMAND ALLOW LIST</a:t>
+            </a:r>
+            <a:endParaRPr lang="en-US" sz="900" dirty="0"/>
+          </a:p>
+        </p:txBody>
+      </p:sp>
+      <p:sp>
+        <p:nvSpPr>
+          <p:cNvPr id="5" name="Text 3"/>
+          <p:cNvSpPr txBox="1"/>
+          <p:nvPr/>
+        </p:nvSpPr>
+        <p:spPr>
+          <a:xfrm>
+            <a:off x="11338560" y="6510528"/>
+            <a:ext cx="365760" cy="274320"/>
+          </a:xfrm>
+          <a:prstGeom prst="rect">
+            <a:avLst/>
+          </a:prstGeom>
+          <a:noFill/>
+          <a:ln/>
+        </p:spPr>
+        <p:txBody>
+          <a:bodyPr wrap="square" lIns="0" tIns="0" rIns="0" bIns="0" rtlCol="0" anchor="ctr"/>
+          <a:lstStyle/>
+          <a:p>
+            <a:pPr algn="r" indent="0" marL="0">
+              <a:buNone/>
+            </a:pPr>
+            <a:r>
+              <a:rPr lang="en-US" sz="900" dirty="0">
+                <a:solidFill>
+                  <a:srgbClr val="6B7280"/>
                 </a:solidFill>
                 <a:latin typeface="Calibri" pitchFamily="34" charset="0"/>
                 <a:ea typeface="Calibri" pitchFamily="34" charset="-122"/>
                 <a:cs typeface="Calibri" pitchFamily="34" charset="-120"/>
               </a:rPr>
-              <a:t>checks ICommandAllowList.IsAllowed first</a:t>
-            </a:r>
-            <a:endParaRPr lang="en-US" sz="1050" dirty="0"/>
-          </a:p>
-        </p:txBody>
-      </p:sp>
-      <p:pic>
-        <p:nvPicPr>
-          <p:cNvPr id="15" name="Image 3" descr="/home/claude/deck16/icons/arrowdown.png">    </p:cNvPr>
-          <p:cNvPicPr>
-            <a:picLocks noChangeAspect="1"/>
-          </p:cNvPicPr>
-          <p:nvPr/>
-        </p:nvPicPr>
-        <p:blipFill>
-          <a:blip r:embed="rId4"/>
-          <a:stretch>
-            <a:fillRect/>
-          </a:stretch>
-        </p:blipFill>
-        <p:spPr>
-          <a:xfrm>
-            <a:off x="5980176" y="3456432"/>
-            <a:ext cx="201168" cy="201168"/>
-          </a:xfrm>
-          <a:prstGeom prst="rect">
-            <a:avLst/>
-          </a:prstGeom>
-        </p:spPr>
-      </p:pic>
-      <p:sp>
-        <p:nvSpPr>
-          <p:cNvPr id="16" name="Shape 10"/>
+              <a:t>4</a:t>
+            </a:r>
+            <a:endParaRPr lang="en-US" sz="900" dirty="0"/>
+          </a:p>
+        </p:txBody>
+      </p:sp>
+      <p:sp>
+        <p:nvSpPr>
+          <p:cNvPr id="6" name="Shape 4"/>
           <p:cNvSpPr/>
           <p:nvPr/>
         </p:nvSpPr>
         <p:spPr>
           <a:xfrm>
-            <a:off x="2788920" y="3666744"/>
-            <a:ext cx="6583680" cy="822960"/>
+            <a:off x="548640" y="1417320"/>
+            <a:ext cx="5349240" cy="4754880"/>
           </a:xfrm>
           <a:prstGeom prst="roundRect">
             <a:avLst>
-              <a:gd name="adj" fmla="val 8889"/>
+              <a:gd name="adj" fmla="val 1923"/>
             </a:avLst>
-          </a:prstGeom>
-          <a:solidFill>
-            <a:srgbClr val="F87171"/>
-          </a:solidFill>
-          <a:ln/>
-        </p:spPr>
-      </p:sp>
-      <p:sp>
-        <p:nvSpPr>
-          <p:cNvPr id="17" name="Shape 11"/>
-          <p:cNvSpPr/>
-          <p:nvPr/>
-        </p:nvSpPr>
-        <p:spPr>
-          <a:xfrm>
-            <a:off x="3017520" y="3840480"/>
-            <a:ext cx="475488" cy="475488"/>
-          </a:xfrm>
-          <a:prstGeom prst="ellipse">
-            <a:avLst/>
           </a:prstGeom>
           <a:solidFill>
             <a:srgbClr val="141B49"/>
           </a:solidFill>
-          <a:ln/>
-        </p:spPr>
-      </p:sp>
-      <p:pic>
-        <p:nvPicPr>
-          <p:cNvPr id="18" name="Image 4" descr="/home/claude/deck16/icons/ban.png">    </p:cNvPr>
-          <p:cNvPicPr>
-            <a:picLocks noChangeAspect="1"/>
-          </p:cNvPicPr>
-          <p:nvPr/>
-        </p:nvPicPr>
-        <p:blipFill>
-          <a:blip r:embed="rId5"/>
-          <a:stretch>
-            <a:fillRect/>
-          </a:stretch>
-        </p:blipFill>
-        <p:spPr>
-          <a:xfrm>
-            <a:off x="3145536" y="3959352"/>
-            <a:ext cx="219456" cy="219456"/>
-          </a:xfrm>
-          <a:prstGeom prst="rect">
-            <a:avLst/>
-          </a:prstGeom>
-        </p:spPr>
-      </p:pic>
-      <p:sp>
-        <p:nvSpPr>
-          <p:cNvPr id="19" name="Text 12"/>
+          <a:ln w="12700">
+            <a:solidFill>
+              <a:srgbClr val="3FBFB0"/>
+            </a:solidFill>
+            <a:prstDash val="solid"/>
+          </a:ln>
+        </p:spPr>
+      </p:sp>
+      <p:sp>
+        <p:nvSpPr>
+          <p:cNvPr id="7" name="Text 5"/>
+          <p:cNvSpPr txBox="1"/>
+          <p:nvPr/>
+        </p:nvSpPr>
+        <p:spPr>
+          <a:xfrm>
+            <a:off x="877824" y="1673352"/>
+            <a:ext cx="4690872" cy="225552"/>
+          </a:xfrm>
+          <a:prstGeom prst="rect">
+            <a:avLst/>
+          </a:prstGeom>
+          <a:noFill/>
+          <a:ln/>
+        </p:spPr>
+        <p:txBody>
+          <a:bodyPr wrap="square" lIns="0" tIns="0" rIns="0" bIns="0" rtlCol="0" anchor="t"/>
+          <a:lstStyle/>
+          <a:p>
+            <a:pPr indent="0" marL="0">
+              <a:lnSpc>
+                <a:spcPts val="1200"/>
+              </a:lnSpc>
+              <a:buNone/>
+            </a:pPr>
+            <a:r>
+              <a:rPr lang="en-US" sz="950" i="1" dirty="0">
+                <a:solidFill>
+                  <a:srgbClr val="6B7280"/>
+                </a:solidFill>
+                <a:latin typeface="Courier New" pitchFamily="34" charset="0"/>
+                <a:ea typeface="Courier New" pitchFamily="34" charset="-122"/>
+                <a:cs typeface="Courier New" pitchFamily="34" charset="-120"/>
+              </a:rPr>
+              <a:t>// src/MiniCode.Infrastructure/ICommandAllowList.cs</a:t>
+            </a:r>
+            <a:endParaRPr lang="en-US" sz="950" dirty="0"/>
+          </a:p>
+        </p:txBody>
+      </p:sp>
+      <p:sp>
+        <p:nvSpPr>
+          <p:cNvPr id="8" name="Text 6"/>
+          <p:cNvSpPr txBox="1"/>
+          <p:nvPr/>
+        </p:nvSpPr>
+        <p:spPr>
+          <a:xfrm>
+            <a:off x="877824" y="2008632"/>
+            <a:ext cx="4690872" cy="530352"/>
+          </a:xfrm>
+          <a:prstGeom prst="rect">
+            <a:avLst/>
+          </a:prstGeom>
+          <a:noFill/>
+          <a:ln/>
+        </p:spPr>
+        <p:txBody>
+          <a:bodyPr wrap="square" lIns="0" tIns="0" rIns="0" bIns="0" rtlCol="0" anchor="t"/>
+          <a:lstStyle/>
+          <a:p>
+            <a:pPr indent="0" marL="0">
+              <a:lnSpc>
+                <a:spcPts val="1200"/>
+              </a:lnSpc>
+              <a:buNone/>
+            </a:pPr>
+            <a:r>
+              <a:rPr lang="en-US" sz="950" dirty="0">
+                <a:solidFill>
+                  <a:srgbClr val="3FBFB0"/>
+                </a:solidFill>
+                <a:latin typeface="Courier New" pitchFamily="34" charset="0"/>
+                <a:ea typeface="Courier New" pitchFamily="34" charset="-122"/>
+                <a:cs typeface="Courier New" pitchFamily="34" charset="-120"/>
+              </a:rPr>
+              <a:t>IReadOnlyList&lt;string&gt; Entries { get; }</a:t>
+            </a:r>
+            <a:endParaRPr lang="en-US" sz="950" dirty="0"/>
+          </a:p>
+          <a:p>
+            <a:pPr indent="0" marL="0">
+              <a:lnSpc>
+                <a:spcPts val="1200"/>
+              </a:lnSpc>
+              <a:buNone/>
+            </a:pPr>
+            <a:r>
+              <a:rPr lang="en-US" sz="950" dirty="0">
+                <a:solidFill>
+                  <a:srgbClr val="3FBFB0"/>
+                </a:solidFill>
+                <a:latin typeface="Courier New" pitchFamily="34" charset="0"/>
+                <a:ea typeface="Courier New" pitchFamily="34" charset="-122"/>
+                <a:cs typeface="Courier New" pitchFamily="34" charset="-120"/>
+              </a:rPr>
+              <a:t>bool IsAllowed(string command,</a:t>
+            </a:r>
+            <a:endParaRPr lang="en-US" sz="950" dirty="0"/>
+          </a:p>
+          <a:p>
+            <a:pPr indent="0" marL="0">
+              <a:lnSpc>
+                <a:spcPts val="1200"/>
+              </a:lnSpc>
+              <a:buNone/>
+            </a:pPr>
+            <a:r>
+              <a:rPr lang="en-US" sz="950" dirty="0">
+                <a:solidFill>
+                  <a:srgbClr val="3FBFB0"/>
+                </a:solidFill>
+                <a:latin typeface="Courier New" pitchFamily="34" charset="0"/>
+                <a:ea typeface="Courier New" pitchFamily="34" charset="-122"/>
+                <a:cs typeface="Courier New" pitchFamily="34" charset="-120"/>
+              </a:rPr>
+              <a:t>    IReadOnlyList&lt;string&gt; arguments);</a:t>
+            </a:r>
+            <a:endParaRPr lang="en-US" sz="950" dirty="0"/>
+          </a:p>
+        </p:txBody>
+      </p:sp>
+      <p:sp>
+        <p:nvSpPr>
+          <p:cNvPr id="9" name="Text 7"/>
+          <p:cNvSpPr txBox="1"/>
+          <p:nvPr/>
+        </p:nvSpPr>
+        <p:spPr>
+          <a:xfrm>
+            <a:off x="877824" y="2465832"/>
+            <a:ext cx="4690872" cy="682752"/>
+          </a:xfrm>
+          <a:prstGeom prst="rect">
+            <a:avLst/>
+          </a:prstGeom>
+          <a:noFill/>
+          <a:ln/>
+        </p:spPr>
+        <p:txBody>
+          <a:bodyPr wrap="square" lIns="0" tIns="0" rIns="0" bIns="0" rtlCol="0" anchor="t"/>
+          <a:lstStyle/>
+          <a:p>
+            <a:pPr indent="0" marL="0">
+              <a:lnSpc>
+                <a:spcPts val="1200"/>
+              </a:lnSpc>
+              <a:buNone/>
+            </a:pPr>
+            <a:r>
+              <a:rPr lang="en-US" sz="950" i="1" dirty="0">
+                <a:solidFill>
+                  <a:srgbClr val="6B7280"/>
+                </a:solidFill>
+                <a:latin typeface="Courier New" pitchFamily="34" charset="0"/>
+                <a:ea typeface="Courier New" pitchFamily="34" charset="-122"/>
+                <a:cs typeface="Courier New" pitchFamily="34" charset="-120"/>
+              </a:rPr>
+              <a:t>// src/MiniCode.Infrastructure/CommandAllowList.cs</a:t>
+            </a:r>
+            <a:endParaRPr lang="en-US" sz="950" dirty="0"/>
+          </a:p>
+          <a:p>
+            <a:pPr indent="0" marL="0">
+              <a:lnSpc>
+                <a:spcPts val="1200"/>
+              </a:lnSpc>
+              <a:buNone/>
+            </a:pPr>
+            <a:r>
+              <a:rPr lang="en-US" sz="950" i="1" dirty="0">
+                <a:solidFill>
+                  <a:srgbClr val="6B7280"/>
+                </a:solidFill>
+                <a:latin typeface="Courier New" pitchFamily="34" charset="0"/>
+                <a:ea typeface="Courier New" pitchFamily="34" charset="-122"/>
+                <a:cs typeface="Courier New" pitchFamily="34" charset="-120"/>
+              </a:rPr>
+              <a:t>// One entry per allowed subcommand — "dotnet"</a:t>
+            </a:r>
+            <a:endParaRPr lang="en-US" sz="950" dirty="0"/>
+          </a:p>
+          <a:p>
+            <a:pPr indent="0" marL="0">
+              <a:lnSpc>
+                <a:spcPts val="1200"/>
+              </a:lnSpc>
+              <a:buNone/>
+            </a:pPr>
+            <a:r>
+              <a:rPr lang="en-US" sz="950" i="1" dirty="0">
+                <a:solidFill>
+                  <a:srgbClr val="6B7280"/>
+                </a:solidFill>
+                <a:latin typeface="Courier New" pitchFamily="34" charset="0"/>
+                <a:ea typeface="Courier New" pitchFamily="34" charset="-122"/>
+                <a:cs typeface="Courier New" pitchFamily="34" charset="-120"/>
+              </a:rPr>
+              <a:t>// alone is deliberately absent, so nothing else</a:t>
+            </a:r>
+            <a:endParaRPr lang="en-US" sz="950" dirty="0"/>
+          </a:p>
+          <a:p>
+            <a:pPr indent="0" marL="0">
+              <a:lnSpc>
+                <a:spcPts val="1200"/>
+              </a:lnSpc>
+              <a:buNone/>
+            </a:pPr>
+            <a:r>
+              <a:rPr lang="en-US" sz="950" i="1" dirty="0">
+                <a:solidFill>
+                  <a:srgbClr val="6B7280"/>
+                </a:solidFill>
+                <a:latin typeface="Courier New" pitchFamily="34" charset="0"/>
+                <a:ea typeface="Courier New" pitchFamily="34" charset="-122"/>
+                <a:cs typeface="Courier New" pitchFamily="34" charset="-120"/>
+              </a:rPr>
+              <a:t>// after it is allowed by accident.</a:t>
+            </a:r>
+            <a:endParaRPr lang="en-US" sz="950" dirty="0"/>
+          </a:p>
+        </p:txBody>
+      </p:sp>
+      <p:sp>
+        <p:nvSpPr>
+          <p:cNvPr id="10" name="Text 8"/>
+          <p:cNvSpPr txBox="1"/>
+          <p:nvPr/>
+        </p:nvSpPr>
+        <p:spPr>
+          <a:xfrm>
+            <a:off x="877824" y="3258312"/>
+            <a:ext cx="4690872" cy="225552"/>
+          </a:xfrm>
+          <a:prstGeom prst="rect">
+            <a:avLst/>
+          </a:prstGeom>
+          <a:noFill/>
+          <a:ln/>
+        </p:spPr>
+        <p:txBody>
+          <a:bodyPr wrap="square" lIns="0" tIns="0" rIns="0" bIns="0" rtlCol="0" anchor="t"/>
+          <a:lstStyle/>
+          <a:p>
+            <a:pPr indent="0" marL="0">
+              <a:lnSpc>
+                <a:spcPts val="1200"/>
+              </a:lnSpc>
+              <a:buNone/>
+            </a:pPr>
+            <a:r>
+              <a:rPr lang="en-US" sz="950" dirty="0">
+                <a:solidFill>
+                  <a:srgbClr val="CADCFC"/>
+                </a:solidFill>
+                <a:latin typeface="Courier New" pitchFamily="34" charset="0"/>
+                <a:ea typeface="Courier New" pitchFamily="34" charset="-122"/>
+                <a:cs typeface="Courier New" pitchFamily="34" charset="-120"/>
+              </a:rPr>
+              <a:t>private static readonly string[] Allowed =</a:t>
+            </a:r>
+            <a:endParaRPr lang="en-US" sz="950" dirty="0"/>
+          </a:p>
+        </p:txBody>
+      </p:sp>
+      <p:sp>
+        <p:nvSpPr>
+          <p:cNvPr id="11" name="Text 9"/>
+          <p:cNvSpPr txBox="1"/>
+          <p:nvPr/>
+        </p:nvSpPr>
+        <p:spPr>
+          <a:xfrm>
+            <a:off x="877824" y="3410712"/>
+            <a:ext cx="4690872" cy="377952"/>
+          </a:xfrm>
+          <a:prstGeom prst="rect">
+            <a:avLst/>
+          </a:prstGeom>
+          <a:noFill/>
+          <a:ln/>
+        </p:spPr>
+        <p:txBody>
+          <a:bodyPr wrap="square" lIns="0" tIns="0" rIns="0" bIns="0" rtlCol="0" anchor="t"/>
+          <a:lstStyle/>
+          <a:p>
+            <a:pPr indent="0" marL="0">
+              <a:lnSpc>
+                <a:spcPts val="1200"/>
+              </a:lnSpc>
+              <a:buNone/>
+            </a:pPr>
+            <a:r>
+              <a:rPr lang="en-US" sz="950" dirty="0">
+                <a:solidFill>
+                  <a:srgbClr val="3FBFB0"/>
+                </a:solidFill>
+                <a:latin typeface="Courier New" pitchFamily="34" charset="0"/>
+                <a:ea typeface="Courier New" pitchFamily="34" charset="-122"/>
+                <a:cs typeface="Courier New" pitchFamily="34" charset="-120"/>
+              </a:rPr>
+              <a:t>    ["dotnet restore", "dotnet build",</a:t>
+            </a:r>
+            <a:endParaRPr lang="en-US" sz="950" dirty="0"/>
+          </a:p>
+          <a:p>
+            <a:pPr indent="0" marL="0">
+              <a:lnSpc>
+                <a:spcPts val="1200"/>
+              </a:lnSpc>
+              <a:buNone/>
+            </a:pPr>
+            <a:r>
+              <a:rPr lang="en-US" sz="950" dirty="0">
+                <a:solidFill>
+                  <a:srgbClr val="3FBFB0"/>
+                </a:solidFill>
+                <a:latin typeface="Courier New" pitchFamily="34" charset="0"/>
+                <a:ea typeface="Courier New" pitchFamily="34" charset="-122"/>
+                <a:cs typeface="Courier New" pitchFamily="34" charset="-120"/>
+              </a:rPr>
+              <a:t>     "dotnet test", "dotnet format"];</a:t>
+            </a:r>
+            <a:endParaRPr lang="en-US" sz="950" dirty="0"/>
+          </a:p>
+        </p:txBody>
+      </p:sp>
+      <p:sp>
+        <p:nvSpPr>
+          <p:cNvPr id="12" name="Text 10"/>
+          <p:cNvSpPr txBox="1"/>
+          <p:nvPr/>
+        </p:nvSpPr>
+        <p:spPr>
+          <a:xfrm>
+            <a:off x="877824" y="3715512"/>
+            <a:ext cx="4690872" cy="530352"/>
+          </a:xfrm>
+          <a:prstGeom prst="rect">
+            <a:avLst/>
+          </a:prstGeom>
+          <a:noFill/>
+          <a:ln/>
+        </p:spPr>
+        <p:txBody>
+          <a:bodyPr wrap="square" lIns="0" tIns="0" rIns="0" bIns="0" rtlCol="0" anchor="t"/>
+          <a:lstStyle/>
+          <a:p>
+            <a:pPr indent="0" marL="0">
+              <a:lnSpc>
+                <a:spcPts val="1200"/>
+              </a:lnSpc>
+              <a:buNone/>
+            </a:pPr>
+            <a:r>
+              <a:rPr lang="en-US" sz="950" dirty="0">
+                <a:solidFill>
+                  <a:srgbClr val="CADCFC"/>
+                </a:solidFill>
+                <a:latin typeface="Courier New" pitchFamily="34" charset="0"/>
+                <a:ea typeface="Courier New" pitchFamily="34" charset="-122"/>
+                <a:cs typeface="Courier New" pitchFamily="34" charset="-120"/>
+              </a:rPr>
+              <a:t>public IReadOnlyList&lt;string&gt; Entries =&gt; Allowed;</a:t>
+            </a:r>
+            <a:endParaRPr lang="en-US" sz="950" dirty="0"/>
+          </a:p>
+          <a:p>
+            <a:pPr indent="0" marL="0">
+              <a:lnSpc>
+                <a:spcPts val="1200"/>
+              </a:lnSpc>
+              <a:buNone/>
+            </a:pPr>
+            <a:r>
+              <a:rPr lang="en-US" sz="950" dirty="0">
+                <a:solidFill>
+                  <a:srgbClr val="CADCFC"/>
+                </a:solidFill>
+                <a:latin typeface="Courier New" pitchFamily="34" charset="0"/>
+                <a:ea typeface="Courier New" pitchFamily="34" charset="-122"/>
+                <a:cs typeface="Courier New" pitchFamily="34" charset="-120"/>
+              </a:rPr>
+              <a:t>public bool IsAllowed(string command,</a:t>
+            </a:r>
+            <a:endParaRPr lang="en-US" sz="950" dirty="0"/>
+          </a:p>
+          <a:p>
+            <a:pPr indent="0" marL="0">
+              <a:lnSpc>
+                <a:spcPts val="1200"/>
+              </a:lnSpc>
+              <a:buNone/>
+            </a:pPr>
+            <a:r>
+              <a:rPr lang="en-US" sz="950" dirty="0">
+                <a:solidFill>
+                  <a:srgbClr val="CADCFC"/>
+                </a:solidFill>
+                <a:latin typeface="Courier New" pitchFamily="34" charset="0"/>
+                <a:ea typeface="Courier New" pitchFamily="34" charset="-122"/>
+                <a:cs typeface="Courier New" pitchFamily="34" charset="-120"/>
+              </a:rPr>
+              <a:t>    IReadOnlyList&lt;string&gt; arguments) =&gt;</a:t>
+            </a:r>
+            <a:endParaRPr lang="en-US" sz="950" dirty="0"/>
+          </a:p>
+        </p:txBody>
+      </p:sp>
+      <p:sp>
+        <p:nvSpPr>
+          <p:cNvPr id="13" name="Text 11"/>
+          <p:cNvSpPr txBox="1"/>
+          <p:nvPr/>
+        </p:nvSpPr>
+        <p:spPr>
+          <a:xfrm>
+            <a:off x="877824" y="4172712"/>
+            <a:ext cx="4690872" cy="682752"/>
+          </a:xfrm>
+          <a:prstGeom prst="rect">
+            <a:avLst/>
+          </a:prstGeom>
+          <a:noFill/>
+          <a:ln/>
+        </p:spPr>
+        <p:txBody>
+          <a:bodyPr wrap="square" lIns="0" tIns="0" rIns="0" bIns="0" rtlCol="0" anchor="t"/>
+          <a:lstStyle/>
+          <a:p>
+            <a:pPr indent="0" marL="0">
+              <a:lnSpc>
+                <a:spcPts val="1200"/>
+              </a:lnSpc>
+              <a:buNone/>
+            </a:pPr>
+            <a:r>
+              <a:rPr lang="en-US" sz="950" dirty="0">
+                <a:solidFill>
+                  <a:srgbClr val="3FBFB0"/>
+                </a:solidFill>
+                <a:latin typeface="Courier New" pitchFamily="34" charset="0"/>
+                <a:ea typeface="Courier New" pitchFamily="34" charset="-122"/>
+                <a:cs typeface="Courier New" pitchFamily="34" charset="-120"/>
+              </a:rPr>
+              <a:t>    arguments.Count &gt; 0</a:t>
+            </a:r>
+            <a:endParaRPr lang="en-US" sz="950" dirty="0"/>
+          </a:p>
+          <a:p>
+            <a:pPr indent="0" marL="0">
+              <a:lnSpc>
+                <a:spcPts val="1200"/>
+              </a:lnSpc>
+              <a:buNone/>
+            </a:pPr>
+            <a:r>
+              <a:rPr lang="en-US" sz="950" dirty="0">
+                <a:solidFill>
+                  <a:srgbClr val="3FBFB0"/>
+                </a:solidFill>
+                <a:latin typeface="Courier New" pitchFamily="34" charset="0"/>
+                <a:ea typeface="Courier New" pitchFamily="34" charset="-122"/>
+                <a:cs typeface="Courier New" pitchFamily="34" charset="-120"/>
+              </a:rPr>
+              <a:t>    &amp;&amp; Allowed.Contains(</a:t>
+            </a:r>
+            <a:endParaRPr lang="en-US" sz="950" dirty="0"/>
+          </a:p>
+          <a:p>
+            <a:pPr indent="0" marL="0">
+              <a:lnSpc>
+                <a:spcPts val="1200"/>
+              </a:lnSpc>
+              <a:buNone/>
+            </a:pPr>
+            <a:r>
+              <a:rPr lang="en-US" sz="950" dirty="0">
+                <a:solidFill>
+                  <a:srgbClr val="3FBFB0"/>
+                </a:solidFill>
+                <a:latin typeface="Courier New" pitchFamily="34" charset="0"/>
+                <a:ea typeface="Courier New" pitchFamily="34" charset="-122"/>
+                <a:cs typeface="Courier New" pitchFamily="34" charset="-120"/>
+              </a:rPr>
+              <a:t>        $"{command} {arguments[0]}",</a:t>
+            </a:r>
+            <a:endParaRPr lang="en-US" sz="950" dirty="0"/>
+          </a:p>
+          <a:p>
+            <a:pPr indent="0" marL="0">
+              <a:lnSpc>
+                <a:spcPts val="1200"/>
+              </a:lnSpc>
+              <a:buNone/>
+            </a:pPr>
+            <a:r>
+              <a:rPr lang="en-US" sz="950" dirty="0">
+                <a:solidFill>
+                  <a:srgbClr val="3FBFB0"/>
+                </a:solidFill>
+                <a:latin typeface="Courier New" pitchFamily="34" charset="0"/>
+                <a:ea typeface="Courier New" pitchFamily="34" charset="-122"/>
+                <a:cs typeface="Courier New" pitchFamily="34" charset="-120"/>
+              </a:rPr>
+              <a:t>        StringComparer.OrdinalIgnoreCase);</a:t>
+            </a:r>
+            <a:endParaRPr lang="en-US" sz="950" dirty="0"/>
+          </a:p>
+        </p:txBody>
+      </p:sp>
+      <p:sp>
+        <p:nvSpPr>
+          <p:cNvPr id="14" name="Shape 12"/>
           <p:cNvSpPr/>
           <p:nvPr/>
         </p:nvSpPr>
         <p:spPr>
           <a:xfrm>
-            <a:off x="3657600" y="3758184"/>
-            <a:ext cx="5669280" cy="365760"/>
-          </a:xfrm>
-          <a:prstGeom prst="rect">
-            <a:avLst/>
-          </a:prstGeom>
-          <a:noFill/>
-          <a:ln/>
-        </p:spPr>
-        <p:txBody>
-          <a:bodyPr wrap="square" rtlCol="0" anchor="ctr"/>
-          <a:lstStyle/>
-          <a:p>
-            <a:pPr indent="0" marL="0">
-              <a:buNone/>
-            </a:pPr>
-            <a:r>
-              <a:rPr lang="en-US" sz="1450" b="1" dirty="0">
-                <a:solidFill>
-                  <a:srgbClr val="FFFFFF"/>
-                </a:solidFill>
-                <a:latin typeface="Cambria" pitchFamily="34" charset="0"/>
-                <a:ea typeface="Cambria" pitchFamily="34" charset="-122"/>
-                <a:cs typeface="Cambria" pitchFamily="34" charset="-120"/>
-              </a:rPr>
-              <a:t>Not allowed → throw, naming what is permitted</a:t>
-            </a:r>
-            <a:endParaRPr lang="en-US" sz="1450" dirty="0"/>
-          </a:p>
-        </p:txBody>
-      </p:sp>
-      <p:sp>
-        <p:nvSpPr>
-          <p:cNvPr id="20" name="Text 13"/>
-          <p:cNvSpPr/>
-          <p:nvPr/>
-        </p:nvSpPr>
-        <p:spPr>
-          <a:xfrm>
-            <a:off x="3657600" y="4123944"/>
-            <a:ext cx="5669280" cy="310896"/>
-          </a:xfrm>
-          <a:prstGeom prst="rect">
-            <a:avLst/>
-          </a:prstGeom>
-          <a:noFill/>
-          <a:ln/>
-        </p:spPr>
-        <p:txBody>
-          <a:bodyPr wrap="square" rtlCol="0" anchor="ctr"/>
+            <a:off x="6309360" y="1417320"/>
+            <a:ext cx="5349240" cy="4754880"/>
+          </a:xfrm>
+          <a:prstGeom prst="roundRect">
+            <a:avLst>
+              <a:gd name="adj" fmla="val 1923"/>
+            </a:avLst>
+          </a:prstGeom>
+          <a:solidFill>
+            <a:srgbClr val="141B49"/>
+          </a:solidFill>
+          <a:ln w="12700">
+            <a:solidFill>
+              <a:srgbClr val="3FBFB0"/>
+            </a:solidFill>
+            <a:prstDash val="solid"/>
+          </a:ln>
+        </p:spPr>
+      </p:sp>
+      <p:sp>
+        <p:nvSpPr>
+          <p:cNvPr id="15" name="Text 13"/>
+          <p:cNvSpPr txBox="1"/>
+          <p:nvPr/>
+        </p:nvSpPr>
+        <p:spPr>
+          <a:xfrm>
+            <a:off x="6638544" y="1673352"/>
+            <a:ext cx="4690872" cy="225552"/>
+          </a:xfrm>
+          <a:prstGeom prst="rect">
+            <a:avLst/>
+          </a:prstGeom>
+          <a:noFill/>
+          <a:ln/>
+        </p:spPr>
+        <p:txBody>
+          <a:bodyPr wrap="square" lIns="0" tIns="0" rIns="0" bIns="0" rtlCol="0" anchor="t"/>
+          <a:lstStyle/>
+          <a:p>
+            <a:pPr indent="0" marL="0">
+              <a:lnSpc>
+                <a:spcPts val="1200"/>
+              </a:lnSpc>
+              <a:buNone/>
+            </a:pPr>
+            <a:r>
+              <a:rPr lang="en-US" sz="950" i="1" dirty="0">
+                <a:solidFill>
+                  <a:srgbClr val="6B7280"/>
+                </a:solidFill>
+                <a:latin typeface="Courier New" pitchFamily="34" charset="0"/>
+                <a:ea typeface="Courier New" pitchFamily="34" charset="-122"/>
+                <a:cs typeface="Courier New" pitchFamily="34" charset="-120"/>
+              </a:rPr>
+              <a:t>// AllowListedShellExecutor.cs</a:t>
+            </a:r>
+            <a:endParaRPr lang="en-US" sz="950" dirty="0"/>
+          </a:p>
+        </p:txBody>
+      </p:sp>
+      <p:sp>
+        <p:nvSpPr>
+          <p:cNvPr id="16" name="Text 14"/>
+          <p:cNvSpPr txBox="1"/>
+          <p:nvPr/>
+        </p:nvSpPr>
+        <p:spPr>
+          <a:xfrm>
+            <a:off x="6638544" y="2008632"/>
+            <a:ext cx="4690872" cy="1597152"/>
+          </a:xfrm>
+          <a:prstGeom prst="rect">
+            <a:avLst/>
+          </a:prstGeom>
+          <a:noFill/>
+          <a:ln/>
+        </p:spPr>
+        <p:txBody>
+          <a:bodyPr wrap="square" lIns="0" tIns="0" rIns="0" bIns="0" rtlCol="0" anchor="t"/>
+          <a:lstStyle/>
+          <a:p>
+            <a:pPr indent="0" marL="0">
+              <a:lnSpc>
+                <a:spcPts val="1200"/>
+              </a:lnSpc>
+              <a:buNone/>
+            </a:pPr>
+            <a:r>
+              <a:rPr lang="en-US" sz="950" dirty="0">
+                <a:solidFill>
+                  <a:srgbClr val="CADCFC"/>
+                </a:solidFill>
+                <a:latin typeface="Courier New" pitchFamily="34" charset="0"/>
+                <a:ea typeface="Courier New" pitchFamily="34" charset="-122"/>
+                <a:cs typeface="Courier New" pitchFamily="34" charset="-120"/>
+              </a:rPr>
+              <a:t>public sealed class AllowListedShellExecutor(</a:t>
+            </a:r>
+            <a:endParaRPr lang="en-US" sz="950" dirty="0"/>
+          </a:p>
+          <a:p>
+            <a:pPr indent="0" marL="0">
+              <a:lnSpc>
+                <a:spcPts val="1200"/>
+              </a:lnSpc>
+              <a:buNone/>
+            </a:pPr>
+            <a:r>
+              <a:rPr lang="en-US" sz="950" dirty="0">
+                <a:solidFill>
+                  <a:srgbClr val="CADCFC"/>
+                </a:solidFill>
+                <a:latin typeface="Courier New" pitchFamily="34" charset="0"/>
+                <a:ea typeface="Courier New" pitchFamily="34" charset="-122"/>
+                <a:cs typeface="Courier New" pitchFamily="34" charset="-120"/>
+              </a:rPr>
+              <a:t>    IShellExecutor inner, ICommandAllowList allowList)</a:t>
+            </a:r>
+            <a:endParaRPr lang="en-US" sz="950" dirty="0"/>
+          </a:p>
+          <a:p>
+            <a:pPr indent="0" marL="0">
+              <a:lnSpc>
+                <a:spcPts val="1200"/>
+              </a:lnSpc>
+              <a:buNone/>
+            </a:pPr>
+            <a:r>
+              <a:rPr lang="en-US" sz="950" dirty="0">
+                <a:solidFill>
+                  <a:srgbClr val="CADCFC"/>
+                </a:solidFill>
+                <a:latin typeface="Courier New" pitchFamily="34" charset="0"/>
+                <a:ea typeface="Courier New" pitchFamily="34" charset="-122"/>
+                <a:cs typeface="Courier New" pitchFamily="34" charset="-120"/>
+              </a:rPr>
+              <a:t>    : IShellExecutor</a:t>
+            </a:r>
+            <a:endParaRPr lang="en-US" sz="950" dirty="0"/>
+          </a:p>
+          <a:p>
+            <a:pPr indent="0" marL="0">
+              <a:lnSpc>
+                <a:spcPts val="1200"/>
+              </a:lnSpc>
+              <a:buNone/>
+            </a:pPr>
+            <a:r>
+              <a:rPr lang="en-US" sz="950" dirty="0">
+                <a:solidFill>
+                  <a:srgbClr val="CADCFC"/>
+                </a:solidFill>
+                <a:latin typeface="Courier New" pitchFamily="34" charset="0"/>
+                <a:ea typeface="Courier New" pitchFamily="34" charset="-122"/>
+                <a:cs typeface="Courier New" pitchFamily="34" charset="-120"/>
+              </a:rPr>
+              <a:t>{</a:t>
+            </a:r>
+            <a:endParaRPr lang="en-US" sz="950" dirty="0"/>
+          </a:p>
+          <a:p>
+            <a:pPr indent="0" marL="0">
+              <a:lnSpc>
+                <a:spcPts val="1200"/>
+              </a:lnSpc>
+              <a:buNone/>
+            </a:pPr>
+            <a:r>
+              <a:rPr lang="en-US" sz="950" dirty="0">
+                <a:solidFill>
+                  <a:srgbClr val="CADCFC"/>
+                </a:solidFill>
+                <a:latin typeface="Courier New" pitchFamily="34" charset="0"/>
+                <a:ea typeface="Courier New" pitchFamily="34" charset="-122"/>
+                <a:cs typeface="Courier New" pitchFamily="34" charset="-120"/>
+              </a:rPr>
+              <a:t>    public async Task&lt;ShellCommandResult&gt; RunAsync(</a:t>
+            </a:r>
+            <a:endParaRPr lang="en-US" sz="950" dirty="0"/>
+          </a:p>
+          <a:p>
+            <a:pPr indent="0" marL="0">
+              <a:lnSpc>
+                <a:spcPts val="1200"/>
+              </a:lnSpc>
+              <a:buNone/>
+            </a:pPr>
+            <a:r>
+              <a:rPr lang="en-US" sz="950" dirty="0">
+                <a:solidFill>
+                  <a:srgbClr val="CADCFC"/>
+                </a:solidFill>
+                <a:latin typeface="Courier New" pitchFamily="34" charset="0"/>
+                <a:ea typeface="Courier New" pitchFamily="34" charset="-122"/>
+                <a:cs typeface="Courier New" pitchFamily="34" charset="-120"/>
+              </a:rPr>
+              <a:t>        string command,</a:t>
+            </a:r>
+            <a:endParaRPr lang="en-US" sz="950" dirty="0"/>
+          </a:p>
+          <a:p>
+            <a:pPr indent="0" marL="0">
+              <a:lnSpc>
+                <a:spcPts val="1200"/>
+              </a:lnSpc>
+              <a:buNone/>
+            </a:pPr>
+            <a:r>
+              <a:rPr lang="en-US" sz="950" dirty="0">
+                <a:solidFill>
+                  <a:srgbClr val="CADCFC"/>
+                </a:solidFill>
+                <a:latin typeface="Courier New" pitchFamily="34" charset="0"/>
+                <a:ea typeface="Courier New" pitchFamily="34" charset="-122"/>
+                <a:cs typeface="Courier New" pitchFamily="34" charset="-120"/>
+              </a:rPr>
+              <a:t>        IReadOnlyList&lt;string&gt; arguments,</a:t>
+            </a:r>
+            <a:endParaRPr lang="en-US" sz="950" dirty="0"/>
+          </a:p>
+          <a:p>
+            <a:pPr indent="0" marL="0">
+              <a:lnSpc>
+                <a:spcPts val="1200"/>
+              </a:lnSpc>
+              <a:buNone/>
+            </a:pPr>
+            <a:r>
+              <a:rPr lang="en-US" sz="950" dirty="0">
+                <a:solidFill>
+                  <a:srgbClr val="CADCFC"/>
+                </a:solidFill>
+                <a:latin typeface="Courier New" pitchFamily="34" charset="0"/>
+                <a:ea typeface="Courier New" pitchFamily="34" charset="-122"/>
+                <a:cs typeface="Courier New" pitchFamily="34" charset="-120"/>
+              </a:rPr>
+              <a:t>        string workingDirectory, TimeSpan timeout,</a:t>
+            </a:r>
+            <a:endParaRPr lang="en-US" sz="950" dirty="0"/>
+          </a:p>
+          <a:p>
+            <a:pPr indent="0" marL="0">
+              <a:lnSpc>
+                <a:spcPts val="1200"/>
+              </a:lnSpc>
+              <a:buNone/>
+            </a:pPr>
+            <a:r>
+              <a:rPr lang="en-US" sz="950" dirty="0">
+                <a:solidFill>
+                  <a:srgbClr val="CADCFC"/>
+                </a:solidFill>
+                <a:latin typeface="Courier New" pitchFamily="34" charset="0"/>
+                <a:ea typeface="Courier New" pitchFamily="34" charset="-122"/>
+                <a:cs typeface="Courier New" pitchFamily="34" charset="-120"/>
+              </a:rPr>
+              <a:t>        CancellationToken cancellationToken)</a:t>
+            </a:r>
+            <a:endParaRPr lang="en-US" sz="950" dirty="0"/>
+          </a:p>
+          <a:p>
+            <a:pPr indent="0" marL="0">
+              <a:lnSpc>
+                <a:spcPts val="1200"/>
+              </a:lnSpc>
+              <a:buNone/>
+            </a:pPr>
+            <a:r>
+              <a:rPr lang="en-US" sz="950" dirty="0">
+                <a:solidFill>
+                  <a:srgbClr val="CADCFC"/>
+                </a:solidFill>
+                <a:latin typeface="Courier New" pitchFamily="34" charset="0"/>
+                <a:ea typeface="Courier New" pitchFamily="34" charset="-122"/>
+                <a:cs typeface="Courier New" pitchFamily="34" charset="-120"/>
+              </a:rPr>
+              <a:t>    {</a:t>
+            </a:r>
+            <a:endParaRPr lang="en-US" sz="950" dirty="0"/>
+          </a:p>
+        </p:txBody>
+      </p:sp>
+      <p:sp>
+        <p:nvSpPr>
+          <p:cNvPr id="17" name="Text 15"/>
+          <p:cNvSpPr txBox="1"/>
+          <p:nvPr/>
+        </p:nvSpPr>
+        <p:spPr>
+          <a:xfrm>
+            <a:off x="6638544" y="3532632"/>
+            <a:ext cx="4690872" cy="1292352"/>
+          </a:xfrm>
+          <a:prstGeom prst="rect">
+            <a:avLst/>
+          </a:prstGeom>
+          <a:noFill/>
+          <a:ln/>
+        </p:spPr>
+        <p:txBody>
+          <a:bodyPr wrap="square" lIns="0" tIns="0" rIns="0" bIns="0" rtlCol="0" anchor="t"/>
+          <a:lstStyle/>
+          <a:p>
+            <a:pPr indent="0" marL="0">
+              <a:lnSpc>
+                <a:spcPts val="1200"/>
+              </a:lnSpc>
+              <a:buNone/>
+            </a:pPr>
+            <a:r>
+              <a:rPr lang="en-US" sz="950" dirty="0">
+                <a:solidFill>
+                  <a:srgbClr val="3FBFB0"/>
+                </a:solidFill>
+                <a:latin typeface="Courier New" pitchFamily="34" charset="0"/>
+                <a:ea typeface="Courier New" pitchFamily="34" charset="-122"/>
+                <a:cs typeface="Courier New" pitchFamily="34" charset="-120"/>
+              </a:rPr>
+              <a:t>        if (!allowList.IsAllowed(command, arguments))</a:t>
+            </a:r>
+            <a:endParaRPr lang="en-US" sz="950" dirty="0"/>
+          </a:p>
+          <a:p>
+            <a:pPr indent="0" marL="0">
+              <a:lnSpc>
+                <a:spcPts val="1200"/>
+              </a:lnSpc>
+              <a:buNone/>
+            </a:pPr>
+            <a:r>
+              <a:rPr lang="en-US" sz="950" dirty="0">
+                <a:solidFill>
+                  <a:srgbClr val="3FBFB0"/>
+                </a:solidFill>
+                <a:latin typeface="Courier New" pitchFamily="34" charset="0"/>
+                <a:ea typeface="Courier New" pitchFamily="34" charset="-122"/>
+                <a:cs typeface="Courier New" pitchFamily="34" charset="-120"/>
+              </a:rPr>
+              <a:t>        {</a:t>
+            </a:r>
+            <a:endParaRPr lang="en-US" sz="950" dirty="0"/>
+          </a:p>
+          <a:p>
+            <a:pPr indent="0" marL="0">
+              <a:lnSpc>
+                <a:spcPts val="1200"/>
+              </a:lnSpc>
+              <a:buNone/>
+            </a:pPr>
+            <a:r>
+              <a:rPr lang="en-US" sz="950" dirty="0">
+                <a:solidFill>
+                  <a:srgbClr val="3FBFB0"/>
+                </a:solidFill>
+                <a:latin typeface="Courier New" pitchFamily="34" charset="0"/>
+                <a:ea typeface="Courier New" pitchFamily="34" charset="-122"/>
+                <a:cs typeface="Courier New" pitchFamily="34" charset="-120"/>
+              </a:rPr>
+              <a:t>            string requested = $"{command} "</a:t>
+            </a:r>
+            <a:endParaRPr lang="en-US" sz="950" dirty="0"/>
+          </a:p>
+          <a:p>
+            <a:pPr indent="0" marL="0">
+              <a:lnSpc>
+                <a:spcPts val="1200"/>
+              </a:lnSpc>
+              <a:buNone/>
+            </a:pPr>
+            <a:r>
+              <a:rPr lang="en-US" sz="950" dirty="0">
+                <a:solidFill>
+                  <a:srgbClr val="3FBFB0"/>
+                </a:solidFill>
+                <a:latin typeface="Courier New" pitchFamily="34" charset="0"/>
+                <a:ea typeface="Courier New" pitchFamily="34" charset="-122"/>
+                <a:cs typeface="Courier New" pitchFamily="34" charset="-120"/>
+              </a:rPr>
+              <a:t>                + string.Join(' ', arguments);</a:t>
+            </a:r>
+            <a:endParaRPr lang="en-US" sz="950" dirty="0"/>
+          </a:p>
+          <a:p>
+            <a:pPr indent="0" marL="0">
+              <a:lnSpc>
+                <a:spcPts val="1200"/>
+              </a:lnSpc>
+              <a:buNone/>
+            </a:pPr>
+            <a:r>
+              <a:rPr lang="en-US" sz="950" dirty="0">
+                <a:solidFill>
+                  <a:srgbClr val="3FBFB0"/>
+                </a:solidFill>
+                <a:latin typeface="Courier New" pitchFamily="34" charset="0"/>
+                <a:ea typeface="Courier New" pitchFamily="34" charset="-122"/>
+                <a:cs typeface="Courier New" pitchFamily="34" charset="-120"/>
+              </a:rPr>
+              <a:t>            throw new InvalidOperationException(</a:t>
+            </a:r>
+            <a:endParaRPr lang="en-US" sz="950" dirty="0"/>
+          </a:p>
+          <a:p>
+            <a:pPr indent="0" marL="0">
+              <a:lnSpc>
+                <a:spcPts val="1200"/>
+              </a:lnSpc>
+              <a:buNone/>
+            </a:pPr>
+            <a:r>
+              <a:rPr lang="en-US" sz="950" dirty="0">
+                <a:solidFill>
+                  <a:srgbClr val="3FBFB0"/>
+                </a:solidFill>
+                <a:latin typeface="Courier New" pitchFamily="34" charset="0"/>
+                <a:ea typeface="Courier New" pitchFamily="34" charset="-122"/>
+                <a:cs typeface="Courier New" pitchFamily="34" charset="-120"/>
+              </a:rPr>
+              <a:t>                $"'{requested.TrimEnd()}' is not on the"</a:t>
+            </a:r>
+            <a:endParaRPr lang="en-US" sz="950" dirty="0"/>
+          </a:p>
+          <a:p>
+            <a:pPr indent="0" marL="0">
+              <a:lnSpc>
+                <a:spcPts val="1200"/>
+              </a:lnSpc>
+              <a:buNone/>
+            </a:pPr>
+            <a:r>
+              <a:rPr lang="en-US" sz="950" dirty="0">
+                <a:solidFill>
+                  <a:srgbClr val="3FBFB0"/>
+                </a:solidFill>
+                <a:latin typeface="Courier New" pitchFamily="34" charset="0"/>
+                <a:ea typeface="Courier New" pitchFamily="34" charset="-122"/>
+                <a:cs typeface="Courier New" pitchFamily="34" charset="-120"/>
+              </a:rPr>
+              <a:t>                + $" allow list. Allowed: {...}.");</a:t>
+            </a:r>
+            <a:endParaRPr lang="en-US" sz="950" dirty="0"/>
+          </a:p>
+          <a:p>
+            <a:pPr indent="0" marL="0">
+              <a:lnSpc>
+                <a:spcPts val="1200"/>
+              </a:lnSpc>
+              <a:buNone/>
+            </a:pPr>
+            <a:r>
+              <a:rPr lang="en-US" sz="950" dirty="0">
+                <a:solidFill>
+                  <a:srgbClr val="3FBFB0"/>
+                </a:solidFill>
+                <a:latin typeface="Courier New" pitchFamily="34" charset="0"/>
+                <a:ea typeface="Courier New" pitchFamily="34" charset="-122"/>
+                <a:cs typeface="Courier New" pitchFamily="34" charset="-120"/>
+              </a:rPr>
+              <a:t>        }</a:t>
+            </a:r>
+            <a:endParaRPr lang="en-US" sz="950" dirty="0"/>
+          </a:p>
+        </p:txBody>
+      </p:sp>
+      <p:sp>
+        <p:nvSpPr>
+          <p:cNvPr id="18" name="Text 16"/>
+          <p:cNvSpPr txBox="1"/>
+          <p:nvPr/>
+        </p:nvSpPr>
+        <p:spPr>
+          <a:xfrm>
+            <a:off x="6638544" y="4751832"/>
+            <a:ext cx="4690872" cy="682752"/>
+          </a:xfrm>
+          <a:prstGeom prst="rect">
+            <a:avLst/>
+          </a:prstGeom>
+          <a:noFill/>
+          <a:ln/>
+        </p:spPr>
+        <p:txBody>
+          <a:bodyPr wrap="square" lIns="0" tIns="0" rIns="0" bIns="0" rtlCol="0" anchor="t"/>
+          <a:lstStyle/>
+          <a:p>
+            <a:pPr indent="0" marL="0">
+              <a:lnSpc>
+                <a:spcPts val="1200"/>
+              </a:lnSpc>
+              <a:buNone/>
+            </a:pPr>
+            <a:r>
+              <a:rPr lang="en-US" sz="950" dirty="0">
+                <a:solidFill>
+                  <a:srgbClr val="CADCFC"/>
+                </a:solidFill>
+                <a:latin typeface="Courier New" pitchFamily="34" charset="0"/>
+                <a:ea typeface="Courier New" pitchFamily="34" charset="-122"/>
+                <a:cs typeface="Courier New" pitchFamily="34" charset="-120"/>
+              </a:rPr>
+              <a:t>        return await inner.RunAsync(command, arguments,</a:t>
+            </a:r>
+            <a:endParaRPr lang="en-US" sz="950" dirty="0"/>
+          </a:p>
+          <a:p>
+            <a:pPr indent="0" marL="0">
+              <a:lnSpc>
+                <a:spcPts val="1200"/>
+              </a:lnSpc>
+              <a:buNone/>
+            </a:pPr>
+            <a:r>
+              <a:rPr lang="en-US" sz="950" dirty="0">
+                <a:solidFill>
+                  <a:srgbClr val="CADCFC"/>
+                </a:solidFill>
+                <a:latin typeface="Courier New" pitchFamily="34" charset="0"/>
+                <a:ea typeface="Courier New" pitchFamily="34" charset="-122"/>
+                <a:cs typeface="Courier New" pitchFamily="34" charset="-120"/>
+              </a:rPr>
+              <a:t>            workingDirectory, timeout, cancellationToken);</a:t>
+            </a:r>
+            <a:endParaRPr lang="en-US" sz="950" dirty="0"/>
+          </a:p>
+          <a:p>
+            <a:pPr indent="0" marL="0">
+              <a:lnSpc>
+                <a:spcPts val="1200"/>
+              </a:lnSpc>
+              <a:buNone/>
+            </a:pPr>
+            <a:r>
+              <a:rPr lang="en-US" sz="950" dirty="0">
+                <a:solidFill>
+                  <a:srgbClr val="CADCFC"/>
+                </a:solidFill>
+                <a:latin typeface="Courier New" pitchFamily="34" charset="0"/>
+                <a:ea typeface="Courier New" pitchFamily="34" charset="-122"/>
+                <a:cs typeface="Courier New" pitchFamily="34" charset="-120"/>
+              </a:rPr>
+              <a:t>    }</a:t>
+            </a:r>
+            <a:endParaRPr lang="en-US" sz="950" dirty="0"/>
+          </a:p>
+          <a:p>
+            <a:pPr indent="0" marL="0">
+              <a:lnSpc>
+                <a:spcPts val="1200"/>
+              </a:lnSpc>
+              <a:buNone/>
+            </a:pPr>
+            <a:r>
+              <a:rPr lang="en-US" sz="950" dirty="0">
+                <a:solidFill>
+                  <a:srgbClr val="CADCFC"/>
+                </a:solidFill>
+                <a:latin typeface="Courier New" pitchFamily="34" charset="0"/>
+                <a:ea typeface="Courier New" pitchFamily="34" charset="-122"/>
+                <a:cs typeface="Courier New" pitchFamily="34" charset="-120"/>
+              </a:rPr>
+              <a:t>}</a:t>
+            </a:r>
+            <a:endParaRPr lang="en-US" sz="950" dirty="0"/>
+          </a:p>
+        </p:txBody>
+      </p:sp>
+      <p:sp>
+        <p:nvSpPr>
+          <p:cNvPr id="19" name="Text 17"/>
+          <p:cNvSpPr txBox="1"/>
+          <p:nvPr/>
+        </p:nvSpPr>
+        <p:spPr>
+          <a:xfrm>
+            <a:off x="6638544" y="5458968"/>
+            <a:ext cx="4690872" cy="548640"/>
+          </a:xfrm>
+          <a:prstGeom prst="rect">
+            <a:avLst/>
+          </a:prstGeom>
+          <a:noFill/>
+          <a:ln/>
+        </p:spPr>
+        <p:txBody>
+          <a:bodyPr wrap="square" lIns="0" tIns="0" rIns="0" bIns="0" rtlCol="0" anchor="t"/>
           <a:lstStyle/>
           <a:p>
             <a:pPr indent="0" marL="0">
@@ -3586,316 +4553,9 @@
                 <a:ea typeface="Calibri" pitchFamily="34" charset="-122"/>
                 <a:cs typeface="Calibri" pitchFamily="34" charset="-120"/>
               </a:rPr>
-              <a:t>no process ever starts</a:t>
+              <a:t>RunAsync throws before its first await, but because the method is async the exception rides on the Task it returns rather than escaping synchronously — so await sees it exactly where it expects to.</a:t>
             </a:r>
             <a:endParaRPr lang="en-US" sz="1050" dirty="0"/>
-          </a:p>
-        </p:txBody>
-      </p:sp>
-      <p:pic>
-        <p:nvPicPr>
-          <p:cNvPr id="21" name="Image 5" descr="/home/claude/deck16/icons/arrowdown.png">    </p:cNvPr>
-          <p:cNvPicPr>
-            <a:picLocks noChangeAspect="1"/>
-          </p:cNvPicPr>
-          <p:nvPr/>
-        </p:nvPicPr>
-        <p:blipFill>
-          <a:blip r:embed="rId6"/>
-          <a:stretch>
-            <a:fillRect/>
-          </a:stretch>
-        </p:blipFill>
-        <p:spPr>
-          <a:xfrm>
-            <a:off x="5980176" y="4535424"/>
-            <a:ext cx="201168" cy="201168"/>
-          </a:xfrm>
-          <a:prstGeom prst="rect">
-            <a:avLst/>
-          </a:prstGeom>
-        </p:spPr>
-      </p:pic>
-      <p:sp>
-        <p:nvSpPr>
-          <p:cNvPr id="22" name="Shape 14"/>
-          <p:cNvSpPr/>
-          <p:nvPr/>
-        </p:nvSpPr>
-        <p:spPr>
-          <a:xfrm>
-            <a:off x="2788920" y="4745736"/>
-            <a:ext cx="6583680" cy="822960"/>
-          </a:xfrm>
-          <a:prstGeom prst="roundRect">
-            <a:avLst>
-              <a:gd name="adj" fmla="val 8889"/>
-            </a:avLst>
-          </a:prstGeom>
-          <a:solidFill>
-            <a:srgbClr val="1E2761"/>
-          </a:solidFill>
-          <a:ln/>
-        </p:spPr>
-      </p:sp>
-      <p:sp>
-        <p:nvSpPr>
-          <p:cNvPr id="23" name="Shape 15"/>
-          <p:cNvSpPr/>
-          <p:nvPr/>
-        </p:nvSpPr>
-        <p:spPr>
-          <a:xfrm>
-            <a:off x="3017520" y="4919472"/>
-            <a:ext cx="475488" cy="475488"/>
-          </a:xfrm>
-          <a:prstGeom prst="ellipse">
-            <a:avLst/>
-          </a:prstGeom>
-          <a:solidFill>
-            <a:srgbClr val="3FBFB0"/>
-          </a:solidFill>
-          <a:ln/>
-        </p:spPr>
-      </p:sp>
-      <p:pic>
-        <p:nvPicPr>
-          <p:cNvPr id="24" name="Image 6" descr="/home/claude/deck16/icons/route.png">    </p:cNvPr>
-          <p:cNvPicPr>
-            <a:picLocks noChangeAspect="1"/>
-          </p:cNvPicPr>
-          <p:nvPr/>
-        </p:nvPicPr>
-        <p:blipFill>
-          <a:blip r:embed="rId7"/>
-          <a:stretch>
-            <a:fillRect/>
-          </a:stretch>
-        </p:blipFill>
-        <p:spPr>
-          <a:xfrm>
-            <a:off x="3145536" y="5038344"/>
-            <a:ext cx="219456" cy="219456"/>
-          </a:xfrm>
-          <a:prstGeom prst="rect">
-            <a:avLst/>
-          </a:prstGeom>
-        </p:spPr>
-      </p:pic>
-      <p:sp>
-        <p:nvSpPr>
-          <p:cNvPr id="25" name="Text 16"/>
-          <p:cNvSpPr/>
-          <p:nvPr/>
-        </p:nvSpPr>
-        <p:spPr>
-          <a:xfrm>
-            <a:off x="3657600" y="4837176"/>
-            <a:ext cx="5669280" cy="365760"/>
-          </a:xfrm>
-          <a:prstGeom prst="rect">
-            <a:avLst/>
-          </a:prstGeom>
-          <a:noFill/>
-          <a:ln/>
-        </p:spPr>
-        <p:txBody>
-          <a:bodyPr wrap="square" rtlCol="0" anchor="ctr"/>
-          <a:lstStyle/>
-          <a:p>
-            <a:pPr indent="0" marL="0">
-              <a:buNone/>
-            </a:pPr>
-            <a:r>
-              <a:rPr lang="en-US" sz="1450" b="1" dirty="0">
-                <a:solidFill>
-                  <a:srgbClr val="FFFFFF"/>
-                </a:solidFill>
-                <a:latin typeface="Cambria" pitchFamily="34" charset="0"/>
-                <a:ea typeface="Cambria" pitchFamily="34" charset="-122"/>
-                <a:cs typeface="Cambria" pitchFamily="34" charset="-120"/>
-              </a:rPr>
-              <a:t>Allowed → inner.RunAsync(...)</a:t>
-            </a:r>
-            <a:endParaRPr lang="en-US" sz="1450" dirty="0"/>
-          </a:p>
-        </p:txBody>
-      </p:sp>
-      <p:sp>
-        <p:nvSpPr>
-          <p:cNvPr id="26" name="Text 17"/>
-          <p:cNvSpPr/>
-          <p:nvPr/>
-        </p:nvSpPr>
-        <p:spPr>
-          <a:xfrm>
-            <a:off x="3657600" y="5202936"/>
-            <a:ext cx="5669280" cy="310896"/>
-          </a:xfrm>
-          <a:prstGeom prst="rect">
-            <a:avLst/>
-          </a:prstGeom>
-          <a:noFill/>
-          <a:ln/>
-        </p:spPr>
-        <p:txBody>
-          <a:bodyPr wrap="square" rtlCol="0" anchor="ctr"/>
-          <a:lstStyle/>
-          <a:p>
-            <a:pPr indent="0" marL="0">
-              <a:buNone/>
-            </a:pPr>
-            <a:r>
-              <a:rPr lang="en-US" sz="1050" i="1" dirty="0">
-                <a:solidFill>
-                  <a:srgbClr val="CADCFC"/>
-                </a:solidFill>
-                <a:latin typeface="Calibri" pitchFamily="34" charset="0"/>
-                <a:ea typeface="Calibri" pitchFamily="34" charset="-122"/>
-                <a:cs typeface="Calibri" pitchFamily="34" charset="-120"/>
-              </a:rPr>
-              <a:t>the untouched Module 11a executor</a:t>
-            </a:r>
-            <a:endParaRPr lang="en-US" sz="1050" dirty="0"/>
-          </a:p>
-        </p:txBody>
-      </p:sp>
-      <p:sp>
-        <p:nvSpPr>
-          <p:cNvPr id="27" name="Shape 18"/>
-          <p:cNvSpPr/>
-          <p:nvPr/>
-        </p:nvSpPr>
-        <p:spPr>
-          <a:xfrm>
-            <a:off x="548640" y="5843016"/>
-            <a:ext cx="11109960" cy="777240"/>
-          </a:xfrm>
-          <a:prstGeom prst="roundRect">
-            <a:avLst>
-              <a:gd name="adj" fmla="val 9412"/>
-            </a:avLst>
-          </a:prstGeom>
-          <a:solidFill>
-            <a:srgbClr val="F4F6FB"/>
-          </a:solidFill>
-          <a:ln/>
-        </p:spPr>
-      </p:sp>
-      <p:sp>
-        <p:nvSpPr>
-          <p:cNvPr id="28" name="Text 19"/>
-          <p:cNvSpPr/>
-          <p:nvPr/>
-        </p:nvSpPr>
-        <p:spPr>
-          <a:xfrm>
-            <a:off x="822960" y="5843016"/>
-            <a:ext cx="10607040" cy="777240"/>
-          </a:xfrm>
-          <a:prstGeom prst="rect">
-            <a:avLst/>
-          </a:prstGeom>
-          <a:noFill/>
-          <a:ln/>
-        </p:spPr>
-        <p:txBody>
-          <a:bodyPr wrap="square" rtlCol="0" anchor="ctr"/>
-          <a:lstStyle/>
-          <a:p>
-            <a:pPr algn="ctr" indent="0" marL="0">
-              <a:buNone/>
-            </a:pPr>
-            <a:r>
-              <a:rPr lang="en-US" sz="1300" b="1" i="1" dirty="0">
-                <a:solidFill>
-                  <a:srgbClr val="1E2761"/>
-                </a:solidFill>
-                <a:latin typeface="Calibri" pitchFamily="34" charset="0"/>
-                <a:ea typeface="Calibri" pitchFamily="34" charset="-122"/>
-                <a:cs typeface="Calibri" pitchFamily="34" charset="-120"/>
-              </a:rPr>
-              <a:t>ToolCatalog and ShellTools do not change at all — neither one ever depended on which IShellExecutor it received.</a:t>
-            </a:r>
-            <a:endParaRPr lang="en-US" sz="1300" dirty="0"/>
-          </a:p>
-        </p:txBody>
-      </p:sp>
-      <p:sp>
-        <p:nvSpPr>
-          <p:cNvPr id="29" name="Text 20"/>
-          <p:cNvSpPr/>
-          <p:nvPr/>
-        </p:nvSpPr>
-        <p:spPr>
-          <a:xfrm>
-            <a:off x="457200" y="6510528"/>
-            <a:ext cx="9601200" cy="274320"/>
-          </a:xfrm>
-          <a:prstGeom prst="rect">
-            <a:avLst/>
-          </a:prstGeom>
-          <a:noFill/>
-          <a:ln/>
-        </p:spPr>
-        <p:txBody>
-          <a:bodyPr wrap="square" rtlCol="0" anchor="ctr"/>
-          <a:lstStyle/>
-          <a:p>
-            <a:pPr indent="0" marL="0">
-              <a:buNone/>
-            </a:pPr>
-            <a:r>
-              <a:rPr lang="en-US" sz="900" dirty="0">
-                <a:solidFill>
-                  <a:srgbClr val="6B7280"/>
-                </a:solidFill>
-                <a:latin typeface="Calibri" pitchFamily="34" charset="0"/>
-                <a:ea typeface="Calibri" pitchFamily="34" charset="-122"/>
-                <a:cs typeface="Calibri" pitchFamily="34" charset="-120"/>
-              </a:rPr>
-              <a:t>MODULE 11B — SHELL COMMAND EXECUTION: THE COMMAND ALLOW LIST</a:t>
-            </a:r>
-            <a:endParaRPr lang="en-US" sz="900" dirty="0"/>
-          </a:p>
-        </p:txBody>
-      </p:sp>
-      <p:sp>
-        <p:nvSpPr>
-          <p:cNvPr id="30" name="Text 21"/>
-          <p:cNvSpPr/>
-          <p:nvPr/>
-        </p:nvSpPr>
-        <p:spPr>
-          <a:xfrm>
-            <a:off x="11338560" y="6510528"/>
-            <a:ext cx="365760" cy="274320"/>
-          </a:xfrm>
-          <a:prstGeom prst="rect">
-            <a:avLst/>
-          </a:prstGeom>
-          <a:noFill/>
-          <a:ln/>
-        </p:spPr>
-        <p:txBody>
-          <a:bodyPr wrap="square" rtlCol="0" anchor="ctr"/>
-          <a:lstStyle/>
-          <a:p>
-            <a:pPr algn="r" indent="0" marL="0">
-              <a:buNone/>
-            </a:pPr>
-            <a:r>
-              <a:rPr lang="en-US" sz="900" dirty="0">
-                <a:solidFill>
-                  <a:srgbClr val="6B7280"/>
-                </a:solidFill>
-                <a:latin typeface="Calibri" pitchFamily="34" charset="0"/>
-                <a:ea typeface="Calibri" pitchFamily="34" charset="-122"/>
-                <a:cs typeface="Calibri" pitchFamily="34" charset="-120"/>
-              </a:rPr>
-              <a:t>4</a:t>
-            </a:r>
-            <a:endParaRPr lang="en-US" sz="900" dirty="0"/>
           </a:p>
         </p:txBody>
       </p:sp>
@@ -3934,7 +4594,7 @@
       <p:sp>
         <p:nvSpPr>
           <p:cNvPr id="2" name="Text 0"/>
-          <p:cNvSpPr/>
+          <p:cNvSpPr txBox="1"/>
           <p:nvPr/>
         </p:nvSpPr>
         <p:spPr>
@@ -3949,7 +4609,7 @@
           <a:ln/>
         </p:spPr>
         <p:txBody>
-          <a:bodyPr wrap="square" rtlCol="0" anchor="ctr"/>
+          <a:bodyPr wrap="square" lIns="0" tIns="0" rIns="0" bIns="0" rtlCol="0" anchor="ctr"/>
           <a:lstStyle/>
           <a:p>
             <a:pPr indent="0" marL="0">
@@ -3964,7 +4624,7 @@
                 <a:ea typeface="Calibri" pitchFamily="34" charset="-122"/>
                 <a:cs typeface="Calibri" pitchFamily="34" charset="-120"/>
               </a:rPr>
-              <a:t>THE CODE</a:t>
+              <a:t>WALKTHROUGH</a:t>
             </a:r>
             <a:endParaRPr lang="en-US" sz="1200" dirty="0"/>
           </a:p>
@@ -3973,7 +4633,7 @@
       <p:sp>
         <p:nvSpPr>
           <p:cNvPr id="3" name="Text 1"/>
-          <p:cNvSpPr/>
+          <p:cNvSpPr txBox="1"/>
           <p:nvPr/>
         </p:nvSpPr>
         <p:spPr>
@@ -3988,14 +4648,14 @@
           <a:ln/>
         </p:spPr>
         <p:txBody>
-          <a:bodyPr wrap="square" rtlCol="0" anchor="ctr"/>
-          <a:lstStyle/>
-          <a:p>
-            <a:pPr indent="0" marL="0">
-              <a:buNone/>
-            </a:pPr>
-            <a:r>
-              <a:rPr lang="en-US" sz="3000" b="1" dirty="0">
+          <a:bodyPr wrap="square" lIns="0" tIns="0" rIns="0" bIns="0" rtlCol="0" anchor="t"/>
+          <a:lstStyle/>
+          <a:p>
+            <a:pPr indent="0" marL="0">
+              <a:buNone/>
+            </a:pPr>
+            <a:r>
+              <a:rPr lang="en-US" sz="2800" b="1" dirty="0">
                 <a:solidFill>
                   <a:srgbClr val="FFFFFF"/>
                 </a:solidFill>
@@ -4003,32 +4663,110 @@
                 <a:ea typeface="Cambria" pitchFamily="34" charset="-122"/>
                 <a:cs typeface="Cambria" pitchFamily="34" charset="-120"/>
               </a:rPr>
-              <a:t>Six Moves to a Fixed Boundary</a:t>
-            </a:r>
-            <a:endParaRPr lang="en-US" sz="3000" dirty="0"/>
-          </a:p>
-        </p:txBody>
-      </p:sp>
-      <p:sp>
-        <p:nvSpPr>
-          <p:cNvPr id="4" name="Shape 2"/>
+              <a:t>Six Notes on a Twelve-Line Policy</a:t>
+            </a:r>
+            <a:endParaRPr lang="en-US" sz="2800" dirty="0"/>
+          </a:p>
+        </p:txBody>
+      </p:sp>
+      <p:sp>
+        <p:nvSpPr>
+          <p:cNvPr id="4" name="Text 2"/>
+          <p:cNvSpPr txBox="1"/>
+          <p:nvPr/>
+        </p:nvSpPr>
+        <p:spPr>
+          <a:xfrm>
+            <a:off x="457200" y="6510528"/>
+            <a:ext cx="8686800" cy="274320"/>
+          </a:xfrm>
+          <a:prstGeom prst="rect">
+            <a:avLst/>
+          </a:prstGeom>
+          <a:noFill/>
+          <a:ln/>
+        </p:spPr>
+        <p:txBody>
+          <a:bodyPr wrap="square" lIns="0" tIns="0" rIns="0" bIns="0" rtlCol="0" anchor="ctr"/>
+          <a:lstStyle/>
+          <a:p>
+            <a:pPr indent="0" marL="0">
+              <a:buNone/>
+            </a:pPr>
+            <a:r>
+              <a:rPr lang="en-US" sz="900" dirty="0">
+                <a:solidFill>
+                  <a:srgbClr val="6B7280"/>
+                </a:solidFill>
+                <a:latin typeface="Calibri" pitchFamily="34" charset="0"/>
+                <a:ea typeface="Calibri" pitchFamily="34" charset="-122"/>
+                <a:cs typeface="Calibri" pitchFamily="34" charset="-120"/>
+              </a:rPr>
+              <a:t>MODULE 11B — SHELL COMMAND EXECUTION: THE COMMAND ALLOW LIST</a:t>
+            </a:r>
+            <a:endParaRPr lang="en-US" sz="900" dirty="0"/>
+          </a:p>
+        </p:txBody>
+      </p:sp>
+      <p:sp>
+        <p:nvSpPr>
+          <p:cNvPr id="5" name="Text 3"/>
+          <p:cNvSpPr txBox="1"/>
+          <p:nvPr/>
+        </p:nvSpPr>
+        <p:spPr>
+          <a:xfrm>
+            <a:off x="11338560" y="6510528"/>
+            <a:ext cx="365760" cy="274320"/>
+          </a:xfrm>
+          <a:prstGeom prst="rect">
+            <a:avLst/>
+          </a:prstGeom>
+          <a:noFill/>
+          <a:ln/>
+        </p:spPr>
+        <p:txBody>
+          <a:bodyPr wrap="square" lIns="0" tIns="0" rIns="0" bIns="0" rtlCol="0" anchor="ctr"/>
+          <a:lstStyle/>
+          <a:p>
+            <a:pPr algn="r" indent="0" marL="0">
+              <a:buNone/>
+            </a:pPr>
+            <a:r>
+              <a:rPr lang="en-US" sz="900" dirty="0">
+                <a:solidFill>
+                  <a:srgbClr val="6B7280"/>
+                </a:solidFill>
+                <a:latin typeface="Calibri" pitchFamily="34" charset="0"/>
+                <a:ea typeface="Calibri" pitchFamily="34" charset="-122"/>
+                <a:cs typeface="Calibri" pitchFamily="34" charset="-120"/>
+              </a:rPr>
+              <a:t>5</a:t>
+            </a:r>
+            <a:endParaRPr lang="en-US" sz="900" dirty="0"/>
+          </a:p>
+        </p:txBody>
+      </p:sp>
+      <p:sp>
+        <p:nvSpPr>
+          <p:cNvPr id="6" name="Shape 4"/>
           <p:cNvSpPr/>
           <p:nvPr/>
         </p:nvSpPr>
         <p:spPr>
           <a:xfrm>
-            <a:off x="548640" y="1463040"/>
-            <a:ext cx="5440680" cy="1298448"/>
+            <a:off x="548640" y="1417320"/>
+            <a:ext cx="5326380" cy="1572768"/>
           </a:xfrm>
           <a:prstGeom prst="roundRect">
             <a:avLst>
-              <a:gd name="adj" fmla="val 5634"/>
+              <a:gd name="adj" fmla="val 5814"/>
             </a:avLst>
           </a:prstGeom>
           <a:solidFill>
-            <a:srgbClr val="141B49"/>
+            <a:srgbClr val="1E2761"/>
           </a:solidFill>
-          <a:ln w="9525">
+          <a:ln w="12700">
             <a:solidFill>
               <a:srgbClr val="3FBFB0"/>
             </a:solidFill>
@@ -4038,14 +4776,14 @@
       </p:sp>
       <p:sp>
         <p:nvSpPr>
-          <p:cNvPr id="5" name="Shape 3"/>
+          <p:cNvPr id="7" name="Shape 5"/>
           <p:cNvSpPr/>
           <p:nvPr/>
         </p:nvSpPr>
         <p:spPr>
           <a:xfrm>
-            <a:off x="731520" y="1627632"/>
-            <a:ext cx="402336" cy="402336"/>
+            <a:off x="822960" y="1645920"/>
+            <a:ext cx="384048" cy="384048"/>
           </a:xfrm>
           <a:prstGeom prst="ellipse">
             <a:avLst/>
@@ -4058,30 +4796,30 @@
       </p:sp>
       <p:sp>
         <p:nvSpPr>
-          <p:cNvPr id="6" name="Text 4"/>
-          <p:cNvSpPr/>
-          <p:nvPr/>
-        </p:nvSpPr>
-        <p:spPr>
-          <a:xfrm>
-            <a:off x="731520" y="1627632"/>
-            <a:ext cx="402336" cy="402336"/>
-          </a:xfrm>
-          <a:prstGeom prst="rect">
-            <a:avLst/>
-          </a:prstGeom>
-          <a:noFill/>
-          <a:ln/>
-        </p:spPr>
-        <p:txBody>
-          <a:bodyPr wrap="square" rtlCol="0" anchor="ctr"/>
+          <p:cNvPr id="8" name="Text 6"/>
+          <p:cNvSpPr txBox="1"/>
+          <p:nvPr/>
+        </p:nvSpPr>
+        <p:spPr>
+          <a:xfrm>
+            <a:off x="822960" y="1645920"/>
+            <a:ext cx="384048" cy="384048"/>
+          </a:xfrm>
+          <a:prstGeom prst="rect">
+            <a:avLst/>
+          </a:prstGeom>
+          <a:noFill/>
+          <a:ln/>
+        </p:spPr>
+        <p:txBody>
+          <a:bodyPr wrap="square" lIns="0" tIns="0" rIns="0" bIns="0" rtlCol="0" anchor="ctr"/>
           <a:lstStyle/>
           <a:p>
             <a:pPr algn="ctr" indent="0" marL="0">
               <a:buNone/>
             </a:pPr>
             <a:r>
-              <a:rPr lang="en-US" sz="1400" b="1" dirty="0">
+              <a:rPr lang="en-US" sz="1100" b="1" dirty="0">
                 <a:solidFill>
                   <a:srgbClr val="141B49"/>
                 </a:solidFill>
@@ -4091,36 +4829,36 @@
               </a:rPr>
               <a:t>1</a:t>
             </a:r>
-            <a:endParaRPr lang="en-US" sz="1400" dirty="0"/>
-          </a:p>
-        </p:txBody>
-      </p:sp>
-      <p:sp>
-        <p:nvSpPr>
-          <p:cNvPr id="7" name="Text 5"/>
-          <p:cNvSpPr/>
-          <p:nvPr/>
-        </p:nvSpPr>
-        <p:spPr>
-          <a:xfrm>
-            <a:off x="1261872" y="1536192"/>
-            <a:ext cx="4572000" cy="457200"/>
-          </a:xfrm>
-          <a:prstGeom prst="rect">
-            <a:avLst/>
-          </a:prstGeom>
-          <a:noFill/>
-          <a:ln/>
-        </p:spPr>
-        <p:txBody>
-          <a:bodyPr wrap="square" rtlCol="0" anchor="ctr"/>
-          <a:lstStyle/>
-          <a:p>
-            <a:pPr indent="0" marL="0">
-              <a:buNone/>
-            </a:pPr>
-            <a:r>
-              <a:rPr lang="en-US" sz="1200" b="1" dirty="0">
+            <a:endParaRPr lang="en-US" sz="1100" dirty="0"/>
+          </a:p>
+        </p:txBody>
+      </p:sp>
+      <p:sp>
+        <p:nvSpPr>
+          <p:cNvPr id="9" name="Text 7"/>
+          <p:cNvSpPr txBox="1"/>
+          <p:nvPr/>
+        </p:nvSpPr>
+        <p:spPr>
+          <a:xfrm>
+            <a:off x="1371600" y="1618488"/>
+            <a:ext cx="4229100" cy="438912"/>
+          </a:xfrm>
+          <a:prstGeom prst="rect">
+            <a:avLst/>
+          </a:prstGeom>
+          <a:noFill/>
+          <a:ln/>
+        </p:spPr>
+        <p:txBody>
+          <a:bodyPr wrap="square" lIns="0" tIns="0" rIns="0" bIns="0" rtlCol="0" anchor="ctr"/>
+          <a:lstStyle/>
+          <a:p>
+            <a:pPr indent="0" marL="0">
+              <a:buNone/>
+            </a:pPr>
+            <a:r>
+              <a:rPr lang="en-US" sz="1250" b="1" dirty="0">
                 <a:solidFill>
                   <a:srgbClr val="FFFFFF"/>
                 </a:solidFill>
@@ -4128,36 +4866,36 @@
                 <a:ea typeface="Cambria" pitchFamily="34" charset="-122"/>
                 <a:cs typeface="Cambria" pitchFamily="34" charset="-120"/>
               </a:rPr>
-              <a:t>ICommandAllowList is the whole seam</a:t>
-            </a:r>
-            <a:endParaRPr lang="en-US" sz="1200" dirty="0"/>
-          </a:p>
-        </p:txBody>
-      </p:sp>
-      <p:sp>
-        <p:nvSpPr>
-          <p:cNvPr id="8" name="Text 6"/>
-          <p:cNvSpPr/>
-          <p:nvPr/>
-        </p:nvSpPr>
-        <p:spPr>
-          <a:xfrm>
-            <a:off x="1261872" y="1993392"/>
-            <a:ext cx="4572000" cy="685800"/>
-          </a:xfrm>
-          <a:prstGeom prst="rect">
-            <a:avLst/>
-          </a:prstGeom>
-          <a:noFill/>
-          <a:ln/>
-        </p:spPr>
-        <p:txBody>
-          <a:bodyPr wrap="square" rtlCol="0" anchor="t"/>
-          <a:lstStyle/>
-          <a:p>
-            <a:pPr indent="0" marL="0">
-              <a:lnSpc>
-                <a:spcPts val="1300"/>
+              <a:t>ICommandAllowList is the whole extension point</a:t>
+            </a:r>
+            <a:endParaRPr lang="en-US" sz="1250" dirty="0"/>
+          </a:p>
+        </p:txBody>
+      </p:sp>
+      <p:sp>
+        <p:nvSpPr>
+          <p:cNvPr id="10" name="Text 8"/>
+          <p:cNvSpPr txBox="1"/>
+          <p:nvPr/>
+        </p:nvSpPr>
+        <p:spPr>
+          <a:xfrm>
+            <a:off x="1371600" y="2130552"/>
+            <a:ext cx="4229100" cy="704088"/>
+          </a:xfrm>
+          <a:prstGeom prst="rect">
+            <a:avLst/>
+          </a:prstGeom>
+          <a:noFill/>
+          <a:ln/>
+        </p:spPr>
+        <p:txBody>
+          <a:bodyPr wrap="square" lIns="0" tIns="0" rIns="0" bIns="0" rtlCol="0" anchor="t"/>
+          <a:lstStyle/>
+          <a:p>
+            <a:pPr indent="0" marL="0">
+              <a:lnSpc>
+                <a:spcPct val="120000"/>
               </a:lnSpc>
               <a:buNone/>
             </a:pPr>
@@ -4170,7 +4908,7 @@
                 <a:ea typeface="Calibri" pitchFamily="34" charset="-122"/>
                 <a:cs typeface="Calibri" pitchFamily="34" charset="-120"/>
               </a:rPr>
-              <a:t>Anything that answers IsAllowed can sit here — hardcoded today, configurable later.</a:t>
+              <a:t>Anything that can answer IsAllowed can sit in this slot — a hardcoded list today, something configurable later, without AllowListedShellExecutor or ShellTools changing.</a:t>
             </a:r>
             <a:endParaRPr lang="en-US" sz="1050" dirty="0"/>
           </a:p>
@@ -4178,24 +4916,24 @@
       </p:sp>
       <p:sp>
         <p:nvSpPr>
-          <p:cNvPr id="9" name="Shape 7"/>
+          <p:cNvPr id="11" name="Shape 9"/>
           <p:cNvSpPr/>
           <p:nvPr/>
         </p:nvSpPr>
         <p:spPr>
           <a:xfrm>
-            <a:off x="6217920" y="1463040"/>
-            <a:ext cx="5440680" cy="1298448"/>
+            <a:off x="6286500" y="1417320"/>
+            <a:ext cx="5326380" cy="1572768"/>
           </a:xfrm>
           <a:prstGeom prst="roundRect">
             <a:avLst>
-              <a:gd name="adj" fmla="val 5634"/>
+              <a:gd name="adj" fmla="val 5814"/>
             </a:avLst>
           </a:prstGeom>
           <a:solidFill>
-            <a:srgbClr val="141B49"/>
+            <a:srgbClr val="1E2761"/>
           </a:solidFill>
-          <a:ln w="9525">
+          <a:ln w="12700">
             <a:solidFill>
               <a:srgbClr val="3FBFB0"/>
             </a:solidFill>
@@ -4205,14 +4943,14 @@
       </p:sp>
       <p:sp>
         <p:nvSpPr>
-          <p:cNvPr id="10" name="Shape 8"/>
+          <p:cNvPr id="12" name="Shape 10"/>
           <p:cNvSpPr/>
           <p:nvPr/>
         </p:nvSpPr>
         <p:spPr>
           <a:xfrm>
-            <a:off x="6400800" y="1627632"/>
-            <a:ext cx="402336" cy="402336"/>
+            <a:off x="6560820" y="1645920"/>
+            <a:ext cx="384048" cy="384048"/>
           </a:xfrm>
           <a:prstGeom prst="ellipse">
             <a:avLst/>
@@ -4225,30 +4963,30 @@
       </p:sp>
       <p:sp>
         <p:nvSpPr>
-          <p:cNvPr id="11" name="Text 9"/>
-          <p:cNvSpPr/>
-          <p:nvPr/>
-        </p:nvSpPr>
-        <p:spPr>
-          <a:xfrm>
-            <a:off x="6400800" y="1627632"/>
-            <a:ext cx="402336" cy="402336"/>
-          </a:xfrm>
-          <a:prstGeom prst="rect">
-            <a:avLst/>
-          </a:prstGeom>
-          <a:noFill/>
-          <a:ln/>
-        </p:spPr>
-        <p:txBody>
-          <a:bodyPr wrap="square" rtlCol="0" anchor="ctr"/>
+          <p:cNvPr id="13" name="Text 11"/>
+          <p:cNvSpPr txBox="1"/>
+          <p:nvPr/>
+        </p:nvSpPr>
+        <p:spPr>
+          <a:xfrm>
+            <a:off x="6560820" y="1645920"/>
+            <a:ext cx="384048" cy="384048"/>
+          </a:xfrm>
+          <a:prstGeom prst="rect">
+            <a:avLst/>
+          </a:prstGeom>
+          <a:noFill/>
+          <a:ln/>
+        </p:spPr>
+        <p:txBody>
+          <a:bodyPr wrap="square" lIns="0" tIns="0" rIns="0" bIns="0" rtlCol="0" anchor="ctr"/>
           <a:lstStyle/>
           <a:p>
             <a:pPr algn="ctr" indent="0" marL="0">
               <a:buNone/>
             </a:pPr>
             <a:r>
-              <a:rPr lang="en-US" sz="1400" b="1" dirty="0">
+              <a:rPr lang="en-US" sz="1100" b="1" dirty="0">
                 <a:solidFill>
                   <a:srgbClr val="141B49"/>
                 </a:solidFill>
@@ -4258,36 +4996,36 @@
               </a:rPr>
               <a:t>2</a:t>
             </a:r>
-            <a:endParaRPr lang="en-US" sz="1400" dirty="0"/>
-          </a:p>
-        </p:txBody>
-      </p:sp>
-      <p:sp>
-        <p:nvSpPr>
-          <p:cNvPr id="12" name="Text 10"/>
-          <p:cNvSpPr/>
-          <p:nvPr/>
-        </p:nvSpPr>
-        <p:spPr>
-          <a:xfrm>
-            <a:off x="6931152" y="1536192"/>
-            <a:ext cx="4572000" cy="457200"/>
-          </a:xfrm>
-          <a:prstGeom prst="rect">
-            <a:avLst/>
-          </a:prstGeom>
-          <a:noFill/>
-          <a:ln/>
-        </p:spPr>
-        <p:txBody>
-          <a:bodyPr wrap="square" rtlCol="0" anchor="ctr"/>
-          <a:lstStyle/>
-          <a:p>
-            <a:pPr indent="0" marL="0">
-              <a:buNone/>
-            </a:pPr>
-            <a:r>
-              <a:rPr lang="en-US" sz="1200" b="1" dirty="0">
+            <a:endParaRPr lang="en-US" sz="1100" dirty="0"/>
+          </a:p>
+        </p:txBody>
+      </p:sp>
+      <p:sp>
+        <p:nvSpPr>
+          <p:cNvPr id="14" name="Text 12"/>
+          <p:cNvSpPr txBox="1"/>
+          <p:nvPr/>
+        </p:nvSpPr>
+        <p:spPr>
+          <a:xfrm>
+            <a:off x="7109460" y="1618488"/>
+            <a:ext cx="4229100" cy="438912"/>
+          </a:xfrm>
+          <a:prstGeom prst="rect">
+            <a:avLst/>
+          </a:prstGeom>
+          <a:noFill/>
+          <a:ln/>
+        </p:spPr>
+        <p:txBody>
+          <a:bodyPr wrap="square" lIns="0" tIns="0" rIns="0" bIns="0" rtlCol="0" anchor="ctr"/>
+          <a:lstStyle/>
+          <a:p>
+            <a:pPr indent="0" marL="0">
+              <a:buNone/>
+            </a:pPr>
+            <a:r>
+              <a:rPr lang="en-US" sz="1250" b="1" dirty="0">
                 <a:solidFill>
                   <a:srgbClr val="FFFFFF"/>
                 </a:solidFill>
@@ -4295,36 +5033,36 @@
                 <a:ea typeface="Cambria" pitchFamily="34" charset="-122"/>
                 <a:cs typeface="Cambria" pitchFamily="34" charset="-120"/>
               </a:rPr>
-              <a:t>The check runs before inner.RunAsync</a:t>
-            </a:r>
-            <a:endParaRPr lang="en-US" sz="1200" dirty="0"/>
-          </a:p>
-        </p:txBody>
-      </p:sp>
-      <p:sp>
-        <p:nvSpPr>
-          <p:cNvPr id="13" name="Text 11"/>
-          <p:cNvSpPr/>
-          <p:nvPr/>
-        </p:nvSpPr>
-        <p:spPr>
-          <a:xfrm>
-            <a:off x="6931152" y="1993392"/>
-            <a:ext cx="4572000" cy="685800"/>
-          </a:xfrm>
-          <a:prstGeom prst="rect">
-            <a:avLst/>
-          </a:prstGeom>
-          <a:noFill/>
-          <a:ln/>
-        </p:spPr>
-        <p:txBody>
-          <a:bodyPr wrap="square" rtlCol="0" anchor="t"/>
-          <a:lstStyle/>
-          <a:p>
-            <a:pPr indent="0" marL="0">
-              <a:lnSpc>
-                <a:spcPts val="1300"/>
+              <a:t>The check runs before inner.RunAsync is ever called</a:t>
+            </a:r>
+            <a:endParaRPr lang="en-US" sz="1250" dirty="0"/>
+          </a:p>
+        </p:txBody>
+      </p:sp>
+      <p:sp>
+        <p:nvSpPr>
+          <p:cNvPr id="15" name="Text 13"/>
+          <p:cNvSpPr txBox="1"/>
+          <p:nvPr/>
+        </p:nvSpPr>
+        <p:spPr>
+          <a:xfrm>
+            <a:off x="7109460" y="2130552"/>
+            <a:ext cx="4229100" cy="704088"/>
+          </a:xfrm>
+          <a:prstGeom prst="rect">
+            <a:avLst/>
+          </a:prstGeom>
+          <a:noFill/>
+          <a:ln/>
+        </p:spPr>
+        <p:txBody>
+          <a:bodyPr wrap="square" lIns="0" tIns="0" rIns="0" bIns="0" rtlCol="0" anchor="t"/>
+          <a:lstStyle/>
+          <a:p>
+            <a:pPr indent="0" marL="0">
+              <a:lnSpc>
+                <a:spcPct val="120000"/>
               </a:lnSpc>
               <a:buNone/>
             </a:pPr>
@@ -4337,7 +5075,7 @@
                 <a:ea typeface="Calibri" pitchFamily="34" charset="-122"/>
                 <a:cs typeface="Calibri" pitchFamily="34" charset="-120"/>
               </a:rPr>
-              <a:t>A refused command never starts a process or spends the timeout.</a:t>
+              <a:t>A refused command never starts a process, never spends the timeout, never touches the filesystem.</a:t>
             </a:r>
             <a:endParaRPr lang="en-US" sz="1050" dirty="0"/>
           </a:p>
@@ -4345,24 +5083,24 @@
       </p:sp>
       <p:sp>
         <p:nvSpPr>
-          <p:cNvPr id="14" name="Shape 12"/>
+          <p:cNvPr id="16" name="Shape 14"/>
           <p:cNvSpPr/>
           <p:nvPr/>
         </p:nvSpPr>
         <p:spPr>
           <a:xfrm>
-            <a:off x="548640" y="2889504"/>
-            <a:ext cx="5440680" cy="1298448"/>
+            <a:off x="548640" y="3118104"/>
+            <a:ext cx="5326380" cy="1572768"/>
           </a:xfrm>
           <a:prstGeom prst="roundRect">
             <a:avLst>
-              <a:gd name="adj" fmla="val 5634"/>
+              <a:gd name="adj" fmla="val 5814"/>
             </a:avLst>
           </a:prstGeom>
           <a:solidFill>
-            <a:srgbClr val="141B49"/>
+            <a:srgbClr val="1E2761"/>
           </a:solidFill>
-          <a:ln w="9525">
+          <a:ln w="12700">
             <a:solidFill>
               <a:srgbClr val="3FBFB0"/>
             </a:solidFill>
@@ -4372,14 +5110,14 @@
       </p:sp>
       <p:sp>
         <p:nvSpPr>
-          <p:cNvPr id="15" name="Shape 13"/>
+          <p:cNvPr id="17" name="Shape 15"/>
           <p:cNvSpPr/>
           <p:nvPr/>
         </p:nvSpPr>
         <p:spPr>
           <a:xfrm>
-            <a:off x="731520" y="3054096"/>
-            <a:ext cx="402336" cy="402336"/>
+            <a:off x="822960" y="3346704"/>
+            <a:ext cx="384048" cy="384048"/>
           </a:xfrm>
           <a:prstGeom prst="ellipse">
             <a:avLst/>
@@ -4392,30 +5130,30 @@
       </p:sp>
       <p:sp>
         <p:nvSpPr>
-          <p:cNvPr id="16" name="Text 14"/>
-          <p:cNvSpPr/>
-          <p:nvPr/>
-        </p:nvSpPr>
-        <p:spPr>
-          <a:xfrm>
-            <a:off x="731520" y="3054096"/>
-            <a:ext cx="402336" cy="402336"/>
-          </a:xfrm>
-          <a:prstGeom prst="rect">
-            <a:avLst/>
-          </a:prstGeom>
-          <a:noFill/>
-          <a:ln/>
-        </p:spPr>
-        <p:txBody>
-          <a:bodyPr wrap="square" rtlCol="0" anchor="ctr"/>
+          <p:cNvPr id="18" name="Text 16"/>
+          <p:cNvSpPr txBox="1"/>
+          <p:nvPr/>
+        </p:nvSpPr>
+        <p:spPr>
+          <a:xfrm>
+            <a:off x="822960" y="3346704"/>
+            <a:ext cx="384048" cy="384048"/>
+          </a:xfrm>
+          <a:prstGeom prst="rect">
+            <a:avLst/>
+          </a:prstGeom>
+          <a:noFill/>
+          <a:ln/>
+        </p:spPr>
+        <p:txBody>
+          <a:bodyPr wrap="square" lIns="0" tIns="0" rIns="0" bIns="0" rtlCol="0" anchor="ctr"/>
           <a:lstStyle/>
           <a:p>
             <a:pPr algn="ctr" indent="0" marL="0">
               <a:buNone/>
             </a:pPr>
             <a:r>
-              <a:rPr lang="en-US" sz="1400" b="1" dirty="0">
+              <a:rPr lang="en-US" sz="1100" b="1" dirty="0">
                 <a:solidFill>
                   <a:srgbClr val="141B49"/>
                 </a:solidFill>
@@ -4425,36 +5163,36 @@
               </a:rPr>
               <a:t>3</a:t>
             </a:r>
-            <a:endParaRPr lang="en-US" sz="1400" dirty="0"/>
-          </a:p>
-        </p:txBody>
-      </p:sp>
-      <p:sp>
-        <p:nvSpPr>
-          <p:cNvPr id="17" name="Text 15"/>
-          <p:cNvSpPr/>
-          <p:nvPr/>
-        </p:nvSpPr>
-        <p:spPr>
-          <a:xfrm>
-            <a:off x="1261872" y="2962656"/>
-            <a:ext cx="4572000" cy="457200"/>
-          </a:xfrm>
-          <a:prstGeom prst="rect">
-            <a:avLst/>
-          </a:prstGeom>
-          <a:noFill/>
-          <a:ln/>
-        </p:spPr>
-        <p:txBody>
-          <a:bodyPr wrap="square" rtlCol="0" anchor="ctr"/>
-          <a:lstStyle/>
-          <a:p>
-            <a:pPr indent="0" marL="0">
-              <a:buNone/>
-            </a:pPr>
-            <a:r>
-              <a:rPr lang="en-US" sz="1200" b="1" dirty="0">
+            <a:endParaRPr lang="en-US" sz="1100" dirty="0"/>
+          </a:p>
+        </p:txBody>
+      </p:sp>
+      <p:sp>
+        <p:nvSpPr>
+          <p:cNvPr id="19" name="Text 17"/>
+          <p:cNvSpPr txBox="1"/>
+          <p:nvPr/>
+        </p:nvSpPr>
+        <p:spPr>
+          <a:xfrm>
+            <a:off x="1371600" y="3319272"/>
+            <a:ext cx="4229100" cy="438912"/>
+          </a:xfrm>
+          <a:prstGeom prst="rect">
+            <a:avLst/>
+          </a:prstGeom>
+          <a:noFill/>
+          <a:ln/>
+        </p:spPr>
+        <p:txBody>
+          <a:bodyPr wrap="square" lIns="0" tIns="0" rIns="0" bIns="0" rtlCol="0" anchor="ctr"/>
+          <a:lstStyle/>
+          <a:p>
+            <a:pPr indent="0" marL="0">
+              <a:buNone/>
+            </a:pPr>
+            <a:r>
+              <a:rPr lang="en-US" sz="1250" b="1" dirty="0">
                 <a:solidFill>
                   <a:srgbClr val="FFFFFF"/>
                 </a:solidFill>
@@ -4462,36 +5200,36 @@
                 <a:ea typeface="Cambria" pitchFamily="34" charset="-122"/>
                 <a:cs typeface="Cambria" pitchFamily="34" charset="-120"/>
               </a:rPr>
-              <a:t>Entries exists so the refusal can say what IS allowed</a:t>
-            </a:r>
-            <a:endParaRPr lang="en-US" sz="1200" dirty="0"/>
-          </a:p>
-        </p:txBody>
-      </p:sp>
-      <p:sp>
-        <p:nvSpPr>
-          <p:cNvPr id="18" name="Text 16"/>
-          <p:cNvSpPr/>
-          <p:nvPr/>
-        </p:nvSpPr>
-        <p:spPr>
-          <a:xfrm>
-            <a:off x="1261872" y="3419856"/>
-            <a:ext cx="4572000" cy="685800"/>
-          </a:xfrm>
-          <a:prstGeom prst="rect">
-            <a:avLst/>
-          </a:prstGeom>
-          <a:noFill/>
-          <a:ln/>
-        </p:spPr>
-        <p:txBody>
-          <a:bodyPr wrap="square" rtlCol="0" anchor="t"/>
-          <a:lstStyle/>
-          <a:p>
-            <a:pPr indent="0" marL="0">
-              <a:lnSpc>
-                <a:spcPts val="1300"/>
+              <a:t>Entries exists so the refusal can name what is allowed</a:t>
+            </a:r>
+            <a:endParaRPr lang="en-US" sz="1250" dirty="0"/>
+          </a:p>
+        </p:txBody>
+      </p:sp>
+      <p:sp>
+        <p:nvSpPr>
+          <p:cNvPr id="20" name="Text 18"/>
+          <p:cNvSpPr txBox="1"/>
+          <p:nvPr/>
+        </p:nvSpPr>
+        <p:spPr>
+          <a:xfrm>
+            <a:off x="1371600" y="3831336"/>
+            <a:ext cx="4229100" cy="704088"/>
+          </a:xfrm>
+          <a:prstGeom prst="rect">
+            <a:avLst/>
+          </a:prstGeom>
+          <a:noFill/>
+          <a:ln/>
+        </p:spPr>
+        <p:txBody>
+          <a:bodyPr wrap="square" lIns="0" tIns="0" rIns="0" bIns="0" rtlCol="0" anchor="t"/>
+          <a:lstStyle/>
+          <a:p>
+            <a:pPr indent="0" marL="0">
+              <a:lnSpc>
+                <a:spcPct val="120000"/>
               </a:lnSpc>
               <a:buNone/>
             </a:pPr>
@@ -4504,7 +5242,7 @@
                 <a:ea typeface="Calibri" pitchFamily="34" charset="-122"/>
                 <a:cs typeface="Calibri" pitchFamily="34" charset="-120"/>
               </a:rPr>
-              <a:t>A tool that only says no teaches the model nothing to try next.</a:t>
+              <a:t>Not just what was refused. A tool that only says no teaches the model nothing about what to try next.</a:t>
             </a:r>
             <a:endParaRPr lang="en-US" sz="1050" dirty="0"/>
           </a:p>
@@ -4512,24 +5250,24 @@
       </p:sp>
       <p:sp>
         <p:nvSpPr>
-          <p:cNvPr id="19" name="Shape 17"/>
+          <p:cNvPr id="21" name="Shape 19"/>
           <p:cNvSpPr/>
           <p:nvPr/>
         </p:nvSpPr>
         <p:spPr>
           <a:xfrm>
-            <a:off x="6217920" y="2889504"/>
-            <a:ext cx="5440680" cy="1298448"/>
+            <a:off x="6286500" y="3118104"/>
+            <a:ext cx="5326380" cy="1572768"/>
           </a:xfrm>
           <a:prstGeom prst="roundRect">
             <a:avLst>
-              <a:gd name="adj" fmla="val 5634"/>
+              <a:gd name="adj" fmla="val 5814"/>
             </a:avLst>
           </a:prstGeom>
           <a:solidFill>
-            <a:srgbClr val="141B49"/>
+            <a:srgbClr val="1E2761"/>
           </a:solidFill>
-          <a:ln w="9525">
+          <a:ln w="12700">
             <a:solidFill>
               <a:srgbClr val="3FBFB0"/>
             </a:solidFill>
@@ -4539,14 +5277,14 @@
       </p:sp>
       <p:sp>
         <p:nvSpPr>
-          <p:cNvPr id="20" name="Shape 18"/>
+          <p:cNvPr id="22" name="Shape 20"/>
           <p:cNvSpPr/>
           <p:nvPr/>
         </p:nvSpPr>
         <p:spPr>
           <a:xfrm>
-            <a:off x="6400800" y="3054096"/>
-            <a:ext cx="402336" cy="402336"/>
+            <a:off x="6560820" y="3346704"/>
+            <a:ext cx="384048" cy="384048"/>
           </a:xfrm>
           <a:prstGeom prst="ellipse">
             <a:avLst/>
@@ -4559,30 +5297,30 @@
       </p:sp>
       <p:sp>
         <p:nvSpPr>
-          <p:cNvPr id="21" name="Text 19"/>
-          <p:cNvSpPr/>
-          <p:nvPr/>
-        </p:nvSpPr>
-        <p:spPr>
-          <a:xfrm>
-            <a:off x="6400800" y="3054096"/>
-            <a:ext cx="402336" cy="402336"/>
-          </a:xfrm>
-          <a:prstGeom prst="rect">
-            <a:avLst/>
-          </a:prstGeom>
-          <a:noFill/>
-          <a:ln/>
-        </p:spPr>
-        <p:txBody>
-          <a:bodyPr wrap="square" rtlCol="0" anchor="ctr"/>
+          <p:cNvPr id="23" name="Text 21"/>
+          <p:cNvSpPr txBox="1"/>
+          <p:nvPr/>
+        </p:nvSpPr>
+        <p:spPr>
+          <a:xfrm>
+            <a:off x="6560820" y="3346704"/>
+            <a:ext cx="384048" cy="384048"/>
+          </a:xfrm>
+          <a:prstGeom prst="rect">
+            <a:avLst/>
+          </a:prstGeom>
+          <a:noFill/>
+          <a:ln/>
+        </p:spPr>
+        <p:txBody>
+          <a:bodyPr wrap="square" lIns="0" tIns="0" rIns="0" bIns="0" rtlCol="0" anchor="ctr"/>
           <a:lstStyle/>
           <a:p>
             <a:pPr algn="ctr" indent="0" marL="0">
               <a:buNone/>
             </a:pPr>
             <a:r>
-              <a:rPr lang="en-US" sz="1400" b="1" dirty="0">
+              <a:rPr lang="en-US" sz="1100" b="1" dirty="0">
                 <a:solidFill>
                   <a:srgbClr val="141B49"/>
                 </a:solidFill>
@@ -4592,36 +5330,36 @@
               </a:rPr>
               <a:t>4</a:t>
             </a:r>
-            <a:endParaRPr lang="en-US" sz="1400" dirty="0"/>
-          </a:p>
-        </p:txBody>
-      </p:sp>
-      <p:sp>
-        <p:nvSpPr>
-          <p:cNvPr id="22" name="Text 20"/>
-          <p:cNvSpPr/>
-          <p:nvPr/>
-        </p:nvSpPr>
-        <p:spPr>
-          <a:xfrm>
-            <a:off x="6931152" y="2962656"/>
-            <a:ext cx="4572000" cy="457200"/>
-          </a:xfrm>
-          <a:prstGeom prst="rect">
-            <a:avLst/>
-          </a:prstGeom>
-          <a:noFill/>
-          <a:ln/>
-        </p:spPr>
-        <p:txBody>
-          <a:bodyPr wrap="square" rtlCol="0" anchor="ctr"/>
-          <a:lstStyle/>
-          <a:p>
-            <a:pPr indent="0" marL="0">
-              <a:buNone/>
-            </a:pPr>
-            <a:r>
-              <a:rPr lang="en-US" sz="1200" b="1" dirty="0">
+            <a:endParaRPr lang="en-US" sz="1100" dirty="0"/>
+          </a:p>
+        </p:txBody>
+      </p:sp>
+      <p:sp>
+        <p:nvSpPr>
+          <p:cNvPr id="24" name="Text 22"/>
+          <p:cNvSpPr txBox="1"/>
+          <p:nvPr/>
+        </p:nvSpPr>
+        <p:spPr>
+          <a:xfrm>
+            <a:off x="7109460" y="3319272"/>
+            <a:ext cx="4229100" cy="438912"/>
+          </a:xfrm>
+          <a:prstGeom prst="rect">
+            <a:avLst/>
+          </a:prstGeom>
+          <a:noFill/>
+          <a:ln/>
+        </p:spPr>
+        <p:txBody>
+          <a:bodyPr wrap="square" lIns="0" tIns="0" rIns="0" bIns="0" rtlCol="0" anchor="ctr"/>
+          <a:lstStyle/>
+          <a:p>
+            <a:pPr indent="0" marL="0">
+              <a:buNone/>
+            </a:pPr>
+            <a:r>
+              <a:rPr lang="en-US" sz="1250" b="1" dirty="0">
                 <a:solidFill>
                   <a:srgbClr val="FFFFFF"/>
                 </a:solidFill>
@@ -4629,36 +5367,36 @@
                 <a:ea typeface="Cambria" pitchFamily="34" charset="-122"/>
                 <a:cs typeface="Cambria" pitchFamily="34" charset="-120"/>
               </a:rPr>
-              <a:t>dotnet --version is refused too — not a regression</a:t>
-            </a:r>
-            <a:endParaRPr lang="en-US" sz="1200" dirty="0"/>
-          </a:p>
-        </p:txBody>
-      </p:sp>
-      <p:sp>
-        <p:nvSpPr>
-          <p:cNvPr id="23" name="Text 21"/>
-          <p:cNvSpPr/>
-          <p:nvPr/>
-        </p:nvSpPr>
-        <p:spPr>
-          <a:xfrm>
-            <a:off x="6931152" y="3419856"/>
-            <a:ext cx="4572000" cy="685800"/>
-          </a:xfrm>
-          <a:prstGeom prst="rect">
-            <a:avLst/>
-          </a:prstGeom>
-          <a:noFill/>
-          <a:ln/>
-        </p:spPr>
-        <p:txBody>
-          <a:bodyPr wrap="square" rtlCol="0" anchor="t"/>
-          <a:lstStyle/>
-          <a:p>
-            <a:pPr indent="0" marL="0">
-              <a:lnSpc>
-                <a:spcPts val="1300"/>
+              <a:t>dotnet --version is refused too, and that is not a regression</a:t>
+            </a:r>
+            <a:endParaRPr lang="en-US" sz="1250" dirty="0"/>
+          </a:p>
+        </p:txBody>
+      </p:sp>
+      <p:sp>
+        <p:nvSpPr>
+          <p:cNvPr id="25" name="Text 23"/>
+          <p:cNvSpPr txBox="1"/>
+          <p:nvPr/>
+        </p:nvSpPr>
+        <p:spPr>
+          <a:xfrm>
+            <a:off x="7109460" y="3831336"/>
+            <a:ext cx="4229100" cy="704088"/>
+          </a:xfrm>
+          <a:prstGeom prst="rect">
+            <a:avLst/>
+          </a:prstGeom>
+          <a:noFill/>
+          <a:ln/>
+        </p:spPr>
+        <p:txBody>
+          <a:bodyPr wrap="square" lIns="0" tIns="0" rIns="0" bIns="0" rtlCol="0" anchor="t"/>
+          <a:lstStyle/>
+          <a:p>
+            <a:pPr indent="0" marL="0">
+              <a:lnSpc>
+                <a:spcPct val="120000"/>
               </a:lnSpc>
               <a:buNone/>
             </a:pPr>
@@ -4671,7 +5409,7 @@
                 <a:ea typeface="Calibri" pitchFamily="34" charset="-122"/>
                 <a:cs typeface="Calibri" pitchFamily="34" charset="-120"/>
               </a:rPr>
-              <a:t>An allow list’s job is saying what’s permitted; everything else follows.</a:t>
+              <a:t>It was fine in 11a because nothing decided otherwise yet. An allow list’s entire job is saying what is permitted — everything else follows, including commands that were harmless.</a:t>
             </a:r>
             <a:endParaRPr lang="en-US" sz="1050" dirty="0"/>
           </a:p>
@@ -4679,24 +5417,24 @@
       </p:sp>
       <p:sp>
         <p:nvSpPr>
-          <p:cNvPr id="24" name="Shape 22"/>
+          <p:cNvPr id="26" name="Shape 24"/>
           <p:cNvSpPr/>
           <p:nvPr/>
         </p:nvSpPr>
         <p:spPr>
           <a:xfrm>
-            <a:off x="548640" y="4315968"/>
-            <a:ext cx="5440680" cy="1298448"/>
+            <a:off x="548640" y="4818888"/>
+            <a:ext cx="5326380" cy="1572768"/>
           </a:xfrm>
           <a:prstGeom prst="roundRect">
             <a:avLst>
-              <a:gd name="adj" fmla="val 5634"/>
+              <a:gd name="adj" fmla="val 5814"/>
             </a:avLst>
           </a:prstGeom>
           <a:solidFill>
-            <a:srgbClr val="141B49"/>
+            <a:srgbClr val="1E2761"/>
           </a:solidFill>
-          <a:ln w="9525">
+          <a:ln w="12700">
             <a:solidFill>
               <a:srgbClr val="3FBFB0"/>
             </a:solidFill>
@@ -4706,14 +5444,14 @@
       </p:sp>
       <p:sp>
         <p:nvSpPr>
-          <p:cNvPr id="25" name="Shape 23"/>
+          <p:cNvPr id="27" name="Shape 25"/>
           <p:cNvSpPr/>
           <p:nvPr/>
         </p:nvSpPr>
         <p:spPr>
           <a:xfrm>
-            <a:off x="731520" y="4480560"/>
-            <a:ext cx="402336" cy="402336"/>
+            <a:off x="822960" y="5047488"/>
+            <a:ext cx="384048" cy="384048"/>
           </a:xfrm>
           <a:prstGeom prst="ellipse">
             <a:avLst/>
@@ -4726,30 +5464,30 @@
       </p:sp>
       <p:sp>
         <p:nvSpPr>
-          <p:cNvPr id="26" name="Text 24"/>
-          <p:cNvSpPr/>
-          <p:nvPr/>
-        </p:nvSpPr>
-        <p:spPr>
-          <a:xfrm>
-            <a:off x="731520" y="4480560"/>
-            <a:ext cx="402336" cy="402336"/>
-          </a:xfrm>
-          <a:prstGeom prst="rect">
-            <a:avLst/>
-          </a:prstGeom>
-          <a:noFill/>
-          <a:ln/>
-        </p:spPr>
-        <p:txBody>
-          <a:bodyPr wrap="square" rtlCol="0" anchor="ctr"/>
+          <p:cNvPr id="28" name="Text 26"/>
+          <p:cNvSpPr txBox="1"/>
+          <p:nvPr/>
+        </p:nvSpPr>
+        <p:spPr>
+          <a:xfrm>
+            <a:off x="822960" y="5047488"/>
+            <a:ext cx="384048" cy="384048"/>
+          </a:xfrm>
+          <a:prstGeom prst="rect">
+            <a:avLst/>
+          </a:prstGeom>
+          <a:noFill/>
+          <a:ln/>
+        </p:spPr>
+        <p:txBody>
+          <a:bodyPr wrap="square" lIns="0" tIns="0" rIns="0" bIns="0" rtlCol="0" anchor="ctr"/>
           <a:lstStyle/>
           <a:p>
             <a:pPr algn="ctr" indent="0" marL="0">
               <a:buNone/>
             </a:pPr>
             <a:r>
-              <a:rPr lang="en-US" sz="1400" b="1" dirty="0">
+              <a:rPr lang="en-US" sz="1100" b="1" dirty="0">
                 <a:solidFill>
                   <a:srgbClr val="141B49"/>
                 </a:solidFill>
@@ -4759,36 +5497,36 @@
               </a:rPr>
               <a:t>5</a:t>
             </a:r>
-            <a:endParaRPr lang="en-US" sz="1400" dirty="0"/>
-          </a:p>
-        </p:txBody>
-      </p:sp>
-      <p:sp>
-        <p:nvSpPr>
-          <p:cNvPr id="27" name="Text 25"/>
-          <p:cNvSpPr/>
-          <p:nvPr/>
-        </p:nvSpPr>
-        <p:spPr>
-          <a:xfrm>
-            <a:off x="1261872" y="4389120"/>
-            <a:ext cx="4572000" cy="457200"/>
-          </a:xfrm>
-          <a:prstGeom prst="rect">
-            <a:avLst/>
-          </a:prstGeom>
-          <a:noFill/>
-          <a:ln/>
-        </p:spPr>
-        <p:txBody>
-          <a:bodyPr wrap="square" rtlCol="0" anchor="ctr"/>
-          <a:lstStyle/>
-          <a:p>
-            <a:pPr indent="0" marL="0">
-              <a:buNone/>
-            </a:pPr>
-            <a:r>
-              <a:rPr lang="en-US" sz="1200" b="1" dirty="0">
+            <a:endParaRPr lang="en-US" sz="1100" dirty="0"/>
+          </a:p>
+        </p:txBody>
+      </p:sp>
+      <p:sp>
+        <p:nvSpPr>
+          <p:cNvPr id="29" name="Text 27"/>
+          <p:cNvSpPr txBox="1"/>
+          <p:nvPr/>
+        </p:nvSpPr>
+        <p:spPr>
+          <a:xfrm>
+            <a:off x="1371600" y="5020056"/>
+            <a:ext cx="4229100" cy="438912"/>
+          </a:xfrm>
+          <a:prstGeom prst="rect">
+            <a:avLst/>
+          </a:prstGeom>
+          <a:noFill/>
+          <a:ln/>
+        </p:spPr>
+        <p:txBody>
+          <a:bodyPr wrap="square" lIns="0" tIns="0" rIns="0" bIns="0" rtlCol="0" anchor="ctr"/>
+          <a:lstStyle/>
+          <a:p>
+            <a:pPr indent="0" marL="0">
+              <a:buNone/>
+            </a:pPr>
+            <a:r>
+              <a:rPr lang="en-US" sz="1250" b="1" dirty="0">
                 <a:solidFill>
                   <a:srgbClr val="FFFFFF"/>
                 </a:solidFill>
@@ -4798,34 +5536,34 @@
               </a:rPr>
               <a:t>OrdinalIgnoreCase on the match</a:t>
             </a:r>
-            <a:endParaRPr lang="en-US" sz="1200" dirty="0"/>
-          </a:p>
-        </p:txBody>
-      </p:sp>
-      <p:sp>
-        <p:nvSpPr>
-          <p:cNvPr id="28" name="Text 26"/>
-          <p:cNvSpPr/>
-          <p:nvPr/>
-        </p:nvSpPr>
-        <p:spPr>
-          <a:xfrm>
-            <a:off x="1261872" y="4846320"/>
-            <a:ext cx="4572000" cy="685800"/>
-          </a:xfrm>
-          <a:prstGeom prst="rect">
-            <a:avLst/>
-          </a:prstGeom>
-          <a:noFill/>
-          <a:ln/>
-        </p:spPr>
-        <p:txBody>
-          <a:bodyPr wrap="square" rtlCol="0" anchor="t"/>
-          <a:lstStyle/>
-          <a:p>
-            <a:pPr indent="0" marL="0">
-              <a:lnSpc>
-                <a:spcPts val="1300"/>
+            <a:endParaRPr lang="en-US" sz="1250" dirty="0"/>
+          </a:p>
+        </p:txBody>
+      </p:sp>
+      <p:sp>
+        <p:nvSpPr>
+          <p:cNvPr id="30" name="Text 28"/>
+          <p:cNvSpPr txBox="1"/>
+          <p:nvPr/>
+        </p:nvSpPr>
+        <p:spPr>
+          <a:xfrm>
+            <a:off x="1371600" y="5532120"/>
+            <a:ext cx="4229100" cy="704088"/>
+          </a:xfrm>
+          <a:prstGeom prst="rect">
+            <a:avLst/>
+          </a:prstGeom>
+          <a:noFill/>
+          <a:ln/>
+        </p:spPr>
+        <p:txBody>
+          <a:bodyPr wrap="square" lIns="0" tIns="0" rIns="0" bIns="0" rtlCol="0" anchor="t"/>
+          <a:lstStyle/>
+          <a:p>
+            <a:pPr indent="0" marL="0">
+              <a:lnSpc>
+                <a:spcPct val="120000"/>
               </a:lnSpc>
               <a:buNone/>
             </a:pPr>
@@ -4838,7 +5576,7 @@
                 <a:ea typeface="Calibri" pitchFamily="34" charset="-122"/>
                 <a:cs typeface="Calibri" pitchFamily="34" charset="-120"/>
               </a:rPr>
-              <a:t>"Build" shouldn’t silently fail where "build" would have succeeded.</a:t>
+              <a:t>The model composes these strings; "Build" should not silently fail where "build" would have succeeded.</a:t>
             </a:r>
             <a:endParaRPr lang="en-US" sz="1050" dirty="0"/>
           </a:p>
@@ -4846,24 +5584,24 @@
       </p:sp>
       <p:sp>
         <p:nvSpPr>
-          <p:cNvPr id="29" name="Shape 27"/>
+          <p:cNvPr id="31" name="Shape 29"/>
           <p:cNvSpPr/>
           <p:nvPr/>
         </p:nvSpPr>
         <p:spPr>
           <a:xfrm>
-            <a:off x="6217920" y="4315968"/>
-            <a:ext cx="5440680" cy="1298448"/>
+            <a:off x="6286500" y="4818888"/>
+            <a:ext cx="5326380" cy="1572768"/>
           </a:xfrm>
           <a:prstGeom prst="roundRect">
             <a:avLst>
-              <a:gd name="adj" fmla="val 5634"/>
+              <a:gd name="adj" fmla="val 5814"/>
             </a:avLst>
           </a:prstGeom>
           <a:solidFill>
-            <a:srgbClr val="141B49"/>
+            <a:srgbClr val="1E2761"/>
           </a:solidFill>
-          <a:ln w="9525">
+          <a:ln w="12700">
             <a:solidFill>
               <a:srgbClr val="3FBFB0"/>
             </a:solidFill>
@@ -4873,14 +5611,14 @@
       </p:sp>
       <p:sp>
         <p:nvSpPr>
-          <p:cNvPr id="30" name="Shape 28"/>
+          <p:cNvPr id="32" name="Shape 30"/>
           <p:cNvSpPr/>
           <p:nvPr/>
         </p:nvSpPr>
         <p:spPr>
           <a:xfrm>
-            <a:off x="6400800" y="4480560"/>
-            <a:ext cx="402336" cy="402336"/>
+            <a:off x="6560820" y="5047488"/>
+            <a:ext cx="384048" cy="384048"/>
           </a:xfrm>
           <a:prstGeom prst="ellipse">
             <a:avLst/>
@@ -4893,30 +5631,30 @@
       </p:sp>
       <p:sp>
         <p:nvSpPr>
-          <p:cNvPr id="31" name="Text 29"/>
-          <p:cNvSpPr/>
-          <p:nvPr/>
-        </p:nvSpPr>
-        <p:spPr>
-          <a:xfrm>
-            <a:off x="6400800" y="4480560"/>
-            <a:ext cx="402336" cy="402336"/>
-          </a:xfrm>
-          <a:prstGeom prst="rect">
-            <a:avLst/>
-          </a:prstGeom>
-          <a:noFill/>
-          <a:ln/>
-        </p:spPr>
-        <p:txBody>
-          <a:bodyPr wrap="square" rtlCol="0" anchor="ctr"/>
+          <p:cNvPr id="33" name="Text 31"/>
+          <p:cNvSpPr txBox="1"/>
+          <p:nvPr/>
+        </p:nvSpPr>
+        <p:spPr>
+          <a:xfrm>
+            <a:off x="6560820" y="5047488"/>
+            <a:ext cx="384048" cy="384048"/>
+          </a:xfrm>
+          <a:prstGeom prst="rect">
+            <a:avLst/>
+          </a:prstGeom>
+          <a:noFill/>
+          <a:ln/>
+        </p:spPr>
+        <p:txBody>
+          <a:bodyPr wrap="square" lIns="0" tIns="0" rIns="0" bIns="0" rtlCol="0" anchor="ctr"/>
           <a:lstStyle/>
           <a:p>
             <a:pPr algn="ctr" indent="0" marL="0">
               <a:buNone/>
             </a:pPr>
             <a:r>
-              <a:rPr lang="en-US" sz="1400" b="1" dirty="0">
+              <a:rPr lang="en-US" sz="1100" b="1" dirty="0">
                 <a:solidFill>
                   <a:srgbClr val="141B49"/>
                 </a:solidFill>
@@ -4926,36 +5664,36 @@
               </a:rPr>
               <a:t>6</a:t>
             </a:r>
-            <a:endParaRPr lang="en-US" sz="1400" dirty="0"/>
-          </a:p>
-        </p:txBody>
-      </p:sp>
-      <p:sp>
-        <p:nvSpPr>
-          <p:cNvPr id="32" name="Text 30"/>
-          <p:cNvSpPr/>
-          <p:nvPr/>
-        </p:nvSpPr>
-        <p:spPr>
-          <a:xfrm>
-            <a:off x="6931152" y="4389120"/>
-            <a:ext cx="4572000" cy="457200"/>
-          </a:xfrm>
-          <a:prstGeom prst="rect">
-            <a:avLst/>
-          </a:prstGeom>
-          <a:noFill/>
-          <a:ln/>
-        </p:spPr>
-        <p:txBody>
-          <a:bodyPr wrap="square" rtlCol="0" anchor="ctr"/>
-          <a:lstStyle/>
-          <a:p>
-            <a:pPr indent="0" marL="0">
-              <a:buNone/>
-            </a:pPr>
-            <a:r>
-              <a:rPr lang="en-US" sz="1200" b="1" dirty="0">
+            <a:endParaRPr lang="en-US" sz="1100" dirty="0"/>
+          </a:p>
+        </p:txBody>
+      </p:sp>
+      <p:sp>
+        <p:nvSpPr>
+          <p:cNvPr id="34" name="Text 32"/>
+          <p:cNvSpPr txBox="1"/>
+          <p:nvPr/>
+        </p:nvSpPr>
+        <p:spPr>
+          <a:xfrm>
+            <a:off x="7109460" y="5020056"/>
+            <a:ext cx="4229100" cy="438912"/>
+          </a:xfrm>
+          <a:prstGeom prst="rect">
+            <a:avLst/>
+          </a:prstGeom>
+          <a:noFill/>
+          <a:ln/>
+        </p:spPr>
+        <p:txBody>
+          <a:bodyPr wrap="square" lIns="0" tIns="0" rIns="0" bIns="0" rtlCol="0" anchor="ctr"/>
+          <a:lstStyle/>
+          <a:p>
+            <a:pPr indent="0" marL="0">
+              <a:buNone/>
+            </a:pPr>
+            <a:r>
+              <a:rPr lang="en-US" sz="1250" b="1" dirty="0">
                 <a:solidFill>
                   <a:srgbClr val="FFFFFF"/>
                 </a:solidFill>
@@ -4963,36 +5701,36 @@
                 <a:ea typeface="Cambria" pitchFamily="34" charset="-122"/>
                 <a:cs typeface="Cambria" pitchFamily="34" charset="-120"/>
               </a:rPr>
-              <a:t>No constructor parameters, no hidden state</a:t>
-            </a:r>
-            <a:endParaRPr lang="en-US" sz="1200" dirty="0"/>
-          </a:p>
-        </p:txBody>
-      </p:sp>
-      <p:sp>
-        <p:nvSpPr>
-          <p:cNvPr id="33" name="Text 31"/>
-          <p:cNvSpPr/>
-          <p:nvPr/>
-        </p:nvSpPr>
-        <p:spPr>
-          <a:xfrm>
-            <a:off x="6931152" y="4846320"/>
-            <a:ext cx="4572000" cy="685800"/>
-          </a:xfrm>
-          <a:prstGeom prst="rect">
-            <a:avLst/>
-          </a:prstGeom>
-          <a:noFill/>
-          <a:ln/>
-        </p:spPr>
-        <p:txBody>
-          <a:bodyPr wrap="square" rtlCol="0" anchor="t"/>
-          <a:lstStyle/>
-          <a:p>
-            <a:pPr indent="0" marL="0">
-              <a:lnSpc>
-                <a:spcPts val="1300"/>
+              <a:t>No constructor parameters, no state beyond the array</a:t>
+            </a:r>
+            <a:endParaRPr lang="en-US" sz="1250" dirty="0"/>
+          </a:p>
+        </p:txBody>
+      </p:sp>
+      <p:sp>
+        <p:nvSpPr>
+          <p:cNvPr id="35" name="Text 33"/>
+          <p:cNvSpPr txBox="1"/>
+          <p:nvPr/>
+        </p:nvSpPr>
+        <p:spPr>
+          <a:xfrm>
+            <a:off x="7109460" y="5532120"/>
+            <a:ext cx="4229100" cy="704088"/>
+          </a:xfrm>
+          <a:prstGeom prst="rect">
+            <a:avLst/>
+          </a:prstGeom>
+          <a:noFill/>
+          <a:ln/>
+        </p:spPr>
+        <p:txBody>
+          <a:bodyPr wrap="square" lIns="0" tIns="0" rIns="0" bIns="0" rtlCol="0" anchor="t"/>
+          <a:lstStyle/>
+          <a:p>
+            <a:pPr indent="0" marL="0">
+              <a:lnSpc>
+                <a:spcPct val="120000"/>
               </a:lnSpc>
               <a:buNone/>
             </a:pPr>
@@ -5005,72 +5743,9 @@
                 <a:ea typeface="Calibri" pitchFamily="34" charset="-122"/>
                 <a:cs typeface="Calibri" pitchFamily="34" charset="-120"/>
               </a:rPr>
-              <a:t>The array in this file is the complete, only list MiniCode enforces.</a:t>
+              <a:t>Nothing reads a file, an environment variable, or AGENTS.md. What you see in the file is the complete list MiniCode enforces.</a:t>
             </a:r>
             <a:endParaRPr lang="en-US" sz="1050" dirty="0"/>
-          </a:p>
-        </p:txBody>
-      </p:sp>
-      <p:sp>
-        <p:nvSpPr>
-          <p:cNvPr id="34" name="Shape 32"/>
-          <p:cNvSpPr/>
-          <p:nvPr/>
-        </p:nvSpPr>
-        <p:spPr>
-          <a:xfrm>
-            <a:off x="548640" y="5806440"/>
-            <a:ext cx="11109960" cy="594360"/>
-          </a:xfrm>
-          <a:prstGeom prst="roundRect">
-            <a:avLst>
-              <a:gd name="adj" fmla="val 9231"/>
-            </a:avLst>
-          </a:prstGeom>
-          <a:ln w="12700">
-            <a:solidFill>
-              <a:srgbClr val="3FBFB0"/>
-            </a:solidFill>
-            <a:prstDash val="dash"/>
-          </a:ln>
-        </p:spPr>
-      </p:sp>
-      <p:sp>
-        <p:nvSpPr>
-          <p:cNvPr id="35" name="Text 33"/>
-          <p:cNvSpPr/>
-          <p:nvPr/>
-        </p:nvSpPr>
-        <p:spPr>
-          <a:xfrm>
-            <a:off x="822960" y="5806440"/>
-            <a:ext cx="10607040" cy="594360"/>
-          </a:xfrm>
-          <a:prstGeom prst="rect">
-            <a:avLst/>
-          </a:prstGeom>
-          <a:noFill/>
-          <a:ln/>
-        </p:spPr>
-        <p:txBody>
-          <a:bodyPr wrap="square" rtlCol="0" anchor="ctr"/>
-          <a:lstStyle/>
-          <a:p>
-            <a:pPr algn="ctr" indent="0" marL="0">
-              <a:buNone/>
-            </a:pPr>
-            <a:r>
-              <a:rPr lang="en-US" sz="1150" i="1" dirty="0">
-                <a:solidFill>
-                  <a:srgbClr val="CADCFC"/>
-                </a:solidFill>
-                <a:latin typeface="Calibri" pitchFamily="34" charset="0"/>
-                <a:ea typeface="Calibri" pitchFamily="34" charset="-122"/>
-                <a:cs typeface="Calibri" pitchFamily="34" charset="-120"/>
-              </a:rPr>
-              <a:t>It stops a careless or prompt-injected command — not a model that reaches the same place another way. Closing that is Module 15’s job.</a:t>
-            </a:r>
-            <a:endParaRPr lang="en-US" sz="1150" dirty="0"/>
           </a:p>
         </p:txBody>
       </p:sp>
@@ -5085,13 +5760,6 @@
 <file path=ppt/slides/slide6.xml><?xml version="1.0" encoding="utf-8"?>
 <p:sld xmlns:a="http://schemas.openxmlformats.org/drawingml/2006/main" xmlns:r="http://schemas.openxmlformats.org/officeDocument/2006/relationships" xmlns:p="http://schemas.openxmlformats.org/presentationml/2006/main">
   <p:cSld name="Slide 6">
-    <p:bg>
-      <p:bgPr>
-        <a:solidFill>
-          <a:srgbClr val="FFFFFF"/>
-        </a:solidFill>
-      </p:bgPr>
-    </p:bg>
     <p:spTree>
       <p:nvGrpSpPr>
         <p:cNvPr id="1" name=""/>
@@ -5109,7 +5777,7 @@
       <p:sp>
         <p:nvSpPr>
           <p:cNvPr id="2" name="Text 0"/>
-          <p:cNvSpPr/>
+          <p:cNvSpPr txBox="1"/>
           <p:nvPr/>
         </p:nvSpPr>
         <p:spPr>
@@ -5124,7 +5792,7 @@
           <a:ln/>
         </p:spPr>
         <p:txBody>
-          <a:bodyPr wrap="square" rtlCol="0" anchor="ctr"/>
+          <a:bodyPr wrap="square" lIns="0" tIns="0" rIns="0" bIns="0" rtlCol="0" anchor="ctr"/>
           <a:lstStyle/>
           <a:p>
             <a:pPr indent="0" marL="0">
@@ -5148,7 +5816,7 @@
       <p:sp>
         <p:nvSpPr>
           <p:cNvPr id="3" name="Text 1"/>
-          <p:cNvSpPr/>
+          <p:cNvSpPr txBox="1"/>
           <p:nvPr/>
         </p:nvSpPr>
         <p:spPr>
@@ -5163,7 +5831,7 @@
           <a:ln/>
         </p:spPr>
         <p:txBody>
-          <a:bodyPr wrap="square" rtlCol="0" anchor="ctr"/>
+          <a:bodyPr wrap="square" lIns="0" tIns="0" rIns="0" bIns="0" rtlCol="0" anchor="t"/>
           <a:lstStyle/>
           <a:p>
             <a:pPr indent="0" marL="0">
@@ -5178,7 +5846,7 @@
                 <a:ea typeface="Cambria" pitchFamily="34" charset="-122"/>
                 <a:cs typeface="Cambria" pitchFamily="34" charset="-120"/>
               </a:rPr>
-              <a:t>Same Executor, One New "No"</a:t>
+              <a:t>Generalize From a Pair to a Prefix</a:t>
             </a:r>
             <a:endParaRPr lang="en-US" sz="3200" dirty="0"/>
           </a:p>
@@ -5186,18 +5854,135 @@
       </p:sp>
       <p:sp>
         <p:nvSpPr>
-          <p:cNvPr id="4" name="Shape 2"/>
+          <p:cNvPr id="4" name="Text 2"/>
+          <p:cNvSpPr txBox="1"/>
+          <p:nvPr/>
+        </p:nvSpPr>
+        <p:spPr>
+          <a:xfrm>
+            <a:off x="548640" y="1207008"/>
+            <a:ext cx="11064240" cy="365760"/>
+          </a:xfrm>
+          <a:prstGeom prst="rect">
+            <a:avLst/>
+          </a:prstGeom>
+          <a:noFill/>
+          <a:ln/>
+        </p:spPr>
+        <p:txBody>
+          <a:bodyPr wrap="square" lIns="0" tIns="0" rIns="0" bIns="0" rtlCol="0" anchor="t"/>
+          <a:lstStyle/>
+          <a:p>
+            <a:pPr indent="0" marL="0">
+              <a:buNone/>
+            </a:pPr>
+            <a:r>
+              <a:rPr lang="en-US" sz="1250" i="1" dirty="0">
+                <a:solidFill>
+                  <a:srgbClr val="2A2F45"/>
+                </a:solidFill>
+                <a:latin typeface="Calibri" pitchFamily="34" charset="0"/>
+                <a:ea typeface="Calibri" pitchFamily="34" charset="-122"/>
+                <a:cs typeface="Calibri" pitchFamily="34" charset="-120"/>
+              </a:rPr>
+              <a:t>Real output from this Module’s code, through AllowListedShellExecutor against the same temporary console project 11a used.</a:t>
+            </a:r>
+            <a:endParaRPr lang="en-US" sz="1250" dirty="0"/>
+          </a:p>
+        </p:txBody>
+      </p:sp>
+      <p:sp>
+        <p:nvSpPr>
+          <p:cNvPr id="5" name="Text 3"/>
+          <p:cNvSpPr txBox="1"/>
+          <p:nvPr/>
+        </p:nvSpPr>
+        <p:spPr>
+          <a:xfrm>
+            <a:off x="457200" y="6510528"/>
+            <a:ext cx="8686800" cy="274320"/>
+          </a:xfrm>
+          <a:prstGeom prst="rect">
+            <a:avLst/>
+          </a:prstGeom>
+          <a:noFill/>
+          <a:ln/>
+        </p:spPr>
+        <p:txBody>
+          <a:bodyPr wrap="square" lIns="0" tIns="0" rIns="0" bIns="0" rtlCol="0" anchor="ctr"/>
+          <a:lstStyle/>
+          <a:p>
+            <a:pPr indent="0" marL="0">
+              <a:buNone/>
+            </a:pPr>
+            <a:r>
+              <a:rPr lang="en-US" sz="900" dirty="0">
+                <a:solidFill>
+                  <a:srgbClr val="6B7280"/>
+                </a:solidFill>
+                <a:latin typeface="Calibri" pitchFamily="34" charset="0"/>
+                <a:ea typeface="Calibri" pitchFamily="34" charset="-122"/>
+                <a:cs typeface="Calibri" pitchFamily="34" charset="-120"/>
+              </a:rPr>
+              <a:t>MODULE 11B — SHELL COMMAND EXECUTION: THE COMMAND ALLOW LIST</a:t>
+            </a:r>
+            <a:endParaRPr lang="en-US" sz="900" dirty="0"/>
+          </a:p>
+        </p:txBody>
+      </p:sp>
+      <p:sp>
+        <p:nvSpPr>
+          <p:cNvPr id="6" name="Text 4"/>
+          <p:cNvSpPr txBox="1"/>
+          <p:nvPr/>
+        </p:nvSpPr>
+        <p:spPr>
+          <a:xfrm>
+            <a:off x="11338560" y="6510528"/>
+            <a:ext cx="365760" cy="274320"/>
+          </a:xfrm>
+          <a:prstGeom prst="rect">
+            <a:avLst/>
+          </a:prstGeom>
+          <a:noFill/>
+          <a:ln/>
+        </p:spPr>
+        <p:txBody>
+          <a:bodyPr wrap="square" lIns="0" tIns="0" rIns="0" bIns="0" rtlCol="0" anchor="ctr"/>
+          <a:lstStyle/>
+          <a:p>
+            <a:pPr algn="r" indent="0" marL="0">
+              <a:buNone/>
+            </a:pPr>
+            <a:r>
+              <a:rPr lang="en-US" sz="900" dirty="0">
+                <a:solidFill>
+                  <a:srgbClr val="6B7280"/>
+                </a:solidFill>
+                <a:latin typeface="Calibri" pitchFamily="34" charset="0"/>
+                <a:ea typeface="Calibri" pitchFamily="34" charset="-122"/>
+                <a:cs typeface="Calibri" pitchFamily="34" charset="-120"/>
+              </a:rPr>
+              <a:t>6</a:t>
+            </a:r>
+            <a:endParaRPr lang="en-US" sz="900" dirty="0"/>
+          </a:p>
+        </p:txBody>
+      </p:sp>
+      <p:sp>
+        <p:nvSpPr>
+          <p:cNvPr id="7" name="Shape 5"/>
           <p:cNvSpPr/>
           <p:nvPr/>
         </p:nvSpPr>
         <p:spPr>
           <a:xfrm>
-            <a:off x="548640" y="1371600"/>
-            <a:ext cx="5852160" cy="4800600"/>
+            <a:off x="548640" y="1874520"/>
+            <a:ext cx="5349240" cy="4297680"/>
           </a:xfrm>
           <a:prstGeom prst="roundRect">
             <a:avLst>
-              <a:gd name="adj" fmla="val 1905"/>
+              <a:gd name="adj" fmla="val 2128"/>
             </a:avLst>
           </a:prstGeom>
           <a:solidFill>
@@ -5208,14 +5993,14 @@
       </p:sp>
       <p:sp>
         <p:nvSpPr>
-          <p:cNvPr id="5" name="Shape 3"/>
+          <p:cNvPr id="8" name="Shape 6"/>
           <p:cNvSpPr/>
           <p:nvPr/>
         </p:nvSpPr>
         <p:spPr>
           <a:xfrm>
-            <a:off x="822960" y="1600200"/>
-            <a:ext cx="502920" cy="502920"/>
+            <a:off x="868680" y="2194560"/>
+            <a:ext cx="640080" cy="640080"/>
           </a:xfrm>
           <a:prstGeom prst="ellipse">
             <a:avLst/>
@@ -5228,7 +6013,7 @@
       </p:sp>
       <p:pic>
         <p:nvPicPr>
-          <p:cNvPr id="6" name="Image 0" descr="/home/claude/deck16/icons/puzzle.png">    </p:cNvPr>
+          <p:cNvPr id="9" name="Image 0" descr="preencoded.png">    </p:cNvPr>
           <p:cNvPicPr>
             <a:picLocks noChangeAspect="1"/>
           </p:cNvPicPr>
@@ -5242,8 +6027,8 @@
         </p:blipFill>
         <p:spPr>
           <a:xfrm>
-            <a:off x="941832" y="1719072"/>
-            <a:ext cx="265176" cy="265176"/>
+            <a:off x="1033272" y="2359152"/>
+            <a:ext cx="310896" cy="310896"/>
           </a:xfrm>
           <a:prstGeom prst="rect">
             <a:avLst/>
@@ -5252,30 +6037,30 @@
       </p:pic>
       <p:sp>
         <p:nvSpPr>
-          <p:cNvPr id="7" name="Text 4"/>
-          <p:cNvSpPr/>
-          <p:nvPr/>
-        </p:nvSpPr>
-        <p:spPr>
-          <a:xfrm>
-            <a:off x="1463040" y="1627632"/>
-            <a:ext cx="4572000" cy="457200"/>
-          </a:xfrm>
-          <a:prstGeom prst="rect">
-            <a:avLst/>
-          </a:prstGeom>
-          <a:noFill/>
-          <a:ln/>
-        </p:spPr>
-        <p:txBody>
-          <a:bodyPr wrap="square" rtlCol="0" anchor="ctr"/>
-          <a:lstStyle/>
-          <a:p>
-            <a:pPr indent="0" marL="0">
-              <a:buNone/>
-            </a:pPr>
-            <a:r>
-              <a:rPr lang="en-US" sz="1500" b="1" dirty="0">
+          <p:cNvPr id="10" name="Text 7"/>
+          <p:cNvSpPr txBox="1"/>
+          <p:nvPr/>
+        </p:nvSpPr>
+        <p:spPr>
+          <a:xfrm>
+            <a:off x="1645920" y="2194560"/>
+            <a:ext cx="3931920" cy="640080"/>
+          </a:xfrm>
+          <a:prstGeom prst="rect">
+            <a:avLst/>
+          </a:prstGeom>
+          <a:noFill/>
+          <a:ln/>
+        </p:spPr>
+        <p:txBody>
+          <a:bodyPr wrap="square" lIns="0" tIns="0" rIns="0" bIns="0" rtlCol="0" anchor="ctr"/>
+          <a:lstStyle/>
+          <a:p>
+            <a:pPr indent="0" marL="0">
+              <a:buNone/>
+            </a:pPr>
+            <a:r>
+              <a:rPr lang="en-US" sz="1550" b="1" dirty="0">
                 <a:solidFill>
                   <a:srgbClr val="2A2F45"/>
                 </a:solidFill>
@@ -5283,41 +6068,41 @@
                 <a:ea typeface="Cambria" pitchFamily="34" charset="-122"/>
                 <a:cs typeface="Cambria" pitchFamily="34" charset="-120"/>
               </a:rPr>
-              <a:t>Exercise: prefix matching</a:t>
-            </a:r>
-            <a:endParaRPr lang="en-US" sz="1500" dirty="0"/>
-          </a:p>
-        </p:txBody>
-      </p:sp>
-      <p:sp>
-        <p:nvSpPr>
-          <p:cNvPr id="8" name="Text 5"/>
-          <p:cNvSpPr/>
-          <p:nvPr/>
-        </p:nvSpPr>
-        <p:spPr>
-          <a:xfrm>
-            <a:off x="822960" y="2148840"/>
-            <a:ext cx="5349240" cy="1005840"/>
-          </a:xfrm>
-          <a:prstGeom prst="rect">
-            <a:avLst/>
-          </a:prstGeom>
-          <a:noFill/>
-          <a:ln/>
-        </p:spPr>
-        <p:txBody>
-          <a:bodyPr wrap="square" rtlCol="0" anchor="ctr"/>
-          <a:lstStyle/>
-          <a:p>
-            <a:pPr indent="0" marL="0">
-              <a:lnSpc>
-                <a:spcPts val="1700"/>
-              </a:lnSpc>
-              <a:buNone/>
-            </a:pPr>
-            <a:r>
-              <a:rPr lang="en-US" sz="1250" dirty="0">
+              <a:t>Exercise: entry tokens as a prefix</a:t>
+            </a:r>
+            <a:endParaRPr lang="en-US" sz="1550" dirty="0"/>
+          </a:p>
+        </p:txBody>
+      </p:sp>
+      <p:sp>
+        <p:nvSpPr>
+          <p:cNvPr id="11" name="Text 8"/>
+          <p:cNvSpPr txBox="1"/>
+          <p:nvPr/>
+        </p:nvSpPr>
+        <p:spPr>
+          <a:xfrm>
+            <a:off x="868680" y="3063240"/>
+            <a:ext cx="4709160" cy="2743200"/>
+          </a:xfrm>
+          <a:prstGeom prst="rect">
+            <a:avLst/>
+          </a:prstGeom>
+          <a:noFill/>
+          <a:ln/>
+        </p:spPr>
+        <p:txBody>
+          <a:bodyPr wrap="square" lIns="0" tIns="0" rIns="0" bIns="0" rtlCol="0" anchor="t"/>
+          <a:lstStyle/>
+          <a:p>
+            <a:pPr indent="0" marL="0">
+              <a:lnSpc>
+                <a:spcPct val="125000"/>
+              </a:lnSpc>
+              <a:buNone/>
+            </a:pPr>
+            <a:r>
+              <a:rPr lang="en-US" sz="1350" dirty="0">
                 <a:solidFill>
                   <a:srgbClr val="2A2F45"/>
                 </a:solidFill>
@@ -5325,38 +6110,39 @@
                 <a:ea typeface="Calibri" pitchFamily="34" charset="-122"/>
                 <a:cs typeface="Calibri" pitchFamily="34" charset="-120"/>
               </a:rPr>
-              <a:t>Generalize from "program plus first argument" to "entry as a prefix." Split each entry into tokens; an entry matches when its tokens prefix [command, ...arguments].</a:t>
-            </a:r>
-            <a:endParaRPr lang="en-US" sz="1250" dirty="0"/>
-          </a:p>
-        </p:txBody>
-      </p:sp>
-      <p:sp>
-        <p:nvSpPr>
-          <p:cNvPr id="9" name="Text 6"/>
-          <p:cNvSpPr/>
-          <p:nvPr/>
-        </p:nvSpPr>
-        <p:spPr>
-          <a:xfrm>
-            <a:off x="822960" y="3200400"/>
-            <a:ext cx="5349240" cy="2011680"/>
-          </a:xfrm>
-          <a:prstGeom prst="rect">
-            <a:avLst/>
-          </a:prstGeom>
-          <a:noFill/>
-          <a:ln/>
-        </p:spPr>
-        <p:txBody>
-          <a:bodyPr wrap="square" rtlCol="0" anchor="ctr"/>
-          <a:lstStyle/>
-          <a:p>
-            <a:pPr indent="0" marL="0">
-              <a:lnSpc>
-                <a:spcPts val="1900"/>
-              </a:lnSpc>
-              <a:buNone/>
+              <a:t>Today IsAllowed can only express two-token rules. Split each entry into tokens and match when those tokens are a prefix of [command, ...arguments] — so "dotnet tool restore" permits dotnet tool restore without also permitting dotnet tool install, which the two-token check cannot distinguish.</a:t>
+            </a:r>
+            <a:endParaRPr lang="en-US" sz="1350" dirty="0"/>
+          </a:p>
+        </p:txBody>
+      </p:sp>
+      <p:sp>
+        <p:nvSpPr>
+          <p:cNvPr id="12" name="Text 9"/>
+          <p:cNvSpPr txBox="1"/>
+          <p:nvPr/>
+        </p:nvSpPr>
+        <p:spPr>
+          <a:xfrm>
+            <a:off x="868680" y="4251960"/>
+            <a:ext cx="4709160" cy="1828800"/>
+          </a:xfrm>
+          <a:prstGeom prst="rect">
+            <a:avLst/>
+          </a:prstGeom>
+          <a:noFill/>
+          <a:ln/>
+        </p:spPr>
+        <p:txBody>
+          <a:bodyPr wrap="square" lIns="0" tIns="0" rIns="0" bIns="0" rtlCol="0" anchor="t"/>
+          <a:lstStyle/>
+          <a:p>
+            <a:pPr marL="342900" indent="-342900">
+              <a:spcAft>
+                <a:spcPts val="800"/>
+              </a:spcAft>
+              <a:buSzPct val="100000"/>
+              <a:buChar char="•"/>
             </a:pPr>
             <a:r>
               <a:rPr lang="en-US" sz="1200" dirty="0">
@@ -5367,16 +6153,17 @@
                 <a:ea typeface="Calibri" pitchFamily="34" charset="-122"/>
                 <a:cs typeface="Calibri" pitchFamily="34" charset="-120"/>
               </a:rPr>
-              <a:t>• The four shipped entries behave exactly as today</a:t>
+              <a:t>The four shipped entries behave exactly as they do today</a:t>
             </a:r>
             <a:endParaRPr lang="en-US" sz="1200" dirty="0"/>
           </a:p>
           <a:p>
-            <a:pPr indent="0" marL="0">
-              <a:lnSpc>
-                <a:spcPts val="1900"/>
-              </a:lnSpc>
-              <a:buNone/>
+            <a:pPr marL="342900" indent="-342900">
+              <a:spcAft>
+                <a:spcPts val="800"/>
+              </a:spcAft>
+              <a:buSzPct val="100000"/>
+              <a:buChar char="•"/>
             </a:pPr>
             <a:r>
               <a:rPr lang="en-US" sz="1200" dirty="0">
@@ -5387,16 +6174,17 @@
                 <a:ea typeface="Calibri" pitchFamily="34" charset="-122"/>
                 <a:cs typeface="Calibri" pitchFamily="34" charset="-120"/>
               </a:rPr>
-              <a:t>• "dotnet tool restore" allows that, still refuses "dotnet tool install x"</a:t>
+              <a:t>Adding "dotnet tool restore" allows it and still refuses dotnet tool install x</a:t>
             </a:r>
             <a:endParaRPr lang="en-US" sz="1200" dirty="0"/>
           </a:p>
           <a:p>
-            <a:pPr indent="0" marL="0">
-              <a:lnSpc>
-                <a:spcPts val="1900"/>
-              </a:lnSpc>
-              <a:buNone/>
+            <a:pPr marL="342900" indent="-342900">
+              <a:spcAft>
+                <a:spcPts val="800"/>
+              </a:spcAft>
+              <a:buSzPct val="100000"/>
+              <a:buChar char="•"/>
             </a:pPr>
             <a:r>
               <a:rPr lang="en-US" sz="1200" dirty="0">
@@ -5407,7 +6195,7 @@
                 <a:ea typeface="Calibri" pitchFamily="34" charset="-122"/>
                 <a:cs typeface="Calibri" pitchFamily="34" charset="-120"/>
               </a:rPr>
-              <a:t>• A one-token entry like "dotnet" would match everything — the rule is nobody adds one, not that the code forbids it</a:t>
+              <a:t>A one-token entry such as "dotnet" would match every invocation — the criterion is that nobody adds one, not that the code forbids it</a:t>
             </a:r>
             <a:endParaRPr lang="en-US" sz="1200" dirty="0"/>
           </a:p>
@@ -5415,18 +6203,18 @@
       </p:sp>
       <p:sp>
         <p:nvSpPr>
-          <p:cNvPr id="10" name="Shape 7"/>
+          <p:cNvPr id="13" name="Shape 10"/>
           <p:cNvSpPr/>
           <p:nvPr/>
         </p:nvSpPr>
         <p:spPr>
           <a:xfrm>
-            <a:off x="6675120" y="1371600"/>
-            <a:ext cx="4983480" cy="4800600"/>
+            <a:off x="6309360" y="1874520"/>
+            <a:ext cx="5349240" cy="4297680"/>
           </a:xfrm>
           <a:prstGeom prst="roundRect">
             <a:avLst>
-              <a:gd name="adj" fmla="val 1905"/>
+              <a:gd name="adj" fmla="val 2128"/>
             </a:avLst>
           </a:prstGeom>
           <a:solidFill>
@@ -5442,200 +6230,432 @@
       </p:sp>
       <p:sp>
         <p:nvSpPr>
-          <p:cNvPr id="11" name="Text 8"/>
-          <p:cNvSpPr/>
-          <p:nvPr/>
-        </p:nvSpPr>
-        <p:spPr>
-          <a:xfrm>
-            <a:off x="6903720" y="1600200"/>
-            <a:ext cx="4572000" cy="4389120"/>
-          </a:xfrm>
-          <a:prstGeom prst="rect">
-            <a:avLst/>
-          </a:prstGeom>
-          <a:noFill/>
-          <a:ln/>
-        </p:spPr>
-        <p:txBody>
-          <a:bodyPr wrap="square" rtlCol="0" anchor="t"/>
-          <a:lstStyle/>
-          <a:p>
-            <a:pPr indent="0" marL="0">
-              <a:lnSpc>
-                <a:spcPts val="1500"/>
-              </a:lnSpc>
-              <a:buNone/>
-            </a:pPr>
-            <a:r>
-              <a:rPr lang="en-US" sz="1050" b="1" dirty="0">
-                <a:solidFill>
-                  <a:srgbClr val="4ADE80"/>
+          <p:cNvPr id="14" name="Text 11"/>
+          <p:cNvSpPr txBox="1"/>
+          <p:nvPr/>
+        </p:nvSpPr>
+        <p:spPr>
+          <a:xfrm>
+            <a:off x="6638544" y="2130552"/>
+            <a:ext cx="4690872" cy="238252"/>
+          </a:xfrm>
+          <a:prstGeom prst="rect">
+            <a:avLst/>
+          </a:prstGeom>
+          <a:noFill/>
+          <a:ln/>
+        </p:spPr>
+        <p:txBody>
+          <a:bodyPr wrap="square" lIns="0" tIns="0" rIns="0" bIns="0" rtlCol="0" anchor="t"/>
+          <a:lstStyle/>
+          <a:p>
+            <a:pPr indent="0" marL="0">
+              <a:lnSpc>
+                <a:spcPts val="1300"/>
+              </a:lnSpc>
+              <a:buNone/>
+            </a:pPr>
+            <a:r>
+              <a:rPr lang="en-US" sz="950" i="1" dirty="0">
+                <a:solidFill>
+                  <a:srgbClr val="6B7280"/>
                 </a:solidFill>
                 <a:latin typeface="Courier New" pitchFamily="34" charset="0"/>
                 <a:ea typeface="Courier New" pitchFamily="34" charset="-122"/>
                 <a:cs typeface="Courier New" pitchFamily="34" charset="-120"/>
               </a:rPr>
-              <a:t>Exit code 0
-</a:t>
-            </a:r>
-            <a:pPr indent="0" marL="0">
-              <a:lnSpc>
-                <a:spcPts val="1500"/>
-              </a:lnSpc>
-              <a:buNone/>
-            </a:pPr>
-            <a:r>
-              <a:rPr lang="en-US" sz="1050" dirty="0">
-                <a:solidFill>
-                  <a:srgbClr val="CADCFC"/>
+              <a:t>=== an allowed command, as last lesson ===</a:t>
+            </a:r>
+            <a:endParaRPr lang="en-US" sz="950" dirty="0"/>
+          </a:p>
+        </p:txBody>
+      </p:sp>
+      <p:sp>
+        <p:nvSpPr>
+          <p:cNvPr id="15" name="Text 12"/>
+          <p:cNvSpPr txBox="1"/>
+          <p:nvPr/>
+        </p:nvSpPr>
+        <p:spPr>
+          <a:xfrm>
+            <a:off x="6638544" y="2478532"/>
+            <a:ext cx="4690872" cy="403352"/>
+          </a:xfrm>
+          <a:prstGeom prst="rect">
+            <a:avLst/>
+          </a:prstGeom>
+          <a:noFill/>
+          <a:ln/>
+        </p:spPr>
+        <p:txBody>
+          <a:bodyPr wrap="square" lIns="0" tIns="0" rIns="0" bIns="0" rtlCol="0" anchor="t"/>
+          <a:lstStyle/>
+          <a:p>
+            <a:pPr indent="0" marL="0">
+              <a:lnSpc>
+                <a:spcPts val="1300"/>
+              </a:lnSpc>
+              <a:buNone/>
+            </a:pPr>
+            <a:r>
+              <a:rPr lang="en-US" sz="950" dirty="0">
+                <a:solidFill>
+                  <a:srgbClr val="4ADE80"/>
                 </a:solidFill>
                 <a:latin typeface="Courier New" pitchFamily="34" charset="0"/>
                 <a:ea typeface="Courier New" pitchFamily="34" charset="-122"/>
                 <a:cs typeface="Courier New" pitchFamily="34" charset="-120"/>
               </a:rPr>
-              <a:t>  Shop -&gt; ...\bin\Debug\net10.0\Shop.dll
-Build succeeded.
-    0 Warning(s)
-    0 Error(s)
-</a:t>
-            </a:r>
-            <a:pPr indent="0" marL="0">
-              <a:lnSpc>
-                <a:spcPts val="1500"/>
-              </a:lnSpc>
-              <a:buNone/>
-            </a:pPr>
-            <a:r>
-              <a:rPr lang="en-US" sz="1050" dirty="0">
-                <a:solidFill>
-                  <a:srgbClr val="F87171"/>
+              <a:t>Exit code 0</a:t>
+            </a:r>
+            <a:endParaRPr lang="en-US" sz="950" dirty="0"/>
+          </a:p>
+          <a:p>
+            <a:pPr indent="0" marL="0">
+              <a:lnSpc>
+                <a:spcPts val="1300"/>
+              </a:lnSpc>
+              <a:buNone/>
+            </a:pPr>
+            <a:r>
+              <a:rPr lang="en-US" sz="950" dirty="0">
+                <a:solidFill>
+                  <a:srgbClr val="4ADE80"/>
                 </a:solidFill>
                 <a:latin typeface="Courier New" pitchFamily="34" charset="0"/>
                 <a:ea typeface="Courier New" pitchFamily="34" charset="-122"/>
                 <a:cs typeface="Courier New" pitchFamily="34" charset="-120"/>
               </a:rPr>
-              <a:t>run_command failed: 'dotnet nuget
-push' is not on the allow list.
-Allowed: dotnet restore, dotnet
-build, dotnet test, dotnet format.
-</a:t>
-            </a:r>
-            <a:pPr indent="0" marL="0">
-              <a:lnSpc>
-                <a:spcPts val="1500"/>
-              </a:lnSpc>
-              <a:buNone/>
-            </a:pPr>
-            <a:r>
-              <a:rPr lang="en-US" sz="1050" dirty="0">
-                <a:solidFill>
-                  <a:srgbClr val="F87171"/>
+              <a:t>Build succeeded.    0 Error(s)</a:t>
+            </a:r>
+            <a:endParaRPr lang="en-US" sz="950" dirty="0"/>
+          </a:p>
+        </p:txBody>
+      </p:sp>
+      <p:sp>
+        <p:nvSpPr>
+          <p:cNvPr id="16" name="Text 13"/>
+          <p:cNvSpPr txBox="1"/>
+          <p:nvPr/>
+        </p:nvSpPr>
+        <p:spPr>
+          <a:xfrm>
+            <a:off x="6638544" y="2808732"/>
+            <a:ext cx="4690872" cy="238252"/>
+          </a:xfrm>
+          <a:prstGeom prst="rect">
+            <a:avLst/>
+          </a:prstGeom>
+          <a:noFill/>
+          <a:ln/>
+        </p:spPr>
+        <p:txBody>
+          <a:bodyPr wrap="square" lIns="0" tIns="0" rIns="0" bIns="0" rtlCol="0" anchor="t"/>
+          <a:lstStyle/>
+          <a:p>
+            <a:pPr indent="0" marL="0">
+              <a:lnSpc>
+                <a:spcPts val="1300"/>
+              </a:lnSpc>
+              <a:buNone/>
+            </a:pPr>
+            <a:r>
+              <a:rPr lang="en-US" sz="950" i="1" dirty="0">
+                <a:solidFill>
+                  <a:srgbClr val="6B7280"/>
                 </a:solidFill>
                 <a:latin typeface="Courier New" pitchFamily="34" charset="0"/>
                 <a:ea typeface="Courier New" pitchFamily="34" charset="-122"/>
                 <a:cs typeface="Courier New" pitchFamily="34" charset="-120"/>
               </a:rPr>
-              <a:t>run_command failed: 'ping -n 6
-127.0.0.1' is not on the allow list.
-</a:t>
-            </a:r>
-            <a:pPr indent="0" marL="0">
-              <a:lnSpc>
-                <a:spcPts val="1500"/>
-              </a:lnSpc>
-              <a:buNone/>
-            </a:pPr>
-            <a:r>
-              <a:rPr lang="en-US" sz="1050" i="1" dirty="0">
-                <a:solidFill>
-                  <a:srgbClr val="6B7280"/>
+              <a:t>=== a sibling subcommand, refused ===</a:t>
+            </a:r>
+            <a:endParaRPr lang="en-US" sz="950" dirty="0"/>
+          </a:p>
+        </p:txBody>
+      </p:sp>
+      <p:sp>
+        <p:nvSpPr>
+          <p:cNvPr id="17" name="Text 14"/>
+          <p:cNvSpPr txBox="1"/>
+          <p:nvPr/>
+        </p:nvSpPr>
+        <p:spPr>
+          <a:xfrm>
+            <a:off x="6638544" y="3156712"/>
+            <a:ext cx="4690872" cy="733552"/>
+          </a:xfrm>
+          <a:prstGeom prst="rect">
+            <a:avLst/>
+          </a:prstGeom>
+          <a:noFill/>
+          <a:ln/>
+        </p:spPr>
+        <p:txBody>
+          <a:bodyPr wrap="square" lIns="0" tIns="0" rIns="0" bIns="0" rtlCol="0" anchor="t"/>
+          <a:lstStyle/>
+          <a:p>
+            <a:pPr indent="0" marL="0">
+              <a:lnSpc>
+                <a:spcPts val="1300"/>
+              </a:lnSpc>
+              <a:buNone/>
+            </a:pPr>
+            <a:r>
+              <a:rPr lang="en-US" sz="900" dirty="0">
+                <a:solidFill>
+                  <a:srgbClr val="F87171"/>
                 </a:solidFill>
                 <a:latin typeface="Courier New" pitchFamily="34" charset="0"/>
                 <a:ea typeface="Courier New" pitchFamily="34" charset="-122"/>
                 <a:cs typeface="Courier New" pitchFamily="34" charset="-120"/>
               </a:rPr>
-              <a:t>← refused before a process starts</a:t>
-            </a:r>
-            <a:endParaRPr lang="en-US" sz="1050" dirty="0"/>
-          </a:p>
-        </p:txBody>
-      </p:sp>
-      <p:sp>
-        <p:nvSpPr>
-          <p:cNvPr id="12" name="Text 9"/>
-          <p:cNvSpPr/>
-          <p:nvPr/>
-        </p:nvSpPr>
-        <p:spPr>
-          <a:xfrm>
-            <a:off x="457200" y="6510528"/>
-            <a:ext cx="9601200" cy="274320"/>
-          </a:xfrm>
-          <a:prstGeom prst="rect">
-            <a:avLst/>
-          </a:prstGeom>
-          <a:noFill/>
-          <a:ln/>
-        </p:spPr>
-        <p:txBody>
-          <a:bodyPr wrap="square" rtlCol="0" anchor="ctr"/>
-          <a:lstStyle/>
-          <a:p>
-            <a:pPr indent="0" marL="0">
+              <a:t>run_command failed: 'dotnet nuget push' is</a:t>
+            </a:r>
+            <a:endParaRPr lang="en-US" sz="900" dirty="0"/>
+          </a:p>
+          <a:p>
+            <a:pPr indent="0" marL="0">
+              <a:lnSpc>
+                <a:spcPts val="1300"/>
+              </a:lnSpc>
               <a:buNone/>
             </a:pPr>
             <a:r>
               <a:rPr lang="en-US" sz="900" dirty="0">
                 <a:solidFill>
+                  <a:srgbClr val="F87171"/>
+                </a:solidFill>
+                <a:latin typeface="Courier New" pitchFamily="34" charset="0"/>
+                <a:ea typeface="Courier New" pitchFamily="34" charset="-122"/>
+                <a:cs typeface="Courier New" pitchFamily="34" charset="-120"/>
+              </a:rPr>
+              <a:t>not on the allow list. Allowed: dotnet</a:t>
+            </a:r>
+            <a:endParaRPr lang="en-US" sz="900" dirty="0"/>
+          </a:p>
+          <a:p>
+            <a:pPr indent="0" marL="0">
+              <a:lnSpc>
+                <a:spcPts val="1300"/>
+              </a:lnSpc>
+              <a:buNone/>
+            </a:pPr>
+            <a:r>
+              <a:rPr lang="en-US" sz="900" dirty="0">
+                <a:solidFill>
+                  <a:srgbClr val="F87171"/>
+                </a:solidFill>
+                <a:latin typeface="Courier New" pitchFamily="34" charset="0"/>
+                <a:ea typeface="Courier New" pitchFamily="34" charset="-122"/>
+                <a:cs typeface="Courier New" pitchFamily="34" charset="-120"/>
+              </a:rPr>
+              <a:t>restore, dotnet build, dotnet test, dotnet</a:t>
+            </a:r>
+            <a:endParaRPr lang="en-US" sz="900" dirty="0"/>
+          </a:p>
+          <a:p>
+            <a:pPr indent="0" marL="0">
+              <a:lnSpc>
+                <a:spcPts val="1300"/>
+              </a:lnSpc>
+              <a:buNone/>
+            </a:pPr>
+            <a:r>
+              <a:rPr lang="en-US" sz="900" dirty="0">
+                <a:solidFill>
+                  <a:srgbClr val="F87171"/>
+                </a:solidFill>
+                <a:latin typeface="Courier New" pitchFamily="34" charset="0"/>
+                <a:ea typeface="Courier New" pitchFamily="34" charset="-122"/>
+                <a:cs typeface="Courier New" pitchFamily="34" charset="-120"/>
+              </a:rPr>
+              <a:t>format.</a:t>
+            </a:r>
+            <a:endParaRPr lang="en-US" sz="900" dirty="0"/>
+          </a:p>
+        </p:txBody>
+      </p:sp>
+      <p:sp>
+        <p:nvSpPr>
+          <p:cNvPr id="18" name="Text 15"/>
+          <p:cNvSpPr txBox="1"/>
+          <p:nvPr/>
+        </p:nvSpPr>
+        <p:spPr>
+          <a:xfrm>
+            <a:off x="6638544" y="3817112"/>
+            <a:ext cx="4690872" cy="238252"/>
+          </a:xfrm>
+          <a:prstGeom prst="rect">
+            <a:avLst/>
+          </a:prstGeom>
+          <a:noFill/>
+          <a:ln/>
+        </p:spPr>
+        <p:txBody>
+          <a:bodyPr wrap="square" lIns="0" tIns="0" rIns="0" bIns="0" rtlCol="0" anchor="t"/>
+          <a:lstStyle/>
+          <a:p>
+            <a:pPr indent="0" marL="0">
+              <a:lnSpc>
+                <a:spcPts val="1300"/>
+              </a:lnSpc>
+              <a:buNone/>
+            </a:pPr>
+            <a:r>
+              <a:rPr lang="en-US" sz="950" i="1" dirty="0">
+                <a:solidFill>
                   <a:srgbClr val="6B7280"/>
+                </a:solidFill>
+                <a:latin typeface="Courier New" pitchFamily="34" charset="0"/>
+                <a:ea typeface="Courier New" pitchFamily="34" charset="-122"/>
+                <a:cs typeface="Courier New" pitchFamily="34" charset="-120"/>
+              </a:rPr>
+              <a:t>=== 11a's timeout never gets that far ===</a:t>
+            </a:r>
+            <a:endParaRPr lang="en-US" sz="950" dirty="0"/>
+          </a:p>
+        </p:txBody>
+      </p:sp>
+      <p:sp>
+        <p:nvSpPr>
+          <p:cNvPr id="19" name="Text 16"/>
+          <p:cNvSpPr txBox="1"/>
+          <p:nvPr/>
+        </p:nvSpPr>
+        <p:spPr>
+          <a:xfrm>
+            <a:off x="6638544" y="4165092"/>
+            <a:ext cx="4690872" cy="733552"/>
+          </a:xfrm>
+          <a:prstGeom prst="rect">
+            <a:avLst/>
+          </a:prstGeom>
+          <a:noFill/>
+          <a:ln/>
+        </p:spPr>
+        <p:txBody>
+          <a:bodyPr wrap="square" lIns="0" tIns="0" rIns="0" bIns="0" rtlCol="0" anchor="t"/>
+          <a:lstStyle/>
+          <a:p>
+            <a:pPr indent="0" marL="0">
+              <a:lnSpc>
+                <a:spcPts val="1300"/>
+              </a:lnSpc>
+              <a:buNone/>
+            </a:pPr>
+            <a:r>
+              <a:rPr lang="en-US" sz="900" dirty="0">
+                <a:solidFill>
+                  <a:srgbClr val="F87171"/>
+                </a:solidFill>
+                <a:latin typeface="Courier New" pitchFamily="34" charset="0"/>
+                <a:ea typeface="Courier New" pitchFamily="34" charset="-122"/>
+                <a:cs typeface="Courier New" pitchFamily="34" charset="-120"/>
+              </a:rPr>
+              <a:t>run_command failed: 'ping -n 6 127.0.0.1'</a:t>
+            </a:r>
+            <a:endParaRPr lang="en-US" sz="900" dirty="0"/>
+          </a:p>
+          <a:p>
+            <a:pPr indent="0" marL="0">
+              <a:lnSpc>
+                <a:spcPts val="1300"/>
+              </a:lnSpc>
+              <a:buNone/>
+            </a:pPr>
+            <a:r>
+              <a:rPr lang="en-US" sz="900" dirty="0">
+                <a:solidFill>
+                  <a:srgbClr val="F87171"/>
+                </a:solidFill>
+                <a:latin typeface="Courier New" pitchFamily="34" charset="0"/>
+                <a:ea typeface="Courier New" pitchFamily="34" charset="-122"/>
+                <a:cs typeface="Courier New" pitchFamily="34" charset="-120"/>
+              </a:rPr>
+              <a:t>is not on the allow list. Allowed: dotnet</a:t>
+            </a:r>
+            <a:endParaRPr lang="en-US" sz="900" dirty="0"/>
+          </a:p>
+          <a:p>
+            <a:pPr indent="0" marL="0">
+              <a:lnSpc>
+                <a:spcPts val="1300"/>
+              </a:lnSpc>
+              <a:buNone/>
+            </a:pPr>
+            <a:r>
+              <a:rPr lang="en-US" sz="900" dirty="0">
+                <a:solidFill>
+                  <a:srgbClr val="F87171"/>
+                </a:solidFill>
+                <a:latin typeface="Courier New" pitchFamily="34" charset="0"/>
+                <a:ea typeface="Courier New" pitchFamily="34" charset="-122"/>
+                <a:cs typeface="Courier New" pitchFamily="34" charset="-120"/>
+              </a:rPr>
+              <a:t>restore, dotnet build, dotnet test, dotnet</a:t>
+            </a:r>
+            <a:endParaRPr lang="en-US" sz="900" dirty="0"/>
+          </a:p>
+          <a:p>
+            <a:pPr indent="0" marL="0">
+              <a:lnSpc>
+                <a:spcPts val="1300"/>
+              </a:lnSpc>
+              <a:buNone/>
+            </a:pPr>
+            <a:r>
+              <a:rPr lang="en-US" sz="900" dirty="0">
+                <a:solidFill>
+                  <a:srgbClr val="F87171"/>
+                </a:solidFill>
+                <a:latin typeface="Courier New" pitchFamily="34" charset="0"/>
+                <a:ea typeface="Courier New" pitchFamily="34" charset="-122"/>
+                <a:cs typeface="Courier New" pitchFamily="34" charset="-120"/>
+              </a:rPr>
+              <a:t>format.</a:t>
+            </a:r>
+            <a:endParaRPr lang="en-US" sz="900" dirty="0"/>
+          </a:p>
+        </p:txBody>
+      </p:sp>
+      <p:sp>
+        <p:nvSpPr>
+          <p:cNvPr id="20" name="Text 17"/>
+          <p:cNvSpPr txBox="1"/>
+          <p:nvPr/>
+        </p:nvSpPr>
+        <p:spPr>
+          <a:xfrm>
+            <a:off x="6638544" y="5458968"/>
+            <a:ext cx="4690872" cy="548640"/>
+          </a:xfrm>
+          <a:prstGeom prst="rect">
+            <a:avLst/>
+          </a:prstGeom>
+          <a:noFill/>
+          <a:ln/>
+        </p:spPr>
+        <p:txBody>
+          <a:bodyPr wrap="square" lIns="0" tIns="0" rIns="0" bIns="0" rtlCol="0" anchor="t"/>
+          <a:lstStyle/>
+          <a:p>
+            <a:pPr indent="0" marL="0">
+              <a:buNone/>
+            </a:pPr>
+            <a:r>
+              <a:rPr lang="en-US" sz="1050" i="1" dirty="0">
+                <a:solidFill>
+                  <a:srgbClr val="CADCFC"/>
                 </a:solidFill>
                 <a:latin typeface="Calibri" pitchFamily="34" charset="0"/>
                 <a:ea typeface="Calibri" pitchFamily="34" charset="-122"/>
                 <a:cs typeface="Calibri" pitchFamily="34" charset="-120"/>
               </a:rPr>
-              <a:t>MODULE 11B — SHELL COMMAND EXECUTION: THE COMMAND ALLOW LIST</a:t>
-            </a:r>
-            <a:endParaRPr lang="en-US" sz="900" dirty="0"/>
-          </a:p>
-        </p:txBody>
-      </p:sp>
-      <p:sp>
-        <p:nvSpPr>
-          <p:cNvPr id="13" name="Text 10"/>
-          <p:cNvSpPr/>
-          <p:nvPr/>
-        </p:nvSpPr>
-        <p:spPr>
-          <a:xfrm>
-            <a:off x="11338560" y="6510528"/>
-            <a:ext cx="365760" cy="274320"/>
-          </a:xfrm>
-          <a:prstGeom prst="rect">
-            <a:avLst/>
-          </a:prstGeom>
-          <a:noFill/>
-          <a:ln/>
-        </p:spPr>
-        <p:txBody>
-          <a:bodyPr wrap="square" rtlCol="0" anchor="ctr"/>
-          <a:lstStyle/>
-          <a:p>
-            <a:pPr algn="r" indent="0" marL="0">
-              <a:buNone/>
-            </a:pPr>
-            <a:r>
-              <a:rPr lang="en-US" sz="900" dirty="0">
-                <a:solidFill>
-                  <a:srgbClr val="6B7280"/>
-                </a:solidFill>
-                <a:latin typeface="Calibri" pitchFamily="34" charset="0"/>
-                <a:ea typeface="Calibri" pitchFamily="34" charset="-122"/>
-                <a:cs typeface="Calibri" pitchFamily="34" charset="-120"/>
-              </a:rPr>
-              <a:t>6</a:t>
-            </a:r>
-            <a:endParaRPr lang="en-US" sz="900" dirty="0"/>
+              <a:t>Same executor underneath, same never-throw invoker from Module 5a — the only thing that changed is that something now gets to say no before Process.Start is ever called.</a:t>
+            </a:r>
+            <a:endParaRPr lang="en-US" sz="1050" dirty="0"/>
           </a:p>
         </p:txBody>
       </p:sp>
